--- a/curriculum/week-01/week1-topic-04-consensus.pptx
+++ b/curriculum/week-01/week1-topic-04-consensus.pptx
@@ -3270,8 +3270,8 @@
         </p:nvSpPr>
         <p:spPr>
           <a:xfrm>
-            <a:off x="822960" y="1188720"/>
-            <a:ext cx="5486400" cy="1188720"/>
+            <a:off x="822960" y="502920"/>
+            <a:ext cx="9144000" cy="365760"/>
           </a:xfrm>
           <a:prstGeom prst="rect">
             <a:avLst/>
@@ -3290,13 +3290,13 @@
               </a:lnSpc>
             </a:pPr>
             <a:r>
-              <a:rPr sz="10000" b="1" i="0">
-                <a:solidFill>
-                  <a:srgbClr val="FFFFFF"/>
-                </a:solidFill>
-                <a:latin typeface="Century Gothic"/>
-              </a:rPr>
-              <a:t>04</a:t>
+              <a:rPr sz="1300" b="1" i="0">
+                <a:solidFill>
+                  <a:srgbClr val="FFC53D"/>
+                </a:solidFill>
+                <a:latin typeface="Calibri"/>
+              </a:rPr>
+              <a:t>BlockchainCourse · Curriculum · Week 01 · Topic 04 of 04</a:t>
             </a:r>
           </a:p>
         </p:txBody>
@@ -3309,8 +3309,8 @@
         </p:nvSpPr>
         <p:spPr>
           <a:xfrm>
-            <a:off x="822960" y="2423160"/>
-            <a:ext cx="8961120" cy="1554480"/>
+            <a:off x="822960" y="1188720"/>
+            <a:ext cx="5486400" cy="1188720"/>
           </a:xfrm>
           <a:prstGeom prst="rect">
             <a:avLst/>
@@ -3325,17 +3325,17 @@
           <a:p>
             <a:pPr algn="l">
               <a:lnSpc>
-                <a:spcPct val="105000"/>
-              </a:lnSpc>
-            </a:pPr>
-            <a:r>
-              <a:rPr sz="4600" b="1" i="0">
+                <a:spcPct val="115000"/>
+              </a:lnSpc>
+            </a:pPr>
+            <a:r>
+              <a:rPr sz="10000" b="1" i="0">
                 <a:solidFill>
                   <a:srgbClr val="FFFFFF"/>
                 </a:solidFill>
                 <a:latin typeface="Century Gothic"/>
               </a:rPr>
-              <a:t>Consensus</a:t>
+              <a:t>04</a:t>
             </a:r>
           </a:p>
         </p:txBody>
@@ -3348,8 +3348,8 @@
         </p:nvSpPr>
         <p:spPr>
           <a:xfrm>
-            <a:off x="822960" y="4160520"/>
-            <a:ext cx="6858000" cy="1097280"/>
+            <a:off x="822960" y="2423160"/>
+            <a:ext cx="8961120" cy="1554480"/>
           </a:xfrm>
           <a:prstGeom prst="rect">
             <a:avLst/>
@@ -3364,17 +3364,17 @@
           <a:p>
             <a:pPr algn="l">
               <a:lnSpc>
-                <a:spcPct val="125000"/>
-              </a:lnSpc>
-            </a:pPr>
-            <a:r>
-              <a:rPr sz="1900" b="0" i="0">
+                <a:spcPct val="105000"/>
+              </a:lnSpc>
+            </a:pPr>
+            <a:r>
+              <a:rPr sz="4600" b="1" i="0">
                 <a:solidFill>
                   <a:srgbClr val="FFFFFF"/>
                 </a:solidFill>
-                <a:latin typeface="Calibri"/>
-              </a:rPr>
-              <a:t>How thousands of strangers agree on one shared truth, with no referee.</a:t>
+                <a:latin typeface="Century Gothic"/>
+              </a:rPr>
+              <a:t>Consensus</a:t>
             </a:r>
           </a:p>
         </p:txBody>
@@ -3387,8 +3387,8 @@
         </p:nvSpPr>
         <p:spPr>
           <a:xfrm>
-            <a:off x="822960" y="6446520"/>
-            <a:ext cx="8229600" cy="320040"/>
+            <a:off x="822960" y="4160520"/>
+            <a:ext cx="6858000" cy="1097280"/>
           </a:xfrm>
           <a:prstGeom prst="rect">
             <a:avLst/>
@@ -3403,6 +3403,277 @@
           <a:p>
             <a:pPr algn="l">
               <a:lnSpc>
+                <a:spcPct val="125000"/>
+              </a:lnSpc>
+            </a:pPr>
+            <a:r>
+              <a:rPr sz="1900" b="0" i="0">
+                <a:solidFill>
+                  <a:srgbClr val="FFFFFF"/>
+                </a:solidFill>
+                <a:latin typeface="Calibri"/>
+              </a:rPr>
+              <a:t>How thousands of strangers agree on one shared truth, with no referee.</a:t>
+            </a:r>
+          </a:p>
+        </p:txBody>
+      </p:sp>
+      <p:sp>
+        <p:nvSpPr>
+          <p:cNvPr id="10" name="Rounded Rectangle 9"/>
+          <p:cNvSpPr/>
+          <p:nvPr/>
+        </p:nvSpPr>
+        <p:spPr>
+          <a:xfrm>
+            <a:off x="822960" y="5669280"/>
+            <a:ext cx="1100937" cy="402336"/>
+          </a:xfrm>
+          <a:prstGeom prst="roundRect">
+            <a:avLst>
+              <a:gd name="adj" fmla="val 50000"/>
+            </a:avLst>
+          </a:prstGeom>
+          <a:solidFill>
+            <a:srgbClr val="FFFFFF">
+              <a:alpha val="14000"/>
+            </a:srgbClr>
+          </a:solidFill>
+          <a:ln w="9525">
+            <a:solidFill>
+              <a:srgbClr val="FFFFFF"/>
+            </a:solidFill>
+          </a:ln>
+          <a:effectLst/>
+        </p:spPr>
+        <p:style>
+          <a:lnRef idx="1">
+            <a:schemeClr val="accent1"/>
+          </a:lnRef>
+          <a:fillRef idx="3">
+            <a:schemeClr val="accent1"/>
+          </a:fillRef>
+          <a:effectRef idx="2">
+            <a:schemeClr val="accent1"/>
+          </a:effectRef>
+          <a:fontRef idx="minor">
+            <a:schemeClr val="lt1"/>
+          </a:fontRef>
+        </p:style>
+        <p:txBody>
+          <a:bodyPr rtlCol="0" anchor="ctr" lIns="109728" rIns="109728" tIns="18288" bIns="18288" wrap="none"/>
+          <a:lstStyle/>
+          <a:p>
+            <a:pPr algn="ctr"/>
+            <a:r>
+              <a:rPr sz="1100" b="0">
+                <a:solidFill>
+                  <a:srgbClr val="DDD9E8"/>
+                </a:solidFill>
+                <a:latin typeface="Calibri"/>
+              </a:rPr>
+              <a:t>01 · Hashing</a:t>
+            </a:r>
+          </a:p>
+        </p:txBody>
+      </p:sp>
+      <p:sp>
+        <p:nvSpPr>
+          <p:cNvPr id="11" name="Rounded Rectangle 10"/>
+          <p:cNvSpPr/>
+          <p:nvPr/>
+        </p:nvSpPr>
+        <p:spPr>
+          <a:xfrm>
+            <a:off x="2070201" y="5669280"/>
+            <a:ext cx="2022652" cy="402336"/>
+          </a:xfrm>
+          <a:prstGeom prst="roundRect">
+            <a:avLst>
+              <a:gd name="adj" fmla="val 50000"/>
+            </a:avLst>
+          </a:prstGeom>
+          <a:solidFill>
+            <a:srgbClr val="FFFFFF">
+              <a:alpha val="14000"/>
+            </a:srgbClr>
+          </a:solidFill>
+          <a:ln w="9525">
+            <a:solidFill>
+              <a:srgbClr val="FFFFFF"/>
+            </a:solidFill>
+          </a:ln>
+          <a:effectLst/>
+        </p:spPr>
+        <p:style>
+          <a:lnRef idx="1">
+            <a:schemeClr val="accent1"/>
+          </a:lnRef>
+          <a:fillRef idx="3">
+            <a:schemeClr val="accent1"/>
+          </a:fillRef>
+          <a:effectRef idx="2">
+            <a:schemeClr val="accent1"/>
+          </a:effectRef>
+          <a:fontRef idx="minor">
+            <a:schemeClr val="lt1"/>
+          </a:fontRef>
+        </p:style>
+        <p:txBody>
+          <a:bodyPr rtlCol="0" anchor="ctr" lIns="109728" rIns="109728" tIns="18288" bIns="18288" wrap="none"/>
+          <a:lstStyle/>
+          <a:p>
+            <a:pPr algn="ctr"/>
+            <a:r>
+              <a:rPr sz="1100" b="0">
+                <a:solidFill>
+                  <a:srgbClr val="DDD9E8"/>
+                </a:solidFill>
+                <a:latin typeface="Calibri"/>
+              </a:rPr>
+              <a:t>02 · Public / Private Keys</a:t>
+            </a:r>
+          </a:p>
+        </p:txBody>
+      </p:sp>
+      <p:sp>
+        <p:nvSpPr>
+          <p:cNvPr id="12" name="Rounded Rectangle 11"/>
+          <p:cNvSpPr/>
+          <p:nvPr/>
+        </p:nvSpPr>
+        <p:spPr>
+          <a:xfrm>
+            <a:off x="4239157" y="5669280"/>
+            <a:ext cx="1627632" cy="402336"/>
+          </a:xfrm>
+          <a:prstGeom prst="roundRect">
+            <a:avLst>
+              <a:gd name="adj" fmla="val 50000"/>
+            </a:avLst>
+          </a:prstGeom>
+          <a:solidFill>
+            <a:srgbClr val="FFFFFF">
+              <a:alpha val="14000"/>
+            </a:srgbClr>
+          </a:solidFill>
+          <a:ln w="9525">
+            <a:solidFill>
+              <a:srgbClr val="FFFFFF"/>
+            </a:solidFill>
+          </a:ln>
+          <a:effectLst/>
+        </p:spPr>
+        <p:style>
+          <a:lnRef idx="1">
+            <a:schemeClr val="accent1"/>
+          </a:lnRef>
+          <a:fillRef idx="3">
+            <a:schemeClr val="accent1"/>
+          </a:fillRef>
+          <a:effectRef idx="2">
+            <a:schemeClr val="accent1"/>
+          </a:effectRef>
+          <a:fontRef idx="minor">
+            <a:schemeClr val="lt1"/>
+          </a:fontRef>
+        </p:style>
+        <p:txBody>
+          <a:bodyPr rtlCol="0" anchor="ctr" lIns="109728" rIns="109728" tIns="18288" bIns="18288" wrap="none"/>
+          <a:lstStyle/>
+          <a:p>
+            <a:pPr algn="ctr"/>
+            <a:r>
+              <a:rPr sz="1100" b="0">
+                <a:solidFill>
+                  <a:srgbClr val="DDD9E8"/>
+                </a:solidFill>
+                <a:latin typeface="Calibri"/>
+              </a:rPr>
+              <a:t>03 · Blocks &amp; Chains</a:t>
+            </a:r>
+          </a:p>
+        </p:txBody>
+      </p:sp>
+      <p:sp>
+        <p:nvSpPr>
+          <p:cNvPr id="13" name="Rounded Rectangle 12"/>
+          <p:cNvSpPr/>
+          <p:nvPr/>
+        </p:nvSpPr>
+        <p:spPr>
+          <a:xfrm>
+            <a:off x="6013093" y="5669280"/>
+            <a:ext cx="1232611" cy="402336"/>
+          </a:xfrm>
+          <a:prstGeom prst="roundRect">
+            <a:avLst>
+              <a:gd name="adj" fmla="val 50000"/>
+            </a:avLst>
+          </a:prstGeom>
+          <a:solidFill>
+            <a:srgbClr val="12746A"/>
+          </a:solidFill>
+          <a:ln>
+            <a:noFill/>
+          </a:ln>
+          <a:effectLst/>
+        </p:spPr>
+        <p:style>
+          <a:lnRef idx="1">
+            <a:schemeClr val="accent1"/>
+          </a:lnRef>
+          <a:fillRef idx="3">
+            <a:schemeClr val="accent1"/>
+          </a:fillRef>
+          <a:effectRef idx="2">
+            <a:schemeClr val="accent1"/>
+          </a:effectRef>
+          <a:fontRef idx="minor">
+            <a:schemeClr val="lt1"/>
+          </a:fontRef>
+        </p:style>
+        <p:txBody>
+          <a:bodyPr rtlCol="0" anchor="ctr" lIns="109728" rIns="109728" tIns="18288" bIns="18288" wrap="none"/>
+          <a:lstStyle/>
+          <a:p>
+            <a:pPr algn="ctr"/>
+            <a:r>
+              <a:rPr sz="1100" b="1">
+                <a:solidFill>
+                  <a:srgbClr val="FFFFFF"/>
+                </a:solidFill>
+                <a:latin typeface="Calibri"/>
+              </a:rPr>
+              <a:t>04 · Consensus</a:t>
+            </a:r>
+          </a:p>
+        </p:txBody>
+      </p:sp>
+      <p:sp>
+        <p:nvSpPr>
+          <p:cNvPr id="14" name="TextBox 13"/>
+          <p:cNvSpPr txBox="1"/>
+          <p:nvPr/>
+        </p:nvSpPr>
+        <p:spPr>
+          <a:xfrm>
+            <a:off x="822960" y="6446520"/>
+            <a:ext cx="8229600" cy="320040"/>
+          </a:xfrm>
+          <a:prstGeom prst="rect">
+            <a:avLst/>
+          </a:prstGeom>
+          <a:noFill/>
+        </p:spPr>
+        <p:txBody>
+          <a:bodyPr wrap="square" anchor="t" lIns="0" rIns="0" tIns="0" bIns="0">
+            <a:spAutoFit/>
+          </a:bodyPr>
+          <a:lstStyle/>
+          <a:p>
+            <a:pPr algn="l">
+              <a:lnSpc>
                 <a:spcPct val="115000"/>
               </a:lnSpc>
             </a:pPr>
@@ -3420,7 +3691,7 @@
       </p:sp>
       <p:sp>
         <p:nvSpPr>
-          <p:cNvPr id="10" name="TextBox 9"/>
+          <p:cNvPr id="15" name="TextBox 14"/>
           <p:cNvSpPr txBox="1"/>
           <p:nvPr/>
         </p:nvSpPr>

--- a/curriculum/week-01/week1-topic-04-consensus.pptx
+++ b/curriculum/week-01/week1-topic-04-consensus.pptx
@@ -20,6 +20,9 @@
     <p:sldId id="268" r:id="rId19"/>
     <p:sldId id="269" r:id="rId20"/>
     <p:sldId id="270" r:id="rId21"/>
+    <p:sldId id="271" r:id="rId22"/>
+    <p:sldId id="272" r:id="rId23"/>
+    <p:sldId id="273" r:id="rId24"/>
   </p:sldIdLst>
   <p:sldSz cx="12191695" cy="6858000" type="screen4x3"/>
   <p:notesSz cx="6858000" cy="9144000"/>
@@ -3146,51 +3149,162 @@
           </a:p>
         </p:txBody>
       </p:sp>
-      <p:pic>
-        <p:nvPicPr>
-          <p:cNvPr id="3" name="Picture 2" descr="_cover_04.jpg"/>
-          <p:cNvPicPr>
-            <a:picLocks noChangeAspect="1"/>
-          </p:cNvPicPr>
-          <p:nvPr/>
-        </p:nvPicPr>
-        <p:blipFill>
-          <a:blip r:embed="rId2"/>
-          <a:stretch>
-            <a:fillRect/>
-          </a:stretch>
-        </p:blipFill>
-        <p:spPr>
-          <a:xfrm>
-            <a:off x="0" y="0"/>
-            <a:ext cx="12191695" cy="6858000"/>
-          </a:xfrm>
-          <a:prstGeom prst="rect">
-            <a:avLst/>
-          </a:prstGeom>
-        </p:spPr>
-      </p:pic>
-      <p:sp>
-        <p:nvSpPr>
-          <p:cNvPr id="4" name="Rectangle 3"/>
+      <p:sp>
+        <p:nvSpPr>
+          <p:cNvPr id="3" name="TextBox 2"/>
+          <p:cNvSpPr txBox="1"/>
+          <p:nvPr/>
+        </p:nvSpPr>
+        <p:spPr>
+          <a:xfrm>
+            <a:off x="822960" y="822960"/>
+            <a:ext cx="10058400" cy="365760"/>
+          </a:xfrm>
+          <a:prstGeom prst="rect">
+            <a:avLst/>
+          </a:prstGeom>
+          <a:noFill/>
+        </p:spPr>
+        <p:txBody>
+          <a:bodyPr wrap="square" anchor="t" lIns="0" rIns="0" tIns="0" bIns="0">
+            <a:spAutoFit/>
+          </a:bodyPr>
+          <a:lstStyle/>
+          <a:p>
+            <a:pPr algn="l">
+              <a:lnSpc>
+                <a:spcPct val="115000"/>
+              </a:lnSpc>
+            </a:pPr>
+            <a:r>
+              <a:rPr sz="1300" b="1" i="0">
+                <a:solidFill>
+                  <a:srgbClr val="FFC53D"/>
+                </a:solidFill>
+                <a:latin typeface="Calibri"/>
+              </a:rPr>
+              <a:t>BLOCKCHAINCOURSE</a:t>
+            </a:r>
+          </a:p>
+        </p:txBody>
+      </p:sp>
+      <p:sp>
+        <p:nvSpPr>
+          <p:cNvPr id="4" name="TextBox 3"/>
+          <p:cNvSpPr txBox="1"/>
+          <p:nvPr/>
+        </p:nvSpPr>
+        <p:spPr>
+          <a:xfrm>
+            <a:off x="822960" y="1371600"/>
+            <a:ext cx="9144000" cy="1600200"/>
+          </a:xfrm>
+          <a:prstGeom prst="rect">
+            <a:avLst/>
+          </a:prstGeom>
+          <a:noFill/>
+        </p:spPr>
+        <p:txBody>
+          <a:bodyPr wrap="square" anchor="t" lIns="0" rIns="0" tIns="0" bIns="0">
+            <a:spAutoFit/>
+          </a:bodyPr>
+          <a:lstStyle/>
+          <a:p>
+            <a:pPr algn="l">
+              <a:lnSpc>
+                <a:spcPct val="105000"/>
+              </a:lnSpc>
+            </a:pPr>
+            <a:r>
+              <a:rPr sz="4200" b="1" i="0">
+                <a:solidFill>
+                  <a:srgbClr val="FFFFFF"/>
+                </a:solidFill>
+                <a:latin typeface="Century Gothic"/>
+              </a:rPr>
+              <a:t>Practical Engineering</a:t>
+            </a:r>
+          </a:p>
+          <a:p>
+            <a:pPr algn="l">
+              <a:lnSpc>
+                <a:spcPct val="105000"/>
+              </a:lnSpc>
+            </a:pPr>
+            <a:r>
+              <a:rPr sz="4200" b="1" i="0">
+                <a:solidFill>
+                  <a:srgbClr val="FFFFFF"/>
+                </a:solidFill>
+                <a:latin typeface="Century Gothic"/>
+              </a:rPr>
+              <a:t>Over Hype</a:t>
+            </a:r>
+          </a:p>
+        </p:txBody>
+      </p:sp>
+      <p:sp>
+        <p:nvSpPr>
+          <p:cNvPr id="5" name="TextBox 4"/>
+          <p:cNvSpPr txBox="1"/>
+          <p:nvPr/>
+        </p:nvSpPr>
+        <p:spPr>
+          <a:xfrm>
+            <a:off x="822960" y="3246120"/>
+            <a:ext cx="8961120" cy="1463040"/>
+          </a:xfrm>
+          <a:prstGeom prst="rect">
+            <a:avLst/>
+          </a:prstGeom>
+          <a:noFill/>
+        </p:spPr>
+        <p:txBody>
+          <a:bodyPr wrap="square" anchor="t" lIns="0" rIns="0" tIns="0" bIns="0">
+            <a:spAutoFit/>
+          </a:bodyPr>
+          <a:lstStyle/>
+          <a:p>
+            <a:pPr algn="l">
+              <a:lnSpc>
+                <a:spcPct val="140000"/>
+              </a:lnSpc>
+            </a:pPr>
+            <a:r>
+              <a:rPr sz="1650" b="0" i="0">
+                <a:solidFill>
+                  <a:srgbClr val="D8D3E8"/>
+                </a:solidFill>
+                <a:latin typeface="Calibri"/>
+              </a:rPr>
+              <a:t>Most newcomers memorize buzzwords or copy-paste Solidity templates they can't explain. This course is built differently: understand EVM execution, state transitions, and security trade-offs — before you ever touch a framework.</a:t>
+            </a:r>
+          </a:p>
+        </p:txBody>
+      </p:sp>
+      <p:sp>
+        <p:nvSpPr>
+          <p:cNvPr id="6" name="Rounded Rectangle 5"/>
           <p:cNvSpPr/>
           <p:nvPr/>
         </p:nvSpPr>
         <p:spPr>
           <a:xfrm>
-            <a:off x="0" y="0"/>
-            <a:ext cx="12191695" cy="6858000"/>
-          </a:xfrm>
-          <a:prstGeom prst="rect">
-            <a:avLst/>
+            <a:off x="822960" y="4892040"/>
+            <a:ext cx="822960" cy="384048"/>
+          </a:xfrm>
+          <a:prstGeom prst="roundRect">
+            <a:avLst>
+              <a:gd name="adj" fmla="val 50000"/>
+            </a:avLst>
           </a:prstGeom>
           <a:solidFill>
-            <a:srgbClr val="1C1730">
-              <a:alpha val="45000"/>
-            </a:srgbClr>
+            <a:srgbClr val="FFF9EB"/>
           </a:solidFill>
-          <a:ln>
-            <a:noFill/>
+          <a:ln w="12700">
+            <a:solidFill>
+              <a:srgbClr val="FFC53D"/>
+            </a:solidFill>
           </a:ln>
           <a:effectLst/>
         </p:spPr>
@@ -3209,34 +3323,45 @@
           </a:fontRef>
         </p:style>
         <p:txBody>
-          <a:bodyPr rtlCol="0" anchor="ctr"/>
+          <a:bodyPr rtlCol="0" anchor="ctr" lIns="109728" rIns="109728" tIns="18288" bIns="18288" wrap="none"/>
           <a:lstStyle/>
           <a:p>
             <a:pPr algn="ctr"/>
-          </a:p>
-        </p:txBody>
-      </p:sp>
-      <p:sp>
-        <p:nvSpPr>
-          <p:cNvPr id="5" name="Rectangle 4"/>
+            <a:r>
+              <a:rPr sz="1200" b="1">
+                <a:solidFill>
+                  <a:srgbClr val="FFC53D"/>
+                </a:solidFill>
+                <a:latin typeface="Calibri"/>
+              </a:rPr>
+              <a:t>2 Halves</a:t>
+            </a:r>
+          </a:p>
+        </p:txBody>
+      </p:sp>
+      <p:sp>
+        <p:nvSpPr>
+          <p:cNvPr id="7" name="Rounded Rectangle 6"/>
           <p:cNvSpPr/>
           <p:nvPr/>
         </p:nvSpPr>
         <p:spPr>
           <a:xfrm>
-            <a:off x="0" y="0"/>
-            <a:ext cx="12191695" cy="6858000"/>
-          </a:xfrm>
-          <a:prstGeom prst="rect">
-            <a:avLst/>
+            <a:off x="1783080" y="4892040"/>
+            <a:ext cx="745236" cy="384048"/>
+          </a:xfrm>
+          <a:prstGeom prst="roundRect">
+            <a:avLst>
+              <a:gd name="adj" fmla="val 50000"/>
+            </a:avLst>
           </a:prstGeom>
           <a:solidFill>
-            <a:srgbClr val="12746A">
-              <a:alpha val="35000"/>
-            </a:srgbClr>
+            <a:srgbClr val="FFF9EB"/>
           </a:solidFill>
-          <a:ln>
-            <a:noFill/>
+          <a:ln w="12700">
+            <a:solidFill>
+              <a:srgbClr val="FFC53D"/>
+            </a:solidFill>
           </a:ln>
           <a:effectLst/>
         </p:spPr>
@@ -3255,179 +3380,32 @@
           </a:fontRef>
         </p:style>
         <p:txBody>
-          <a:bodyPr rtlCol="0" anchor="ctr"/>
+          <a:bodyPr rtlCol="0" anchor="ctr" lIns="109728" rIns="109728" tIns="18288" bIns="18288" wrap="none"/>
           <a:lstStyle/>
           <a:p>
             <a:pPr algn="ctr"/>
-          </a:p>
-        </p:txBody>
-      </p:sp>
-      <p:sp>
-        <p:nvSpPr>
-          <p:cNvPr id="6" name="TextBox 5"/>
-          <p:cNvSpPr txBox="1"/>
-          <p:nvPr/>
-        </p:nvSpPr>
-        <p:spPr>
-          <a:xfrm>
-            <a:off x="822960" y="502920"/>
-            <a:ext cx="9144000" cy="365760"/>
-          </a:xfrm>
-          <a:prstGeom prst="rect">
-            <a:avLst/>
-          </a:prstGeom>
-          <a:noFill/>
-        </p:spPr>
-        <p:txBody>
-          <a:bodyPr wrap="square" anchor="t" lIns="0" rIns="0" tIns="0" bIns="0">
-            <a:spAutoFit/>
-          </a:bodyPr>
-          <a:lstStyle/>
-          <a:p>
-            <a:pPr algn="l">
-              <a:lnSpc>
-                <a:spcPct val="115000"/>
-              </a:lnSpc>
-            </a:pPr>
-            <a:r>
-              <a:rPr sz="1300" b="1" i="0">
+            <a:r>
+              <a:rPr sz="1200" b="1">
                 <a:solidFill>
                   <a:srgbClr val="FFC53D"/>
                 </a:solidFill>
                 <a:latin typeface="Calibri"/>
               </a:rPr>
-              <a:t>BlockchainCourse · Curriculum · Week 01 · Topic 04 of 04</a:t>
-            </a:r>
-          </a:p>
-        </p:txBody>
-      </p:sp>
-      <p:sp>
-        <p:nvSpPr>
-          <p:cNvPr id="7" name="TextBox 6"/>
-          <p:cNvSpPr txBox="1"/>
-          <p:nvPr/>
-        </p:nvSpPr>
-        <p:spPr>
-          <a:xfrm>
-            <a:off x="822960" y="1188720"/>
-            <a:ext cx="5486400" cy="1188720"/>
-          </a:xfrm>
-          <a:prstGeom prst="rect">
-            <a:avLst/>
-          </a:prstGeom>
-          <a:noFill/>
-        </p:spPr>
-        <p:txBody>
-          <a:bodyPr wrap="square" anchor="t" lIns="0" rIns="0" tIns="0" bIns="0">
-            <a:spAutoFit/>
-          </a:bodyPr>
-          <a:lstStyle/>
-          <a:p>
-            <a:pPr algn="l">
-              <a:lnSpc>
-                <a:spcPct val="115000"/>
-              </a:lnSpc>
-            </a:pPr>
-            <a:r>
-              <a:rPr sz="10000" b="1" i="0">
-                <a:solidFill>
-                  <a:srgbClr val="FFFFFF"/>
-                </a:solidFill>
-                <a:latin typeface="Century Gothic"/>
-              </a:rPr>
-              <a:t>04</a:t>
-            </a:r>
-          </a:p>
-        </p:txBody>
-      </p:sp>
-      <p:sp>
-        <p:nvSpPr>
-          <p:cNvPr id="8" name="TextBox 7"/>
-          <p:cNvSpPr txBox="1"/>
-          <p:nvPr/>
-        </p:nvSpPr>
-        <p:spPr>
-          <a:xfrm>
-            <a:off x="822960" y="2423160"/>
-            <a:ext cx="8961120" cy="1554480"/>
-          </a:xfrm>
-          <a:prstGeom prst="rect">
-            <a:avLst/>
-          </a:prstGeom>
-          <a:noFill/>
-        </p:spPr>
-        <p:txBody>
-          <a:bodyPr wrap="square" anchor="t" lIns="0" rIns="0" tIns="0" bIns="0">
-            <a:spAutoFit/>
-          </a:bodyPr>
-          <a:lstStyle/>
-          <a:p>
-            <a:pPr algn="l">
-              <a:lnSpc>
-                <a:spcPct val="105000"/>
-              </a:lnSpc>
-            </a:pPr>
-            <a:r>
-              <a:rPr sz="4600" b="1" i="0">
-                <a:solidFill>
-                  <a:srgbClr val="FFFFFF"/>
-                </a:solidFill>
-                <a:latin typeface="Century Gothic"/>
-              </a:rPr>
-              <a:t>Consensus</a:t>
-            </a:r>
-          </a:p>
-        </p:txBody>
-      </p:sp>
-      <p:sp>
-        <p:nvSpPr>
-          <p:cNvPr id="9" name="TextBox 8"/>
-          <p:cNvSpPr txBox="1"/>
-          <p:nvPr/>
-        </p:nvSpPr>
-        <p:spPr>
-          <a:xfrm>
-            <a:off x="822960" y="4160520"/>
-            <a:ext cx="6858000" cy="1097280"/>
-          </a:xfrm>
-          <a:prstGeom prst="rect">
-            <a:avLst/>
-          </a:prstGeom>
-          <a:noFill/>
-        </p:spPr>
-        <p:txBody>
-          <a:bodyPr wrap="square" anchor="t" lIns="0" rIns="0" tIns="0" bIns="0">
-            <a:spAutoFit/>
-          </a:bodyPr>
-          <a:lstStyle/>
-          <a:p>
-            <a:pPr algn="l">
-              <a:lnSpc>
-                <a:spcPct val="125000"/>
-              </a:lnSpc>
-            </a:pPr>
-            <a:r>
-              <a:rPr sz="1900" b="0" i="0">
-                <a:solidFill>
-                  <a:srgbClr val="FFFFFF"/>
-                </a:solidFill>
-                <a:latin typeface="Calibri"/>
-              </a:rPr>
-              <a:t>How thousands of strangers agree on one shared truth, with no referee.</a:t>
-            </a:r>
-          </a:p>
-        </p:txBody>
-      </p:sp>
-      <p:sp>
-        <p:nvSpPr>
-          <p:cNvPr id="10" name="Rounded Rectangle 9"/>
+              <a:t>8 Weeks</a:t>
+            </a:r>
+          </a:p>
+        </p:txBody>
+      </p:sp>
+      <p:sp>
+        <p:nvSpPr>
+          <p:cNvPr id="8" name="Rounded Rectangle 7"/>
           <p:cNvSpPr/>
           <p:nvPr/>
         </p:nvSpPr>
         <p:spPr>
           <a:xfrm>
-            <a:off x="822960" y="5669280"/>
-            <a:ext cx="1100937" cy="402336"/>
+            <a:off x="2665476" y="4892040"/>
+            <a:ext cx="2144268" cy="384048"/>
           </a:xfrm>
           <a:prstGeom prst="roundRect">
             <a:avLst>
@@ -3435,13 +3413,11 @@
             </a:avLst>
           </a:prstGeom>
           <a:solidFill>
-            <a:srgbClr val="FFFFFF">
-              <a:alpha val="14000"/>
-            </a:srgbClr>
+            <a:srgbClr val="FFF9EB"/>
           </a:solidFill>
-          <a:ln w="9525">
+          <a:ln w="12700">
             <a:solidFill>
-              <a:srgbClr val="FFFFFF"/>
+              <a:srgbClr val="FFC53D"/>
             </a:solidFill>
           </a:ln>
           <a:effectLst/>
@@ -3466,27 +3442,27 @@
           <a:p>
             <a:pPr algn="ctr"/>
             <a:r>
-              <a:rPr sz="1100" b="0">
-                <a:solidFill>
-                  <a:srgbClr val="DDD9E8"/>
+              <a:rPr sz="1200" b="1">
+                <a:solidFill>
+                  <a:srgbClr val="FFC53D"/>
                 </a:solidFill>
                 <a:latin typeface="Calibri"/>
               </a:rPr>
-              <a:t>01 · Hashing</a:t>
-            </a:r>
-          </a:p>
-        </p:txBody>
-      </p:sp>
-      <p:sp>
-        <p:nvSpPr>
-          <p:cNvPr id="11" name="Rounded Rectangle 10"/>
+              <a:t>Hackathon-Ready by Week 4</a:t>
+            </a:r>
+          </a:p>
+        </p:txBody>
+      </p:sp>
+      <p:sp>
+        <p:nvSpPr>
+          <p:cNvPr id="9" name="Rounded Rectangle 8"/>
           <p:cNvSpPr/>
           <p:nvPr/>
         </p:nvSpPr>
         <p:spPr>
           <a:xfrm>
-            <a:off x="2070201" y="5669280"/>
-            <a:ext cx="2022652" cy="402336"/>
+            <a:off x="4946904" y="4892040"/>
+            <a:ext cx="1988820" cy="384048"/>
           </a:xfrm>
           <a:prstGeom prst="roundRect">
             <a:avLst>
@@ -3494,13 +3470,11 @@
             </a:avLst>
           </a:prstGeom>
           <a:solidFill>
-            <a:srgbClr val="FFFFFF">
-              <a:alpha val="14000"/>
-            </a:srgbClr>
+            <a:srgbClr val="FFF9EB"/>
           </a:solidFill>
-          <a:ln w="9525">
+          <a:ln w="12700">
             <a:solidFill>
-              <a:srgbClr val="FFFFFF"/>
+              <a:srgbClr val="FFC53D"/>
             </a:solidFill>
           </a:ln>
           <a:effectLst/>
@@ -3525,173 +3499,20 @@
           <a:p>
             <a:pPr algn="ctr"/>
             <a:r>
-              <a:rPr sz="1100" b="0">
-                <a:solidFill>
-                  <a:srgbClr val="DDD9E8"/>
+              <a:rPr sz="1200" b="1">
+                <a:solidFill>
+                  <a:srgbClr val="FFC53D"/>
                 </a:solidFill>
                 <a:latin typeface="Calibri"/>
               </a:rPr>
-              <a:t>02 · Public / Private Keys</a:t>
-            </a:r>
-          </a:p>
-        </p:txBody>
-      </p:sp>
-      <p:sp>
-        <p:nvSpPr>
-          <p:cNvPr id="12" name="Rounded Rectangle 11"/>
-          <p:cNvSpPr/>
-          <p:nvPr/>
-        </p:nvSpPr>
-        <p:spPr>
-          <a:xfrm>
-            <a:off x="4239157" y="5669280"/>
-            <a:ext cx="1627632" cy="402336"/>
-          </a:xfrm>
-          <a:prstGeom prst="roundRect">
-            <a:avLst>
-              <a:gd name="adj" fmla="val 50000"/>
-            </a:avLst>
-          </a:prstGeom>
-          <a:solidFill>
-            <a:srgbClr val="FFFFFF">
-              <a:alpha val="14000"/>
-            </a:srgbClr>
-          </a:solidFill>
-          <a:ln w="9525">
-            <a:solidFill>
-              <a:srgbClr val="FFFFFF"/>
-            </a:solidFill>
-          </a:ln>
-          <a:effectLst/>
-        </p:spPr>
-        <p:style>
-          <a:lnRef idx="1">
-            <a:schemeClr val="accent1"/>
-          </a:lnRef>
-          <a:fillRef idx="3">
-            <a:schemeClr val="accent1"/>
-          </a:fillRef>
-          <a:effectRef idx="2">
-            <a:schemeClr val="accent1"/>
-          </a:effectRef>
-          <a:fontRef idx="minor">
-            <a:schemeClr val="lt1"/>
-          </a:fontRef>
-        </p:style>
-        <p:txBody>
-          <a:bodyPr rtlCol="0" anchor="ctr" lIns="109728" rIns="109728" tIns="18288" bIns="18288" wrap="none"/>
-          <a:lstStyle/>
-          <a:p>
-            <a:pPr algn="ctr"/>
-            <a:r>
-              <a:rPr sz="1100" b="0">
-                <a:solidFill>
-                  <a:srgbClr val="DDD9E8"/>
-                </a:solidFill>
-                <a:latin typeface="Calibri"/>
-              </a:rPr>
-              <a:t>03 · Blocks &amp; Chains</a:t>
-            </a:r>
-          </a:p>
-        </p:txBody>
-      </p:sp>
-      <p:sp>
-        <p:nvSpPr>
-          <p:cNvPr id="13" name="Rounded Rectangle 12"/>
-          <p:cNvSpPr/>
-          <p:nvPr/>
-        </p:nvSpPr>
-        <p:spPr>
-          <a:xfrm>
-            <a:off x="6013093" y="5669280"/>
-            <a:ext cx="1232611" cy="402336"/>
-          </a:xfrm>
-          <a:prstGeom prst="roundRect">
-            <a:avLst>
-              <a:gd name="adj" fmla="val 50000"/>
-            </a:avLst>
-          </a:prstGeom>
-          <a:solidFill>
-            <a:srgbClr val="12746A"/>
-          </a:solidFill>
-          <a:ln>
-            <a:noFill/>
-          </a:ln>
-          <a:effectLst/>
-        </p:spPr>
-        <p:style>
-          <a:lnRef idx="1">
-            <a:schemeClr val="accent1"/>
-          </a:lnRef>
-          <a:fillRef idx="3">
-            <a:schemeClr val="accent1"/>
-          </a:fillRef>
-          <a:effectRef idx="2">
-            <a:schemeClr val="accent1"/>
-          </a:effectRef>
-          <a:fontRef idx="minor">
-            <a:schemeClr val="lt1"/>
-          </a:fontRef>
-        </p:style>
-        <p:txBody>
-          <a:bodyPr rtlCol="0" anchor="ctr" lIns="109728" rIns="109728" tIns="18288" bIns="18288" wrap="none"/>
-          <a:lstStyle/>
-          <a:p>
-            <a:pPr algn="ctr"/>
-            <a:r>
-              <a:rPr sz="1100" b="1">
-                <a:solidFill>
-                  <a:srgbClr val="FFFFFF"/>
-                </a:solidFill>
-                <a:latin typeface="Calibri"/>
-              </a:rPr>
-              <a:t>04 · Consensus</a:t>
-            </a:r>
-          </a:p>
-        </p:txBody>
-      </p:sp>
-      <p:sp>
-        <p:nvSpPr>
-          <p:cNvPr id="14" name="TextBox 13"/>
-          <p:cNvSpPr txBox="1"/>
-          <p:nvPr/>
-        </p:nvSpPr>
-        <p:spPr>
-          <a:xfrm>
-            <a:off x="822960" y="6446520"/>
-            <a:ext cx="8229600" cy="320040"/>
-          </a:xfrm>
-          <a:prstGeom prst="rect">
-            <a:avLst/>
-          </a:prstGeom>
-          <a:noFill/>
-        </p:spPr>
-        <p:txBody>
-          <a:bodyPr wrap="square" anchor="t" lIns="0" rIns="0" tIns="0" bIns="0">
-            <a:spAutoFit/>
-          </a:bodyPr>
-          <a:lstStyle/>
-          <a:p>
-            <a:pPr algn="l">
-              <a:lnSpc>
-                <a:spcPct val="115000"/>
-              </a:lnSpc>
-            </a:pPr>
-            <a:r>
-              <a:rPr sz="1000" b="0" i="0">
-                <a:solidFill>
-                  <a:srgbClr val="E9E6F2"/>
-                </a:solidFill>
-                <a:latin typeface="Calibri"/>
-              </a:rPr>
-              <a:t>Photo: Carl Lender / Wikimedia Commons, CC BY 2.0</a:t>
-            </a:r>
-          </a:p>
-        </p:txBody>
-      </p:sp>
-      <p:sp>
-        <p:nvSpPr>
-          <p:cNvPr id="15" name="TextBox 14"/>
+              <a:t>Understand How It Works</a:t>
+            </a:r>
+          </a:p>
+        </p:txBody>
+      </p:sp>
+      <p:sp>
+        <p:nvSpPr>
+          <p:cNvPr id="10" name="TextBox 9"/>
           <p:cNvSpPr txBox="1"/>
           <p:nvPr/>
         </p:nvSpPr>
@@ -3723,7 +3544,7 @@
                 </a:solidFill>
                 <a:latin typeface="Consolas"/>
               </a:rPr>
-              <a:t>01 / 15</a:t>
+              <a:t>01 / 18</a:t>
             </a:r>
           </a:p>
         </p:txBody>
@@ -3824,7 +3645,7 @@
                 </a:solidFill>
                 <a:latin typeface="Calibri"/>
               </a:rPr>
-              <a:t>REAL-WORLD USES</a:t>
+              <a:t>TOPIC 04 — CONSENSUS</a:t>
             </a:r>
           </a:p>
         </p:txBody>
@@ -3837,7 +3658,46 @@
         </p:nvSpPr>
         <p:spPr>
           <a:xfrm>
-            <a:off x="822960" y="1051560"/>
+            <a:off x="8503920" y="640080"/>
+            <a:ext cx="2834640" cy="365760"/>
+          </a:xfrm>
+          <a:prstGeom prst="rect">
+            <a:avLst/>
+          </a:prstGeom>
+          <a:noFill/>
+        </p:spPr>
+        <p:txBody>
+          <a:bodyPr wrap="square" anchor="t" lIns="0" rIns="0" tIns="0" bIns="0">
+            <a:spAutoFit/>
+          </a:bodyPr>
+          <a:lstStyle/>
+          <a:p>
+            <a:pPr algn="r">
+              <a:lnSpc>
+                <a:spcPct val="115000"/>
+              </a:lnSpc>
+            </a:pPr>
+            <a:r>
+              <a:rPr sz="1200" b="1" i="0">
+                <a:solidFill>
+                  <a:srgbClr val="5C576E"/>
+                </a:solidFill>
+                <a:latin typeface="Calibri"/>
+              </a:rPr>
+              <a:t>KEY IDEA 4 / 4</a:t>
+            </a:r>
+          </a:p>
+        </p:txBody>
+      </p:sp>
+      <p:sp>
+        <p:nvSpPr>
+          <p:cNvPr id="5" name="TextBox 4"/>
+          <p:cNvSpPr txBox="1"/>
+          <p:nvPr/>
+        </p:nvSpPr>
+        <p:spPr>
+          <a:xfrm>
+            <a:off x="822960" y="1097280"/>
             <a:ext cx="9601200" cy="1005840"/>
           </a:xfrm>
           <a:prstGeom prst="rect">
@@ -3863,34 +3723,71 @@
                 </a:solidFill>
                 <a:latin typeface="Century Gothic"/>
               </a:rPr>
-              <a:t>Not Just Blockchain</a:t>
-            </a:r>
-          </a:p>
-        </p:txBody>
-      </p:sp>
-      <p:sp>
-        <p:nvSpPr>
-          <p:cNvPr id="5" name="Rounded Rectangle 4"/>
+              <a:t>The n ≥ 3f + 1 Rule</a:t>
+            </a:r>
+          </a:p>
+        </p:txBody>
+      </p:sp>
+      <p:sp>
+        <p:nvSpPr>
+          <p:cNvPr id="6" name="TextBox 5"/>
+          <p:cNvSpPr txBox="1"/>
+          <p:nvPr/>
+        </p:nvSpPr>
+        <p:spPr>
+          <a:xfrm>
+            <a:off x="822960" y="2148840"/>
+            <a:ext cx="9875520" cy="2011680"/>
+          </a:xfrm>
+          <a:prstGeom prst="rect">
+            <a:avLst/>
+          </a:prstGeom>
+          <a:noFill/>
+        </p:spPr>
+        <p:txBody>
+          <a:bodyPr wrap="square" anchor="t" lIns="0" rIns="0" tIns="0" bIns="0">
+            <a:spAutoFit/>
+          </a:bodyPr>
+          <a:lstStyle/>
+          <a:p>
+            <a:pPr algn="l">
+              <a:lnSpc>
+                <a:spcPct val="150000"/>
+              </a:lnSpc>
+            </a:pPr>
+            <a:r>
+              <a:rPr sz="1650" b="0" i="0">
+                <a:solidFill>
+                  <a:srgbClr val="1C1730"/>
+                </a:solidFill>
+                <a:latin typeface="Calibri"/>
+              </a:rPr>
+              <a:t>A network of n nodes can tolerate up to f dishonest ones only if honest nodes outnumber dishonest ones by more than 2-to-1 — not just a simple majority.</a:t>
+            </a:r>
+          </a:p>
+        </p:txBody>
+      </p:sp>
+      <p:sp>
+        <p:nvSpPr>
+          <p:cNvPr id="7" name="Rounded Rectangle 6"/>
           <p:cNvSpPr/>
           <p:nvPr/>
         </p:nvSpPr>
         <p:spPr>
           <a:xfrm>
-            <a:off x="822960" y="2011680"/>
-            <a:ext cx="3322320" cy="3108960"/>
+            <a:off x="822960" y="4434840"/>
+            <a:ext cx="10515600" cy="1280160"/>
           </a:xfrm>
           <a:prstGeom prst="roundRect">
             <a:avLst>
-              <a:gd name="adj" fmla="val 9000"/>
+              <a:gd name="adj" fmla="val 6000"/>
             </a:avLst>
           </a:prstGeom>
           <a:solidFill>
-            <a:srgbClr val="FFFFFF"/>
+            <a:srgbClr val="E7F1F0"/>
           </a:solidFill>
-          <a:ln w="12700">
-            <a:solidFill>
-              <a:srgbClr val="DED9EA"/>
-            </a:solidFill>
+          <a:ln>
+            <a:noFill/>
           </a:ln>
           <a:effectLst/>
         </p:spPr>
@@ -3918,14 +3815,14 @@
       </p:sp>
       <p:sp>
         <p:nvSpPr>
-          <p:cNvPr id="6" name="TextBox 5"/>
-          <p:cNvSpPr txBox="1"/>
-          <p:nvPr/>
-        </p:nvSpPr>
-        <p:spPr>
-          <a:xfrm>
-            <a:off x="1078992" y="2267712"/>
-            <a:ext cx="2810256" cy="457200"/>
+          <p:cNvPr id="8" name="TextBox 7"/>
+          <p:cNvSpPr txBox="1"/>
+          <p:nvPr/>
+        </p:nvSpPr>
+        <p:spPr>
+          <a:xfrm>
+            <a:off x="1143000" y="4617720"/>
+            <a:ext cx="9875520" cy="320040"/>
           </a:xfrm>
           <a:prstGeom prst="rect">
             <a:avLst/>
@@ -3944,27 +3841,27 @@
               </a:lnSpc>
             </a:pPr>
             <a:r>
-              <a:rPr sz="1450" b="1" i="0">
+              <a:rPr sz="1100" b="1" i="0">
                 <a:solidFill>
                   <a:srgbClr val="12746A"/>
                 </a:solidFill>
-                <a:latin typeface="Century Gothic"/>
-              </a:rPr>
-              <a:t>Kubernetes' etcd (Raft)</a:t>
-            </a:r>
-          </a:p>
-        </p:txBody>
-      </p:sp>
-      <p:sp>
-        <p:nvSpPr>
-          <p:cNvPr id="7" name="TextBox 6"/>
-          <p:cNvSpPr txBox="1"/>
-          <p:nvPr/>
-        </p:nvSpPr>
-        <p:spPr>
-          <a:xfrm>
-            <a:off x="1078992" y="2724912"/>
-            <a:ext cx="2810256" cy="2258568"/>
+                <a:latin typeface="Calibri"/>
+              </a:rPr>
+              <a:t>EXAMPLE</a:t>
+            </a:r>
+          </a:p>
+        </p:txBody>
+      </p:sp>
+      <p:sp>
+        <p:nvSpPr>
+          <p:cNvPr id="9" name="TextBox 8"/>
+          <p:cNvSpPr txBox="1"/>
+          <p:nvPr/>
+        </p:nvSpPr>
+        <p:spPr>
+          <a:xfrm>
+            <a:off x="1143000" y="4956048"/>
+            <a:ext cx="9875520" cy="640080"/>
           </a:xfrm>
           <a:prstGeom prst="rect">
             <a:avLst/>
@@ -3979,104 +3876,17 @@
           <a:p>
             <a:pPr algn="l">
               <a:lnSpc>
-                <a:spcPct val="128000"/>
-              </a:lnSpc>
-            </a:pPr>
-            <a:r>
-              <a:rPr sz="1150" b="0" i="0">
+                <a:spcPct val="130000"/>
+              </a:lnSpc>
+            </a:pPr>
+            <a:r>
+              <a:rPr sz="1400" b="0" i="0">
                 <a:solidFill>
                   <a:srgbClr val="1C1730"/>
                 </a:solidFill>
-                <a:latin typeface="Calibri"/>
-              </a:rPr>
-              <a:t>Keeps cluster configuration consistent across servers, even through crashes.</a:t>
-            </a:r>
-          </a:p>
-        </p:txBody>
-      </p:sp>
-      <p:sp>
-        <p:nvSpPr>
-          <p:cNvPr id="8" name="Rounded Rectangle 7"/>
-          <p:cNvSpPr/>
-          <p:nvPr/>
-        </p:nvSpPr>
-        <p:spPr>
-          <a:xfrm>
-            <a:off x="4419600" y="2011680"/>
-            <a:ext cx="3322320" cy="3108960"/>
-          </a:xfrm>
-          <a:prstGeom prst="roundRect">
-            <a:avLst>
-              <a:gd name="adj" fmla="val 9000"/>
-            </a:avLst>
-          </a:prstGeom>
-          <a:solidFill>
-            <a:srgbClr val="FFFFFF"/>
-          </a:solidFill>
-          <a:ln w="12700">
-            <a:solidFill>
-              <a:srgbClr val="DED9EA"/>
-            </a:solidFill>
-          </a:ln>
-          <a:effectLst/>
-        </p:spPr>
-        <p:style>
-          <a:lnRef idx="1">
-            <a:schemeClr val="accent1"/>
-          </a:lnRef>
-          <a:fillRef idx="3">
-            <a:schemeClr val="accent1"/>
-          </a:fillRef>
-          <a:effectRef idx="2">
-            <a:schemeClr val="accent1"/>
-          </a:effectRef>
-          <a:fontRef idx="minor">
-            <a:schemeClr val="lt1"/>
-          </a:fontRef>
-        </p:style>
-        <p:txBody>
-          <a:bodyPr rtlCol="0" anchor="ctr"/>
-          <a:lstStyle/>
-          <a:p>
-            <a:pPr algn="ctr"/>
-          </a:p>
-        </p:txBody>
-      </p:sp>
-      <p:sp>
-        <p:nvSpPr>
-          <p:cNvPr id="9" name="TextBox 8"/>
-          <p:cNvSpPr txBox="1"/>
-          <p:nvPr/>
-        </p:nvSpPr>
-        <p:spPr>
-          <a:xfrm>
-            <a:off x="4675632" y="2267712"/>
-            <a:ext cx="2810256" cy="457200"/>
-          </a:xfrm>
-          <a:prstGeom prst="rect">
-            <a:avLst/>
-          </a:prstGeom>
-          <a:noFill/>
-        </p:spPr>
-        <p:txBody>
-          <a:bodyPr wrap="square" anchor="t" lIns="0" rIns="0" tIns="0" bIns="0">
-            <a:spAutoFit/>
-          </a:bodyPr>
-          <a:lstStyle/>
-          <a:p>
-            <a:pPr algn="l">
-              <a:lnSpc>
-                <a:spcPct val="115000"/>
-              </a:lnSpc>
-            </a:pPr>
-            <a:r>
-              <a:rPr sz="1450" b="1" i="0">
-                <a:solidFill>
-                  <a:srgbClr val="12746A"/>
-                </a:solidFill>
-                <a:latin typeface="Century Gothic"/>
-              </a:rPr>
-              <a:t>CockroachDB / Spanner (Paxos)</a:t>
+                <a:latin typeface="Consolas"/>
+              </a:rPr>
+              <a:t>100 nodes → tolerates at most 33 dishonest ones (100 ≥ 3×33 + 1).</a:t>
             </a:r>
           </a:p>
         </p:txBody>
@@ -4084,171 +3894,6 @@
       <p:sp>
         <p:nvSpPr>
           <p:cNvPr id="10" name="TextBox 9"/>
-          <p:cNvSpPr txBox="1"/>
-          <p:nvPr/>
-        </p:nvSpPr>
-        <p:spPr>
-          <a:xfrm>
-            <a:off x="4675632" y="2724912"/>
-            <a:ext cx="2810256" cy="2258568"/>
-          </a:xfrm>
-          <a:prstGeom prst="rect">
-            <a:avLst/>
-          </a:prstGeom>
-          <a:noFill/>
-        </p:spPr>
-        <p:txBody>
-          <a:bodyPr wrap="square" anchor="t" lIns="0" rIns="0" tIns="0" bIns="0">
-            <a:spAutoFit/>
-          </a:bodyPr>
-          <a:lstStyle/>
-          <a:p>
-            <a:pPr algn="l">
-              <a:lnSpc>
-                <a:spcPct val="128000"/>
-              </a:lnSpc>
-            </a:pPr>
-            <a:r>
-              <a:rPr sz="1150" b="0" i="0">
-                <a:solidFill>
-                  <a:srgbClr val="1C1730"/>
-                </a:solidFill>
-                <a:latin typeface="Calibri"/>
-              </a:rPr>
-              <a:t>Keeps globally distributed databases consistent across continents.</a:t>
-            </a:r>
-          </a:p>
-        </p:txBody>
-      </p:sp>
-      <p:sp>
-        <p:nvSpPr>
-          <p:cNvPr id="11" name="Rounded Rectangle 10"/>
-          <p:cNvSpPr/>
-          <p:nvPr/>
-        </p:nvSpPr>
-        <p:spPr>
-          <a:xfrm>
-            <a:off x="8016240" y="2011680"/>
-            <a:ext cx="3322320" cy="3108960"/>
-          </a:xfrm>
-          <a:prstGeom prst="roundRect">
-            <a:avLst>
-              <a:gd name="adj" fmla="val 9000"/>
-            </a:avLst>
-          </a:prstGeom>
-          <a:solidFill>
-            <a:srgbClr val="FFFFFF"/>
-          </a:solidFill>
-          <a:ln w="12700">
-            <a:solidFill>
-              <a:srgbClr val="DED9EA"/>
-            </a:solidFill>
-          </a:ln>
-          <a:effectLst/>
-        </p:spPr>
-        <p:style>
-          <a:lnRef idx="1">
-            <a:schemeClr val="accent1"/>
-          </a:lnRef>
-          <a:fillRef idx="3">
-            <a:schemeClr val="accent1"/>
-          </a:fillRef>
-          <a:effectRef idx="2">
-            <a:schemeClr val="accent1"/>
-          </a:effectRef>
-          <a:fontRef idx="minor">
-            <a:schemeClr val="lt1"/>
-          </a:fontRef>
-        </p:style>
-        <p:txBody>
-          <a:bodyPr rtlCol="0" anchor="ctr"/>
-          <a:lstStyle/>
-          <a:p>
-            <a:pPr algn="ctr"/>
-          </a:p>
-        </p:txBody>
-      </p:sp>
-      <p:sp>
-        <p:nvSpPr>
-          <p:cNvPr id="12" name="TextBox 11"/>
-          <p:cNvSpPr txBox="1"/>
-          <p:nvPr/>
-        </p:nvSpPr>
-        <p:spPr>
-          <a:xfrm>
-            <a:off x="8272272" y="2267712"/>
-            <a:ext cx="2810256" cy="457200"/>
-          </a:xfrm>
-          <a:prstGeom prst="rect">
-            <a:avLst/>
-          </a:prstGeom>
-          <a:noFill/>
-        </p:spPr>
-        <p:txBody>
-          <a:bodyPr wrap="square" anchor="t" lIns="0" rIns="0" tIns="0" bIns="0">
-            <a:spAutoFit/>
-          </a:bodyPr>
-          <a:lstStyle/>
-          <a:p>
-            <a:pPr algn="l">
-              <a:lnSpc>
-                <a:spcPct val="115000"/>
-              </a:lnSpc>
-            </a:pPr>
-            <a:r>
-              <a:rPr sz="1450" b="1" i="0">
-                <a:solidFill>
-                  <a:srgbClr val="12746A"/>
-                </a:solidFill>
-                <a:latin typeface="Century Gothic"/>
-              </a:rPr>
-              <a:t>Flight-Control Redundancy</a:t>
-            </a:r>
-          </a:p>
-        </p:txBody>
-      </p:sp>
-      <p:sp>
-        <p:nvSpPr>
-          <p:cNvPr id="13" name="TextBox 12"/>
-          <p:cNvSpPr txBox="1"/>
-          <p:nvPr/>
-        </p:nvSpPr>
-        <p:spPr>
-          <a:xfrm>
-            <a:off x="8272272" y="2724912"/>
-            <a:ext cx="2810256" cy="2258568"/>
-          </a:xfrm>
-          <a:prstGeom prst="rect">
-            <a:avLst/>
-          </a:prstGeom>
-          <a:noFill/>
-        </p:spPr>
-        <p:txBody>
-          <a:bodyPr wrap="square" anchor="t" lIns="0" rIns="0" tIns="0" bIns="0">
-            <a:spAutoFit/>
-          </a:bodyPr>
-          <a:lstStyle/>
-          <a:p>
-            <a:pPr algn="l">
-              <a:lnSpc>
-                <a:spcPct val="128000"/>
-              </a:lnSpc>
-            </a:pPr>
-            <a:r>
-              <a:rPr sz="1150" b="0" i="0">
-                <a:solidFill>
-                  <a:srgbClr val="1C1730"/>
-                </a:solidFill>
-                <a:latin typeface="Calibri"/>
-              </a:rPr>
-              <a:t>The 1982 Byzantine Generals paper was partly motivated by aircraft sensors needing to agree despite a faulty unit.</a:t>
-            </a:r>
-          </a:p>
-        </p:txBody>
-      </p:sp>
-      <p:sp>
-        <p:nvSpPr>
-          <p:cNvPr id="14" name="TextBox 13"/>
           <p:cNvSpPr txBox="1"/>
           <p:nvPr/>
         </p:nvSpPr>
@@ -4280,7 +3925,7 @@
                 </a:solidFill>
                 <a:latin typeface="Consolas"/>
               </a:rPr>
-              <a:t>10 / 15</a:t>
+              <a:t>10 / 18</a:t>
             </a:r>
           </a:p>
         </p:txBody>
@@ -4381,7 +4026,7 @@
                 </a:solidFill>
                 <a:latin typeface="Calibri"/>
               </a:rPr>
-              <a:t>FLAGSHIP CASE STUDY</a:t>
+              <a:t>WORKED EXAMPLE — PART 1</a:t>
             </a:r>
           </a:p>
         </p:txBody>
@@ -4394,7 +4039,7 @@
         </p:nvSpPr>
         <p:spPr>
           <a:xfrm>
-            <a:off x="822960" y="1097280"/>
+            <a:off x="822960" y="1051560"/>
             <a:ext cx="10332720" cy="1005840"/>
           </a:xfrm>
           <a:prstGeom prst="rect">
@@ -4414,13 +4059,13 @@
               </a:lnSpc>
             </a:pPr>
             <a:r>
-              <a:rPr sz="3000" b="1" i="0">
+              <a:rPr sz="2700" b="1" i="0">
                 <a:solidFill>
                   <a:srgbClr val="1C1730"/>
                 </a:solidFill>
                 <a:latin typeface="Century Gothic"/>
               </a:rPr>
-              <a:t>What A 51% Attacker Can — And Can't — Do</a:t>
+              <a:t>The Fault-Tolerance Math, Worked With Real Numbers</a:t>
             </a:r>
           </a:p>
         </p:txBody>
@@ -4433,16 +4078,16 @@
         </p:nvSpPr>
         <p:spPr>
           <a:xfrm>
-            <a:off x="822960" y="2423160"/>
-            <a:ext cx="10515600" cy="3749039"/>
+            <a:off x="822960" y="1965960"/>
+            <a:ext cx="10515600" cy="3840480"/>
           </a:xfrm>
           <a:prstGeom prst="roundRect">
             <a:avLst>
-              <a:gd name="adj" fmla="val 4000"/>
+              <a:gd name="adj" fmla="val 4500"/>
             </a:avLst>
           </a:prstGeom>
           <a:solidFill>
-            <a:srgbClr val="12746A"/>
+            <a:srgbClr val="141026"/>
           </a:solidFill>
           <a:ln>
             <a:noFill/>
@@ -4473,14 +4118,146 @@
       </p:sp>
       <p:sp>
         <p:nvSpPr>
-          <p:cNvPr id="6" name="TextBox 5"/>
-          <p:cNvSpPr txBox="1"/>
-          <p:nvPr/>
-        </p:nvSpPr>
-        <p:spPr>
-          <a:xfrm>
-            <a:off x="1280160" y="2743200"/>
-            <a:ext cx="9601200" cy="3200400"/>
+          <p:cNvPr id="6" name="Oval 5"/>
+          <p:cNvSpPr/>
+          <p:nvPr/>
+        </p:nvSpPr>
+        <p:spPr>
+          <a:xfrm>
+            <a:off x="1024128" y="2130552"/>
+            <a:ext cx="109728" cy="109728"/>
+          </a:xfrm>
+          <a:prstGeom prst="ellipse">
+            <a:avLst/>
+          </a:prstGeom>
+          <a:solidFill>
+            <a:srgbClr val="FF6459"/>
+          </a:solidFill>
+          <a:ln>
+            <a:noFill/>
+          </a:ln>
+          <a:effectLst/>
+        </p:spPr>
+        <p:style>
+          <a:lnRef idx="1">
+            <a:schemeClr val="accent1"/>
+          </a:lnRef>
+          <a:fillRef idx="3">
+            <a:schemeClr val="accent1"/>
+          </a:fillRef>
+          <a:effectRef idx="2">
+            <a:schemeClr val="accent1"/>
+          </a:effectRef>
+          <a:fontRef idx="minor">
+            <a:schemeClr val="lt1"/>
+          </a:fontRef>
+        </p:style>
+        <p:txBody>
+          <a:bodyPr rtlCol="0" anchor="ctr"/>
+          <a:lstStyle/>
+          <a:p>
+            <a:pPr algn="ctr"/>
+          </a:p>
+        </p:txBody>
+      </p:sp>
+      <p:sp>
+        <p:nvSpPr>
+          <p:cNvPr id="7" name="Oval 6"/>
+          <p:cNvSpPr/>
+          <p:nvPr/>
+        </p:nvSpPr>
+        <p:spPr>
+          <a:xfrm>
+            <a:off x="1225296" y="2130552"/>
+            <a:ext cx="109728" cy="109728"/>
+          </a:xfrm>
+          <a:prstGeom prst="ellipse">
+            <a:avLst/>
+          </a:prstGeom>
+          <a:solidFill>
+            <a:srgbClr val="FFC02E"/>
+          </a:solidFill>
+          <a:ln>
+            <a:noFill/>
+          </a:ln>
+          <a:effectLst/>
+        </p:spPr>
+        <p:style>
+          <a:lnRef idx="1">
+            <a:schemeClr val="accent1"/>
+          </a:lnRef>
+          <a:fillRef idx="3">
+            <a:schemeClr val="accent1"/>
+          </a:fillRef>
+          <a:effectRef idx="2">
+            <a:schemeClr val="accent1"/>
+          </a:effectRef>
+          <a:fontRef idx="minor">
+            <a:schemeClr val="lt1"/>
+          </a:fontRef>
+        </p:style>
+        <p:txBody>
+          <a:bodyPr rtlCol="0" anchor="ctr"/>
+          <a:lstStyle/>
+          <a:p>
+            <a:pPr algn="ctr"/>
+          </a:p>
+        </p:txBody>
+      </p:sp>
+      <p:sp>
+        <p:nvSpPr>
+          <p:cNvPr id="8" name="Oval 7"/>
+          <p:cNvSpPr/>
+          <p:nvPr/>
+        </p:nvSpPr>
+        <p:spPr>
+          <a:xfrm>
+            <a:off x="1426464" y="2130552"/>
+            <a:ext cx="109728" cy="109728"/>
+          </a:xfrm>
+          <a:prstGeom prst="ellipse">
+            <a:avLst/>
+          </a:prstGeom>
+          <a:solidFill>
+            <a:srgbClr val="28C93F"/>
+          </a:solidFill>
+          <a:ln>
+            <a:noFill/>
+          </a:ln>
+          <a:effectLst/>
+        </p:spPr>
+        <p:style>
+          <a:lnRef idx="1">
+            <a:schemeClr val="accent1"/>
+          </a:lnRef>
+          <a:fillRef idx="3">
+            <a:schemeClr val="accent1"/>
+          </a:fillRef>
+          <a:effectRef idx="2">
+            <a:schemeClr val="accent1"/>
+          </a:effectRef>
+          <a:fontRef idx="minor">
+            <a:schemeClr val="lt1"/>
+          </a:fontRef>
+        </p:style>
+        <p:txBody>
+          <a:bodyPr rtlCol="0" anchor="ctr"/>
+          <a:lstStyle/>
+          <a:p>
+            <a:pPr algn="ctr"/>
+          </a:p>
+        </p:txBody>
+      </p:sp>
+      <p:sp>
+        <p:nvSpPr>
+          <p:cNvPr id="9" name="TextBox 8"/>
+          <p:cNvSpPr txBox="1"/>
+          <p:nvPr/>
+        </p:nvSpPr>
+        <p:spPr>
+          <a:xfrm>
+            <a:off x="1078992" y="2350008"/>
+            <a:ext cx="10003536" cy="3273552"/>
           </a:xfrm>
           <a:prstGeom prst="rect">
             <a:avLst/>
@@ -4495,24 +4272,159 @@
           <a:p>
             <a:pPr algn="l">
               <a:lnSpc>
-                <a:spcPct val="155000"/>
-              </a:lnSpc>
-            </a:pPr>
-            <a:r>
-              <a:rPr sz="1600" b="0" i="0">
-                <a:solidFill>
-                  <a:srgbClr val="FFFFFF"/>
+                <a:spcPct val="135000"/>
+              </a:lnSpc>
+            </a:pPr>
+            <a:r>
+              <a:rPr sz="1350" b="0">
+                <a:solidFill>
+                  <a:srgbClr val="8B84AD"/>
+                </a:solidFill>
+                <a:latin typeface="Consolas"/>
+              </a:rPr>
+              <a:t>Total nodes (n)   Max dishonest (f)   Check</a:t>
+            </a:r>
+          </a:p>
+          <a:p>
+            <a:pPr algn="l">
+              <a:lnSpc>
+                <a:spcPct val="135000"/>
+              </a:lnSpc>
+            </a:pPr>
+            <a:r>
+              <a:rPr sz="1350" b="0">
+                <a:solidFill>
+                  <a:srgbClr val="7FE0C4"/>
+                </a:solidFill>
+                <a:latin typeface="Consolas"/>
+              </a:rPr>
+              <a:t>4                 1                    4 ≥ 3(1)+1 = 4  ✓</a:t>
+            </a:r>
+          </a:p>
+          <a:p>
+            <a:pPr algn="l">
+              <a:lnSpc>
+                <a:spcPct val="135000"/>
+              </a:lnSpc>
+            </a:pPr>
+            <a:r>
+              <a:rPr sz="1350" b="0">
+                <a:solidFill>
+                  <a:srgbClr val="7FE0C4"/>
+                </a:solidFill>
+                <a:latin typeface="Consolas"/>
+              </a:rPr>
+              <a:t>10                3                    10 ≥ 3(3)+1 = 10  ✓</a:t>
+            </a:r>
+          </a:p>
+          <a:p>
+            <a:pPr algn="l">
+              <a:lnSpc>
+                <a:spcPct val="135000"/>
+              </a:lnSpc>
+            </a:pPr>
+            <a:r>
+              <a:rPr sz="1350" b="0">
+                <a:solidFill>
+                  <a:srgbClr val="7FE0C4"/>
+                </a:solidFill>
+                <a:latin typeface="Consolas"/>
+              </a:rPr>
+              <a:t>100               33                   100 ≥ 3(33)+1 = 100  ✓</a:t>
+            </a:r>
+          </a:p>
+          <a:p>
+            <a:pPr algn="l">
+              <a:lnSpc>
+                <a:spcPct val="135000"/>
+              </a:lnSpc>
+            </a:pPr>
+            <a:r>
+              <a:rPr sz="1350" b="0">
+                <a:solidFill>
+                  <a:srgbClr val="EDE9F7"/>
+                </a:solidFill>
+                <a:latin typeface="Consolas"/>
+              </a:rPr>
+              <a:t/>
+            </a:r>
+          </a:p>
+          <a:p>
+            <a:pPr algn="l">
+              <a:lnSpc>
+                <a:spcPct val="135000"/>
+              </a:lnSpc>
+            </a:pPr>
+            <a:r>
+              <a:rPr sz="1350" b="0">
+                <a:solidFill>
+                  <a:srgbClr val="8B84AD"/>
+                </a:solidFill>
+                <a:latin typeface="Consolas"/>
+              </a:rPr>
+              <a:t># honest nodes must outnumber dishonest ones</a:t>
+            </a:r>
+          </a:p>
+          <a:p>
+            <a:pPr algn="l">
+              <a:lnSpc>
+                <a:spcPct val="135000"/>
+              </a:lnSpc>
+            </a:pPr>
+            <a:r>
+              <a:rPr sz="1350" b="0">
+                <a:solidFill>
+                  <a:srgbClr val="8B84AD"/>
+                </a:solidFill>
+                <a:latin typeface="Consolas"/>
+              </a:rPr>
+              <a:t># by MORE than 2-to-1 — not just a simple majority.</a:t>
+            </a:r>
+          </a:p>
+        </p:txBody>
+      </p:sp>
+      <p:sp>
+        <p:nvSpPr>
+          <p:cNvPr id="10" name="TextBox 9"/>
+          <p:cNvSpPr txBox="1"/>
+          <p:nvPr/>
+        </p:nvSpPr>
+        <p:spPr>
+          <a:xfrm>
+            <a:off x="822960" y="6446520"/>
+            <a:ext cx="10058400" cy="320040"/>
+          </a:xfrm>
+          <a:prstGeom prst="rect">
+            <a:avLst/>
+          </a:prstGeom>
+          <a:noFill/>
+        </p:spPr>
+        <p:txBody>
+          <a:bodyPr wrap="square" anchor="t" lIns="0" rIns="0" tIns="0" bIns="0">
+            <a:spAutoFit/>
+          </a:bodyPr>
+          <a:lstStyle/>
+          <a:p>
+            <a:pPr algn="l">
+              <a:lnSpc>
+                <a:spcPct val="115000"/>
+              </a:lnSpc>
+            </a:pPr>
+            <a:r>
+              <a:rPr sz="1050" b="0" i="0">
+                <a:solidFill>
+                  <a:srgbClr val="5C576E"/>
                 </a:solidFill>
                 <a:latin typeface="Calibri"/>
               </a:rPr>
-              <a:t>In 2019 and 2020, Ethereum Classic suffered three confirmed 51%-attacks totaling $10.1M in double-spends. The attacker rewrote recent block ordering to reverse their OWN sent transactions. They could NOT forge a signature for funds they never controlled, and could NOT touch other users' wallets — the Topic 02 cryptography held perfectly throughout. A 51% attack breaks “who got here first,” not the underlying math.</a:t>
-            </a:r>
-          </a:p>
-        </p:txBody>
-      </p:sp>
-      <p:sp>
-        <p:nvSpPr>
-          <p:cNvPr id="7" name="TextBox 6"/>
+              <a:t>This is a general distributed-systems result — not specific to blockchain.</a:t>
+            </a:r>
+          </a:p>
+        </p:txBody>
+      </p:sp>
+      <p:sp>
+        <p:nvSpPr>
+          <p:cNvPr id="11" name="TextBox 10"/>
           <p:cNvSpPr txBox="1"/>
           <p:nvPr/>
         </p:nvSpPr>
@@ -4544,7 +4456,7 @@
                 </a:solidFill>
                 <a:latin typeface="Consolas"/>
               </a:rPr>
-              <a:t>11 / 15</a:t>
+              <a:t>11 / 18</a:t>
             </a:r>
           </a:p>
         </p:txBody>
@@ -4645,7 +4557,7 @@
                 </a:solidFill>
                 <a:latin typeface="Calibri"/>
               </a:rPr>
-              <a:t>REAL-LIFE ANALOGY</a:t>
+              <a:t>WORKED EXAMPLE — PART 2</a:t>
             </a:r>
           </a:p>
         </p:txBody>
@@ -4658,7 +4570,7 @@
         </p:nvSpPr>
         <p:spPr>
           <a:xfrm>
-            <a:off x="822960" y="1097280"/>
+            <a:off x="822960" y="1051560"/>
             <a:ext cx="10332720" cy="1005840"/>
           </a:xfrm>
           <a:prstGeom prst="rect">
@@ -4678,33 +4590,35 @@
               </a:lnSpc>
             </a:pPr>
             <a:r>
-              <a:rPr sz="3000" b="1" i="0">
+              <a:rPr sz="2700" b="1" i="0">
                 <a:solidFill>
                   <a:srgbClr val="1C1730"/>
                 </a:solidFill>
                 <a:latin typeface="Century Gothic"/>
               </a:rPr>
-              <a:t>Generals Surrounding A City</a:t>
-            </a:r>
-          </a:p>
-        </p:txBody>
-      </p:sp>
-      <p:sp>
-        <p:nvSpPr>
-          <p:cNvPr id="5" name="Rectangle 4"/>
+              <a:t>A Real, Documented 51%-Attack — Ethereum Classic</a:t>
+            </a:r>
+          </a:p>
+        </p:txBody>
+      </p:sp>
+      <p:sp>
+        <p:nvSpPr>
+          <p:cNvPr id="5" name="Rounded Rectangle 4"/>
           <p:cNvSpPr/>
           <p:nvPr/>
         </p:nvSpPr>
         <p:spPr>
           <a:xfrm>
-            <a:off x="822960" y="2286000"/>
-            <a:ext cx="91440" cy="3657600"/>
-          </a:xfrm>
-          <a:prstGeom prst="rect">
-            <a:avLst/>
+            <a:off x="822960" y="1965960"/>
+            <a:ext cx="10515600" cy="3840480"/>
+          </a:xfrm>
+          <a:prstGeom prst="roundRect">
+            <a:avLst>
+              <a:gd name="adj" fmla="val 4500"/>
+            </a:avLst>
           </a:prstGeom>
           <a:solidFill>
-            <a:srgbClr val="12746A"/>
+            <a:srgbClr val="141026"/>
           </a:solidFill>
           <a:ln>
             <a:noFill/>
@@ -4735,14 +4649,146 @@
       </p:sp>
       <p:sp>
         <p:nvSpPr>
-          <p:cNvPr id="6" name="TextBox 5"/>
-          <p:cNvSpPr txBox="1"/>
-          <p:nvPr/>
-        </p:nvSpPr>
-        <p:spPr>
-          <a:xfrm>
-            <a:off x="1280160" y="2377440"/>
-            <a:ext cx="9784080" cy="3566160"/>
+          <p:cNvPr id="6" name="Oval 5"/>
+          <p:cNvSpPr/>
+          <p:nvPr/>
+        </p:nvSpPr>
+        <p:spPr>
+          <a:xfrm>
+            <a:off x="1024128" y="2130552"/>
+            <a:ext cx="109728" cy="109728"/>
+          </a:xfrm>
+          <a:prstGeom prst="ellipse">
+            <a:avLst/>
+          </a:prstGeom>
+          <a:solidFill>
+            <a:srgbClr val="FF6459"/>
+          </a:solidFill>
+          <a:ln>
+            <a:noFill/>
+          </a:ln>
+          <a:effectLst/>
+        </p:spPr>
+        <p:style>
+          <a:lnRef idx="1">
+            <a:schemeClr val="accent1"/>
+          </a:lnRef>
+          <a:fillRef idx="3">
+            <a:schemeClr val="accent1"/>
+          </a:fillRef>
+          <a:effectRef idx="2">
+            <a:schemeClr val="accent1"/>
+          </a:effectRef>
+          <a:fontRef idx="minor">
+            <a:schemeClr val="lt1"/>
+          </a:fontRef>
+        </p:style>
+        <p:txBody>
+          <a:bodyPr rtlCol="0" anchor="ctr"/>
+          <a:lstStyle/>
+          <a:p>
+            <a:pPr algn="ctr"/>
+          </a:p>
+        </p:txBody>
+      </p:sp>
+      <p:sp>
+        <p:nvSpPr>
+          <p:cNvPr id="7" name="Oval 6"/>
+          <p:cNvSpPr/>
+          <p:nvPr/>
+        </p:nvSpPr>
+        <p:spPr>
+          <a:xfrm>
+            <a:off x="1225296" y="2130552"/>
+            <a:ext cx="109728" cy="109728"/>
+          </a:xfrm>
+          <a:prstGeom prst="ellipse">
+            <a:avLst/>
+          </a:prstGeom>
+          <a:solidFill>
+            <a:srgbClr val="FFC02E"/>
+          </a:solidFill>
+          <a:ln>
+            <a:noFill/>
+          </a:ln>
+          <a:effectLst/>
+        </p:spPr>
+        <p:style>
+          <a:lnRef idx="1">
+            <a:schemeClr val="accent1"/>
+          </a:lnRef>
+          <a:fillRef idx="3">
+            <a:schemeClr val="accent1"/>
+          </a:fillRef>
+          <a:effectRef idx="2">
+            <a:schemeClr val="accent1"/>
+          </a:effectRef>
+          <a:fontRef idx="minor">
+            <a:schemeClr val="lt1"/>
+          </a:fontRef>
+        </p:style>
+        <p:txBody>
+          <a:bodyPr rtlCol="0" anchor="ctr"/>
+          <a:lstStyle/>
+          <a:p>
+            <a:pPr algn="ctr"/>
+          </a:p>
+        </p:txBody>
+      </p:sp>
+      <p:sp>
+        <p:nvSpPr>
+          <p:cNvPr id="8" name="Oval 7"/>
+          <p:cNvSpPr/>
+          <p:nvPr/>
+        </p:nvSpPr>
+        <p:spPr>
+          <a:xfrm>
+            <a:off x="1426464" y="2130552"/>
+            <a:ext cx="109728" cy="109728"/>
+          </a:xfrm>
+          <a:prstGeom prst="ellipse">
+            <a:avLst/>
+          </a:prstGeom>
+          <a:solidFill>
+            <a:srgbClr val="28C93F"/>
+          </a:solidFill>
+          <a:ln>
+            <a:noFill/>
+          </a:ln>
+          <a:effectLst/>
+        </p:spPr>
+        <p:style>
+          <a:lnRef idx="1">
+            <a:schemeClr val="accent1"/>
+          </a:lnRef>
+          <a:fillRef idx="3">
+            <a:schemeClr val="accent1"/>
+          </a:fillRef>
+          <a:effectRef idx="2">
+            <a:schemeClr val="accent1"/>
+          </a:effectRef>
+          <a:fontRef idx="minor">
+            <a:schemeClr val="lt1"/>
+          </a:fontRef>
+        </p:style>
+        <p:txBody>
+          <a:bodyPr rtlCol="0" anchor="ctr"/>
+          <a:lstStyle/>
+          <a:p>
+            <a:pPr algn="ctr"/>
+          </a:p>
+        </p:txBody>
+      </p:sp>
+      <p:sp>
+        <p:nvSpPr>
+          <p:cNvPr id="9" name="TextBox 8"/>
+          <p:cNvSpPr txBox="1"/>
+          <p:nvPr/>
+        </p:nvSpPr>
+        <p:spPr>
+          <a:xfrm>
+            <a:off x="1078992" y="2350008"/>
+            <a:ext cx="10003536" cy="3273552"/>
           </a:xfrm>
           <a:prstGeom prst="rect">
             <a:avLst/>
@@ -4757,24 +4803,231 @@
           <a:p>
             <a:pPr algn="l">
               <a:lnSpc>
-                <a:spcPct val="160000"/>
-              </a:lnSpc>
-            </a:pPr>
-            <a:r>
-              <a:rPr sz="1800" b="0" i="0">
-                <a:solidFill>
-                  <a:srgbClr val="1C1730"/>
+                <a:spcPct val="135000"/>
+              </a:lnSpc>
+            </a:pPr>
+            <a:r>
+              <a:rPr sz="1350" b="0">
+                <a:solidFill>
+                  <a:srgbClr val="EDE9F7"/>
+                </a:solidFill>
+                <a:latin typeface="Consolas"/>
+              </a:rPr>
+              <a:t>Jan 2019   </a:t>
+            </a:r>
+            <a:r>
+              <a:rPr sz="1350" b="1">
+                <a:solidFill>
+                  <a:srgbClr val="FF8E7D"/>
+                </a:solidFill>
+                <a:latin typeface="Consolas"/>
+              </a:rPr>
+              <a:t>$1.1M</a:t>
+            </a:r>
+            <a:r>
+              <a:rPr sz="1350" b="0">
+                <a:solidFill>
+                  <a:srgbClr val="EDE9F7"/>
+                </a:solidFill>
+                <a:latin typeface="Consolas"/>
+              </a:rPr>
+              <a:t>  double-spent (2 attacks)</a:t>
+            </a:r>
+          </a:p>
+          <a:p>
+            <a:pPr algn="l">
+              <a:lnSpc>
+                <a:spcPct val="135000"/>
+              </a:lnSpc>
+            </a:pPr>
+            <a:r>
+              <a:rPr sz="1350" b="0">
+                <a:solidFill>
+                  <a:srgbClr val="EDE9F7"/>
+                </a:solidFill>
+                <a:latin typeface="Consolas"/>
+              </a:rPr>
+              <a:t>Jul 2020   </a:t>
+            </a:r>
+            <a:r>
+              <a:rPr sz="1350" b="1">
+                <a:solidFill>
+                  <a:srgbClr val="FF8E7D"/>
+                </a:solidFill>
+                <a:latin typeface="Consolas"/>
+              </a:rPr>
+              <a:t>$5.8M</a:t>
+            </a:r>
+            <a:r>
+              <a:rPr sz="1350" b="0">
+                <a:solidFill>
+                  <a:srgbClr val="EDE9F7"/>
+                </a:solidFill>
+                <a:latin typeface="Consolas"/>
+              </a:rPr>
+              <a:t>  double-spent (1 attack)</a:t>
+            </a:r>
+          </a:p>
+          <a:p>
+            <a:pPr algn="l">
+              <a:lnSpc>
+                <a:spcPct val="135000"/>
+              </a:lnSpc>
+            </a:pPr>
+            <a:r>
+              <a:rPr sz="1350" b="0">
+                <a:solidFill>
+                  <a:srgbClr val="EDE9F7"/>
+                </a:solidFill>
+                <a:latin typeface="Consolas"/>
+              </a:rPr>
+              <a:t>Aug 2020   </a:t>
+            </a:r>
+            <a:r>
+              <a:rPr sz="1350" b="1">
+                <a:solidFill>
+                  <a:srgbClr val="FF8E7D"/>
+                </a:solidFill>
+                <a:latin typeface="Consolas"/>
+              </a:rPr>
+              <a:t>$3.2M</a:t>
+            </a:r>
+            <a:r>
+              <a:rPr sz="1350" b="0">
+                <a:solidFill>
+                  <a:srgbClr val="EDE9F7"/>
+                </a:solidFill>
+                <a:latin typeface="Consolas"/>
+              </a:rPr>
+              <a:t>  double-spent (1 attack)</a:t>
+            </a:r>
+          </a:p>
+          <a:p>
+            <a:pPr algn="l">
+              <a:lnSpc>
+                <a:spcPct val="135000"/>
+              </a:lnSpc>
+            </a:pPr>
+            <a:r>
+              <a:rPr sz="1350" b="0">
+                <a:solidFill>
+                  <a:srgbClr val="EDE9F7"/>
+                </a:solidFill>
+                <a:latin typeface="Consolas"/>
+              </a:rPr>
+              <a:t>           </a:t>
+            </a:r>
+            <a:r>
+              <a:rPr sz="1350" b="1">
+                <a:solidFill>
+                  <a:srgbClr val="FF8E7D"/>
+                </a:solidFill>
+                <a:latin typeface="Consolas"/>
+              </a:rPr>
+              <a:t>$10.1M</a:t>
+            </a:r>
+            <a:r>
+              <a:rPr sz="1350" b="0">
+                <a:solidFill>
+                  <a:srgbClr val="EDE9F7"/>
+                </a:solidFill>
+                <a:latin typeface="Consolas"/>
+              </a:rPr>
+              <a:t> total — three CONFIRMED attacks</a:t>
+            </a:r>
+          </a:p>
+          <a:p>
+            <a:pPr algn="l">
+              <a:lnSpc>
+                <a:spcPct val="135000"/>
+              </a:lnSpc>
+            </a:pPr>
+            <a:r>
+              <a:rPr sz="1350" b="0">
+                <a:solidFill>
+                  <a:srgbClr val="EDE9F7"/>
+                </a:solidFill>
+                <a:latin typeface="Consolas"/>
+              </a:rPr>
+              <a:t/>
+            </a:r>
+          </a:p>
+          <a:p>
+            <a:pPr algn="l">
+              <a:lnSpc>
+                <a:spcPct val="135000"/>
+              </a:lnSpc>
+            </a:pPr>
+            <a:r>
+              <a:rPr sz="1350" b="0">
+                <a:solidFill>
+                  <a:srgbClr val="8B84AD"/>
+                </a:solidFill>
+                <a:latin typeface="Consolas"/>
+              </a:rPr>
+              <a:t># mechanism: majority mining power secretly built an</a:t>
+            </a:r>
+          </a:p>
+          <a:p>
+            <a:pPr algn="l">
+              <a:lnSpc>
+                <a:spcPct val="135000"/>
+              </a:lnSpc>
+            </a:pPr>
+            <a:r>
+              <a:rPr sz="1350" b="0">
+                <a:solidFill>
+                  <a:srgbClr val="8B84AD"/>
+                </a:solidFill>
+                <a:latin typeface="Consolas"/>
+              </a:rPr>
+              <a:t># alternate chain, released once longer than the honest one.</a:t>
+            </a:r>
+          </a:p>
+        </p:txBody>
+      </p:sp>
+      <p:sp>
+        <p:nvSpPr>
+          <p:cNvPr id="10" name="TextBox 9"/>
+          <p:cNvSpPr txBox="1"/>
+          <p:nvPr/>
+        </p:nvSpPr>
+        <p:spPr>
+          <a:xfrm>
+            <a:off x="822960" y="6446520"/>
+            <a:ext cx="10058400" cy="320040"/>
+          </a:xfrm>
+          <a:prstGeom prst="rect">
+            <a:avLst/>
+          </a:prstGeom>
+          <a:noFill/>
+        </p:spPr>
+        <p:txBody>
+          <a:bodyPr wrap="square" anchor="t" lIns="0" rIns="0" tIns="0" bIns="0">
+            <a:spAutoFit/>
+          </a:bodyPr>
+          <a:lstStyle/>
+          <a:p>
+            <a:pPr algn="l">
+              <a:lnSpc>
+                <a:spcPct val="115000"/>
+              </a:lnSpc>
+            </a:pPr>
+            <a:r>
+              <a:rPr sz="1050" b="0" i="0">
+                <a:solidFill>
+                  <a:srgbClr val="5C576E"/>
                 </a:solidFill>
                 <a:latin typeface="Calibri"/>
               </a:rPr>
-              <a:t>Several generals must all attack together, or all retreat together — communicating only via messengers who might be delayed, lost, or secretly traitorous. This is exactly the situation a blockchain network is in: independent nodes, unreliable networks, some possibly malicious — and PoW / PoS are two different, practical answers to how the honest majority still reaches agreement anyway.</a:t>
-            </a:r>
-          </a:p>
-        </p:txBody>
-      </p:sp>
-      <p:sp>
-        <p:nvSpPr>
-          <p:cNvPr id="7" name="TextBox 6"/>
+              <a:t>A real, cited case — not a hypothetical. Source: Coinbase &amp; CryptoPotato incident reports.</a:t>
+            </a:r>
+          </a:p>
+        </p:txBody>
+      </p:sp>
+      <p:sp>
+        <p:nvSpPr>
+          <p:cNvPr id="11" name="TextBox 10"/>
           <p:cNvSpPr txBox="1"/>
           <p:nvPr/>
         </p:nvSpPr>
@@ -4806,7 +5059,7 @@
                 </a:solidFill>
                 <a:latin typeface="Consolas"/>
               </a:rPr>
-              <a:t>12 / 15</a:t>
+              <a:t>12 / 18</a:t>
             </a:r>
           </a:p>
         </p:txBody>
@@ -4907,7 +5160,7 @@
                 </a:solidFill>
                 <a:latin typeface="Calibri"/>
               </a:rPr>
-              <a:t>COMMON MISCONCEPTIONS</a:t>
+              <a:t>REAL-WORLD USES</a:t>
             </a:r>
           </a:p>
         </p:txBody>
@@ -4940,13 +5193,13 @@
               </a:lnSpc>
             </a:pPr>
             <a:r>
-              <a:rPr sz="3000" b="1" i="0">
+              <a:rPr sz="3200" b="1" i="0">
                 <a:solidFill>
                   <a:srgbClr val="1C1730"/>
                 </a:solidFill>
                 <a:latin typeface="Century Gothic"/>
               </a:rPr>
-              <a:t>Where People Get Tripped Up</a:t>
+              <a:t>Not Just Blockchain</a:t>
             </a:r>
           </a:p>
         </p:txBody>
@@ -4959,19 +5212,21 @@
         </p:nvSpPr>
         <p:spPr>
           <a:xfrm>
-            <a:off x="822960" y="2057400"/>
-            <a:ext cx="10515600" cy="1874519"/>
+            <a:off x="822960" y="2011680"/>
+            <a:ext cx="3322320" cy="3108960"/>
           </a:xfrm>
           <a:prstGeom prst="roundRect">
             <a:avLst>
-              <a:gd name="adj" fmla="val 5000"/>
+              <a:gd name="adj" fmla="val 9000"/>
             </a:avLst>
           </a:prstGeom>
           <a:solidFill>
             <a:srgbClr val="FFFFFF"/>
           </a:solidFill>
-          <a:ln>
-            <a:noFill/>
+          <a:ln w="12700">
+            <a:solidFill>
+              <a:srgbClr val="DED9EA"/>
+            </a:solidFill>
           </a:ln>
           <a:effectLst/>
         </p:spPr>
@@ -4999,23 +5254,105 @@
       </p:sp>
       <p:sp>
         <p:nvSpPr>
-          <p:cNvPr id="6" name="Rectangle 5"/>
+          <p:cNvPr id="6" name="TextBox 5"/>
+          <p:cNvSpPr txBox="1"/>
+          <p:nvPr/>
+        </p:nvSpPr>
+        <p:spPr>
+          <a:xfrm>
+            <a:off x="1078992" y="2267712"/>
+            <a:ext cx="2810256" cy="457200"/>
+          </a:xfrm>
+          <a:prstGeom prst="rect">
+            <a:avLst/>
+          </a:prstGeom>
+          <a:noFill/>
+        </p:spPr>
+        <p:txBody>
+          <a:bodyPr wrap="square" anchor="t" lIns="0" rIns="0" tIns="0" bIns="0">
+            <a:spAutoFit/>
+          </a:bodyPr>
+          <a:lstStyle/>
+          <a:p>
+            <a:pPr algn="l">
+              <a:lnSpc>
+                <a:spcPct val="115000"/>
+              </a:lnSpc>
+            </a:pPr>
+            <a:r>
+              <a:rPr sz="1450" b="1" i="0">
+                <a:solidFill>
+                  <a:srgbClr val="12746A"/>
+                </a:solidFill>
+                <a:latin typeface="Century Gothic"/>
+              </a:rPr>
+              <a:t>Kubernetes' etcd (Raft)</a:t>
+            </a:r>
+          </a:p>
+        </p:txBody>
+      </p:sp>
+      <p:sp>
+        <p:nvSpPr>
+          <p:cNvPr id="7" name="TextBox 6"/>
+          <p:cNvSpPr txBox="1"/>
+          <p:nvPr/>
+        </p:nvSpPr>
+        <p:spPr>
+          <a:xfrm>
+            <a:off x="1078992" y="2724912"/>
+            <a:ext cx="2810256" cy="2258568"/>
+          </a:xfrm>
+          <a:prstGeom prst="rect">
+            <a:avLst/>
+          </a:prstGeom>
+          <a:noFill/>
+        </p:spPr>
+        <p:txBody>
+          <a:bodyPr wrap="square" anchor="t" lIns="0" rIns="0" tIns="0" bIns="0">
+            <a:spAutoFit/>
+          </a:bodyPr>
+          <a:lstStyle/>
+          <a:p>
+            <a:pPr algn="l">
+              <a:lnSpc>
+                <a:spcPct val="128000"/>
+              </a:lnSpc>
+            </a:pPr>
+            <a:r>
+              <a:rPr sz="1150" b="0" i="0">
+                <a:solidFill>
+                  <a:srgbClr val="1C1730"/>
+                </a:solidFill>
+                <a:latin typeface="Calibri"/>
+              </a:rPr>
+              <a:t>Keeps cluster configuration consistent across servers, even through crashes.</a:t>
+            </a:r>
+          </a:p>
+        </p:txBody>
+      </p:sp>
+      <p:sp>
+        <p:nvSpPr>
+          <p:cNvPr id="8" name="Rounded Rectangle 7"/>
           <p:cNvSpPr/>
           <p:nvPr/>
         </p:nvSpPr>
         <p:spPr>
           <a:xfrm>
-            <a:off x="822960" y="2057400"/>
-            <a:ext cx="82296" cy="1874519"/>
-          </a:xfrm>
-          <a:prstGeom prst="rect">
-            <a:avLst/>
+            <a:off x="4419600" y="2011680"/>
+            <a:ext cx="3322320" cy="3108960"/>
+          </a:xfrm>
+          <a:prstGeom prst="roundRect">
+            <a:avLst>
+              <a:gd name="adj" fmla="val 9000"/>
+            </a:avLst>
           </a:prstGeom>
           <a:solidFill>
-            <a:srgbClr val="12746A"/>
+            <a:srgbClr val="FFFFFF"/>
           </a:solidFill>
-          <a:ln>
-            <a:noFill/>
+          <a:ln w="12700">
+            <a:solidFill>
+              <a:srgbClr val="DED9EA"/>
+            </a:solidFill>
           </a:ln>
           <a:effectLst/>
         </p:spPr>
@@ -5043,14 +5380,14 @@
       </p:sp>
       <p:sp>
         <p:nvSpPr>
-          <p:cNvPr id="7" name="TextBox 6"/>
-          <p:cNvSpPr txBox="1"/>
-          <p:nvPr/>
-        </p:nvSpPr>
-        <p:spPr>
-          <a:xfrm>
-            <a:off x="1188720" y="2258568"/>
-            <a:ext cx="9784080" cy="457200"/>
+          <p:cNvPr id="9" name="TextBox 8"/>
+          <p:cNvSpPr txBox="1"/>
+          <p:nvPr/>
+        </p:nvSpPr>
+        <p:spPr>
+          <a:xfrm>
+            <a:off x="4675632" y="2267712"/>
+            <a:ext cx="2810256" cy="457200"/>
           </a:xfrm>
           <a:prstGeom prst="rect">
             <a:avLst/>
@@ -5069,27 +5406,27 @@
               </a:lnSpc>
             </a:pPr>
             <a:r>
-              <a:rPr sz="1700" b="1" i="0">
+              <a:rPr sz="1450" b="1" i="0">
                 <a:solidFill>
                   <a:srgbClr val="12746A"/>
                 </a:solidFill>
                 <a:latin typeface="Century Gothic"/>
               </a:rPr>
-              <a:t>“Proof of Stake is just Proof of Work without the hardware.”</a:t>
-            </a:r>
-          </a:p>
-        </p:txBody>
-      </p:sp>
-      <p:sp>
-        <p:nvSpPr>
-          <p:cNvPr id="8" name="TextBox 7"/>
-          <p:cNvSpPr txBox="1"/>
-          <p:nvPr/>
-        </p:nvSpPr>
-        <p:spPr>
-          <a:xfrm>
-            <a:off x="1188720" y="2743200"/>
-            <a:ext cx="9784080" cy="1097280"/>
+              <a:t>CockroachDB / Spanner (Paxos)</a:t>
+            </a:r>
+          </a:p>
+        </p:txBody>
+      </p:sp>
+      <p:sp>
+        <p:nvSpPr>
+          <p:cNvPr id="10" name="TextBox 9"/>
+          <p:cNvSpPr txBox="1"/>
+          <p:nvPr/>
+        </p:nvSpPr>
+        <p:spPr>
+          <a:xfrm>
+            <a:off x="4675632" y="2724912"/>
+            <a:ext cx="2810256" cy="2258568"/>
           </a:xfrm>
           <a:prstGeom prst="rect">
             <a:avLst/>
@@ -5104,42 +5441,44 @@
           <a:p>
             <a:pPr algn="l">
               <a:lnSpc>
-                <a:spcPct val="135000"/>
-              </a:lnSpc>
-            </a:pPr>
-            <a:r>
-              <a:rPr sz="1300" b="0" i="0">
-                <a:solidFill>
-                  <a:srgbClr val="5C576E"/>
+                <a:spcPct val="128000"/>
+              </a:lnSpc>
+            </a:pPr>
+            <a:r>
+              <a:rPr sz="1150" b="0" i="0">
+                <a:solidFill>
+                  <a:srgbClr val="1C1730"/>
                 </a:solidFill>
                 <a:latin typeface="Calibri"/>
               </a:rPr>
-              <a:t>The security models are genuinely different, not a simple swap: PoW's security is external sunk cost (electricity you can't get back). PoS's security is internal at-risk collateral (money the protocol itself destroys).</a:t>
-            </a:r>
-          </a:p>
-        </p:txBody>
-      </p:sp>
-      <p:sp>
-        <p:nvSpPr>
-          <p:cNvPr id="9" name="Rounded Rectangle 8"/>
+              <a:t>Keeps globally distributed databases consistent across continents.</a:t>
+            </a:r>
+          </a:p>
+        </p:txBody>
+      </p:sp>
+      <p:sp>
+        <p:nvSpPr>
+          <p:cNvPr id="11" name="Rounded Rectangle 10"/>
           <p:cNvSpPr/>
           <p:nvPr/>
         </p:nvSpPr>
         <p:spPr>
           <a:xfrm>
-            <a:off x="822960" y="4160520"/>
-            <a:ext cx="10515600" cy="1874519"/>
+            <a:off x="8016240" y="2011680"/>
+            <a:ext cx="3322320" cy="3108960"/>
           </a:xfrm>
           <a:prstGeom prst="roundRect">
             <a:avLst>
-              <a:gd name="adj" fmla="val 5000"/>
+              <a:gd name="adj" fmla="val 9000"/>
             </a:avLst>
           </a:prstGeom>
           <a:solidFill>
             <a:srgbClr val="FFFFFF"/>
           </a:solidFill>
-          <a:ln>
-            <a:noFill/>
+          <a:ln w="12700">
+            <a:solidFill>
+              <a:srgbClr val="DED9EA"/>
+            </a:solidFill>
           </a:ln>
           <a:effectLst/>
         </p:spPr>
@@ -5167,58 +5506,14 @@
       </p:sp>
       <p:sp>
         <p:nvSpPr>
-          <p:cNvPr id="10" name="Rectangle 9"/>
-          <p:cNvSpPr/>
-          <p:nvPr/>
-        </p:nvSpPr>
-        <p:spPr>
-          <a:xfrm>
-            <a:off x="822960" y="4160520"/>
-            <a:ext cx="82296" cy="1874519"/>
-          </a:xfrm>
-          <a:prstGeom prst="rect">
-            <a:avLst/>
-          </a:prstGeom>
-          <a:solidFill>
-            <a:srgbClr val="12746A"/>
-          </a:solidFill>
-          <a:ln>
-            <a:noFill/>
-          </a:ln>
-          <a:effectLst/>
-        </p:spPr>
-        <p:style>
-          <a:lnRef idx="1">
-            <a:schemeClr val="accent1"/>
-          </a:lnRef>
-          <a:fillRef idx="3">
-            <a:schemeClr val="accent1"/>
-          </a:fillRef>
-          <a:effectRef idx="2">
-            <a:schemeClr val="accent1"/>
-          </a:effectRef>
-          <a:fontRef idx="minor">
-            <a:schemeClr val="lt1"/>
-          </a:fontRef>
-        </p:style>
-        <p:txBody>
-          <a:bodyPr rtlCol="0" anchor="ctr"/>
-          <a:lstStyle/>
-          <a:p>
-            <a:pPr algn="ctr"/>
-          </a:p>
-        </p:txBody>
-      </p:sp>
-      <p:sp>
-        <p:nvSpPr>
-          <p:cNvPr id="11" name="TextBox 10"/>
-          <p:cNvSpPr txBox="1"/>
-          <p:nvPr/>
-        </p:nvSpPr>
-        <p:spPr>
-          <a:xfrm>
-            <a:off x="1188720" y="4361688"/>
-            <a:ext cx="9784080" cy="457200"/>
+          <p:cNvPr id="12" name="TextBox 11"/>
+          <p:cNvSpPr txBox="1"/>
+          <p:nvPr/>
+        </p:nvSpPr>
+        <p:spPr>
+          <a:xfrm>
+            <a:off x="8272272" y="2267712"/>
+            <a:ext cx="2810256" cy="457200"/>
           </a:xfrm>
           <a:prstGeom prst="rect">
             <a:avLst/>
@@ -5237,27 +5532,27 @@
               </a:lnSpc>
             </a:pPr>
             <a:r>
-              <a:rPr sz="1700" b="1" i="0">
+              <a:rPr sz="1450" b="1" i="0">
                 <a:solidFill>
                   <a:srgbClr val="12746A"/>
                 </a:solidFill>
                 <a:latin typeface="Century Gothic"/>
               </a:rPr>
-              <a:t>“A 51% attack lets you steal anyone's funds.”</a:t>
-            </a:r>
-          </a:p>
-        </p:txBody>
-      </p:sp>
-      <p:sp>
-        <p:nvSpPr>
-          <p:cNvPr id="12" name="TextBox 11"/>
-          <p:cNvSpPr txBox="1"/>
-          <p:nvPr/>
-        </p:nvSpPr>
-        <p:spPr>
-          <a:xfrm>
-            <a:off x="1188720" y="4846320"/>
-            <a:ext cx="9784080" cy="1097280"/>
+              <a:t>Flight-Control Redundancy</a:t>
+            </a:r>
+          </a:p>
+        </p:txBody>
+      </p:sp>
+      <p:sp>
+        <p:nvSpPr>
+          <p:cNvPr id="13" name="TextBox 12"/>
+          <p:cNvSpPr txBox="1"/>
+          <p:nvPr/>
+        </p:nvSpPr>
+        <p:spPr>
+          <a:xfrm>
+            <a:off x="8272272" y="2724912"/>
+            <a:ext cx="2810256" cy="2258568"/>
           </a:xfrm>
           <a:prstGeom prst="rect">
             <a:avLst/>
@@ -5272,24 +5567,24 @@
           <a:p>
             <a:pPr algn="l">
               <a:lnSpc>
-                <a:spcPct val="135000"/>
-              </a:lnSpc>
-            </a:pPr>
-            <a:r>
-              <a:rPr sz="1300" b="0" i="0">
-                <a:solidFill>
-                  <a:srgbClr val="5C576E"/>
+                <a:spcPct val="128000"/>
+              </a:lnSpc>
+            </a:pPr>
+            <a:r>
+              <a:rPr sz="1150" b="0" i="0">
+                <a:solidFill>
+                  <a:srgbClr val="1C1730"/>
                 </a:solidFill>
                 <a:latin typeface="Calibri"/>
               </a:rPr>
-              <a:t>It lets you rewrite the recent ordering of YOUR OWN transactions — not forge signatures for wallets you don't control. See the case study above.</a:t>
-            </a:r>
-          </a:p>
-        </p:txBody>
-      </p:sp>
-      <p:sp>
-        <p:nvSpPr>
-          <p:cNvPr id="13" name="TextBox 12"/>
+              <a:t>The 1982 Byzantine Generals paper was partly motivated by aircraft sensors needing to agree despite a faulty unit.</a:t>
+            </a:r>
+          </a:p>
+        </p:txBody>
+      </p:sp>
+      <p:sp>
+        <p:nvSpPr>
+          <p:cNvPr id="14" name="TextBox 13"/>
           <p:cNvSpPr txBox="1"/>
           <p:nvPr/>
         </p:nvSpPr>
@@ -5321,7 +5616,7 @@
                 </a:solidFill>
                 <a:latin typeface="Consolas"/>
               </a:rPr>
-              <a:t>13 / 15</a:t>
+              <a:t>13 / 18</a:t>
             </a:r>
           </a:p>
         </p:txBody>
@@ -5422,7 +5717,7 @@
                 </a:solidFill>
                 <a:latin typeface="Calibri"/>
               </a:rPr>
-              <a:t>HANDS-ON PRACTICE</a:t>
+              <a:t>FLAGSHIP CASE STUDY</a:t>
             </a:r>
           </a:p>
         </p:txBody>
@@ -5435,8 +5730,8 @@
         </p:nvSpPr>
         <p:spPr>
           <a:xfrm>
-            <a:off x="822960" y="1051560"/>
-            <a:ext cx="9601200" cy="1005840"/>
+            <a:off x="822960" y="1097280"/>
+            <a:ext cx="10332720" cy="1005840"/>
           </a:xfrm>
           <a:prstGeom prst="rect">
             <a:avLst/>
@@ -5455,30 +5750,32 @@
               </a:lnSpc>
             </a:pPr>
             <a:r>
-              <a:rPr sz="3200" b="1" i="0">
+              <a:rPr sz="3000" b="1" i="0">
                 <a:solidFill>
                   <a:srgbClr val="1C1730"/>
                 </a:solidFill>
                 <a:latin typeface="Century Gothic"/>
               </a:rPr>
-              <a:t>Do This Now</a:t>
-            </a:r>
-          </a:p>
-        </p:txBody>
-      </p:sp>
-      <p:sp>
-        <p:nvSpPr>
-          <p:cNvPr id="5" name="Oval 4"/>
+              <a:t>What A 51% Attacker Can — And Can't — Do</a:t>
+            </a:r>
+          </a:p>
+        </p:txBody>
+      </p:sp>
+      <p:sp>
+        <p:nvSpPr>
+          <p:cNvPr id="5" name="Rounded Rectangle 4"/>
           <p:cNvSpPr/>
           <p:nvPr/>
         </p:nvSpPr>
         <p:spPr>
           <a:xfrm>
-            <a:off x="822960" y="2148840"/>
-            <a:ext cx="502920" cy="502920"/>
-          </a:xfrm>
-          <a:prstGeom prst="ellipse">
-            <a:avLst/>
+            <a:off x="822960" y="2423160"/>
+            <a:ext cx="10515600" cy="3749039"/>
+          </a:xfrm>
+          <a:prstGeom prst="roundRect">
+            <a:avLst>
+              <a:gd name="adj" fmla="val 4000"/>
+            </a:avLst>
           </a:prstGeom>
           <a:solidFill>
             <a:srgbClr val="12746A"/>
@@ -5503,248 +5800,55 @@
           </a:fontRef>
         </p:style>
         <p:txBody>
-          <a:bodyPr rtlCol="0" anchor="ctr" wrap="none"/>
+          <a:bodyPr rtlCol="0" anchor="ctr"/>
           <a:lstStyle/>
           <a:p>
             <a:pPr algn="ctr"/>
-            <a:r>
-              <a:rPr sz="1500" b="1">
+          </a:p>
+        </p:txBody>
+      </p:sp>
+      <p:sp>
+        <p:nvSpPr>
+          <p:cNvPr id="6" name="TextBox 5"/>
+          <p:cNvSpPr txBox="1"/>
+          <p:nvPr/>
+        </p:nvSpPr>
+        <p:spPr>
+          <a:xfrm>
+            <a:off x="1280160" y="2743200"/>
+            <a:ext cx="9601200" cy="3200400"/>
+          </a:xfrm>
+          <a:prstGeom prst="rect">
+            <a:avLst/>
+          </a:prstGeom>
+          <a:noFill/>
+        </p:spPr>
+        <p:txBody>
+          <a:bodyPr wrap="square" anchor="t" lIns="0" rIns="0" tIns="0" bIns="0">
+            <a:spAutoFit/>
+          </a:bodyPr>
+          <a:lstStyle/>
+          <a:p>
+            <a:pPr algn="l">
+              <a:lnSpc>
+                <a:spcPct val="155000"/>
+              </a:lnSpc>
+            </a:pPr>
+            <a:r>
+              <a:rPr sz="1600" b="0" i="0">
                 <a:solidFill>
                   <a:srgbClr val="FFFFFF"/>
                 </a:solidFill>
-                <a:latin typeface="Century Gothic"/>
-              </a:rPr>
-              <a:t>1</a:t>
-            </a:r>
-          </a:p>
-        </p:txBody>
-      </p:sp>
-      <p:sp>
-        <p:nvSpPr>
-          <p:cNvPr id="6" name="TextBox 5"/>
-          <p:cNvSpPr txBox="1"/>
-          <p:nvPr/>
-        </p:nvSpPr>
-        <p:spPr>
-          <a:xfrm>
-            <a:off x="1600200" y="2203704"/>
-            <a:ext cx="9509760" cy="822960"/>
-          </a:xfrm>
-          <a:prstGeom prst="rect">
-            <a:avLst/>
-          </a:prstGeom>
-          <a:noFill/>
-        </p:spPr>
-        <p:txBody>
-          <a:bodyPr wrap="square" anchor="t" lIns="0" rIns="0" tIns="0" bIns="0">
-            <a:spAutoFit/>
-          </a:bodyPr>
-          <a:lstStyle/>
-          <a:p>
-            <a:pPr algn="l">
-              <a:lnSpc>
-                <a:spcPct val="130000"/>
-              </a:lnSpc>
-            </a:pPr>
-            <a:r>
-              <a:rPr sz="1500" b="0" i="0">
-                <a:solidFill>
-                  <a:srgbClr val="1C1730"/>
-                </a:solidFill>
                 <a:latin typeface="Calibri"/>
               </a:rPr>
-              <a:t>Work out by hand: for a network of 31 nodes, what's the max tolerable count of dishonest nodes?</a:t>
-            </a:r>
-          </a:p>
-        </p:txBody>
-      </p:sp>
-      <p:sp>
-        <p:nvSpPr>
-          <p:cNvPr id="7" name="Oval 6"/>
-          <p:cNvSpPr/>
-          <p:nvPr/>
-        </p:nvSpPr>
-        <p:spPr>
-          <a:xfrm>
-            <a:off x="822960" y="3108960"/>
-            <a:ext cx="502920" cy="502920"/>
-          </a:xfrm>
-          <a:prstGeom prst="ellipse">
-            <a:avLst/>
-          </a:prstGeom>
-          <a:solidFill>
-            <a:srgbClr val="12746A"/>
-          </a:solidFill>
-          <a:ln>
-            <a:noFill/>
-          </a:ln>
-          <a:effectLst/>
-        </p:spPr>
-        <p:style>
-          <a:lnRef idx="1">
-            <a:schemeClr val="accent1"/>
-          </a:lnRef>
-          <a:fillRef idx="3">
-            <a:schemeClr val="accent1"/>
-          </a:fillRef>
-          <a:effectRef idx="2">
-            <a:schemeClr val="accent1"/>
-          </a:effectRef>
-          <a:fontRef idx="minor">
-            <a:schemeClr val="lt1"/>
-          </a:fontRef>
-        </p:style>
-        <p:txBody>
-          <a:bodyPr rtlCol="0" anchor="ctr" wrap="none"/>
-          <a:lstStyle/>
-          <a:p>
-            <a:pPr algn="ctr"/>
-            <a:r>
-              <a:rPr sz="1500" b="1">
-                <a:solidFill>
-                  <a:srgbClr val="FFFFFF"/>
-                </a:solidFill>
-                <a:latin typeface="Century Gothic"/>
-              </a:rPr>
-              <a:t>2</a:t>
-            </a:r>
-          </a:p>
-        </p:txBody>
-      </p:sp>
-      <p:sp>
-        <p:nvSpPr>
-          <p:cNvPr id="8" name="TextBox 7"/>
-          <p:cNvSpPr txBox="1"/>
-          <p:nvPr/>
-        </p:nvSpPr>
-        <p:spPr>
-          <a:xfrm>
-            <a:off x="1600200" y="3163824"/>
-            <a:ext cx="9509760" cy="822960"/>
-          </a:xfrm>
-          <a:prstGeom prst="rect">
-            <a:avLst/>
-          </a:prstGeom>
-          <a:noFill/>
-        </p:spPr>
-        <p:txBody>
-          <a:bodyPr wrap="square" anchor="t" lIns="0" rIns="0" tIns="0" bIns="0">
-            <a:spAutoFit/>
-          </a:bodyPr>
-          <a:lstStyle/>
-          <a:p>
-            <a:pPr algn="l">
-              <a:lnSpc>
-                <a:spcPct val="130000"/>
-              </a:lnSpc>
-            </a:pPr>
-            <a:r>
-              <a:rPr sz="1500" b="0" i="0">
-                <a:solidFill>
-                  <a:srgbClr val="1C1730"/>
-                </a:solidFill>
-                <a:latin typeface="Calibri"/>
-              </a:rPr>
-              <a:t>On the Anders Brownworth distributed demo, mine a block on one peer and watch it propagate.</a:t>
-            </a:r>
-          </a:p>
-        </p:txBody>
-      </p:sp>
-      <p:sp>
-        <p:nvSpPr>
-          <p:cNvPr id="9" name="Oval 8"/>
-          <p:cNvSpPr/>
-          <p:nvPr/>
-        </p:nvSpPr>
-        <p:spPr>
-          <a:xfrm>
-            <a:off x="822960" y="4069080"/>
-            <a:ext cx="502920" cy="502920"/>
-          </a:xfrm>
-          <a:prstGeom prst="ellipse">
-            <a:avLst/>
-          </a:prstGeom>
-          <a:solidFill>
-            <a:srgbClr val="12746A"/>
-          </a:solidFill>
-          <a:ln>
-            <a:noFill/>
-          </a:ln>
-          <a:effectLst/>
-        </p:spPr>
-        <p:style>
-          <a:lnRef idx="1">
-            <a:schemeClr val="accent1"/>
-          </a:lnRef>
-          <a:fillRef idx="3">
-            <a:schemeClr val="accent1"/>
-          </a:fillRef>
-          <a:effectRef idx="2">
-            <a:schemeClr val="accent1"/>
-          </a:effectRef>
-          <a:fontRef idx="minor">
-            <a:schemeClr val="lt1"/>
-          </a:fontRef>
-        </p:style>
-        <p:txBody>
-          <a:bodyPr rtlCol="0" anchor="ctr" wrap="none"/>
-          <a:lstStyle/>
-          <a:p>
-            <a:pPr algn="ctr"/>
-            <a:r>
-              <a:rPr sz="1500" b="1">
-                <a:solidFill>
-                  <a:srgbClr val="FFFFFF"/>
-                </a:solidFill>
-                <a:latin typeface="Century Gothic"/>
-              </a:rPr>
-              <a:t>3</a:t>
-            </a:r>
-          </a:p>
-        </p:txBody>
-      </p:sp>
-      <p:sp>
-        <p:nvSpPr>
-          <p:cNvPr id="10" name="TextBox 9"/>
-          <p:cNvSpPr txBox="1"/>
-          <p:nvPr/>
-        </p:nvSpPr>
-        <p:spPr>
-          <a:xfrm>
-            <a:off x="1600200" y="4123944"/>
-            <a:ext cx="9509760" cy="822960"/>
-          </a:xfrm>
-          <a:prstGeom prst="rect">
-            <a:avLst/>
-          </a:prstGeom>
-          <a:noFill/>
-        </p:spPr>
-        <p:txBody>
-          <a:bodyPr wrap="square" anchor="t" lIns="0" rIns="0" tIns="0" bIns="0">
-            <a:spAutoFit/>
-          </a:bodyPr>
-          <a:lstStyle/>
-          <a:p>
-            <a:pPr algn="l">
-              <a:lnSpc>
-                <a:spcPct val="130000"/>
-              </a:lnSpc>
-            </a:pPr>
-            <a:r>
-              <a:rPr sz="1500" b="0" i="0">
-                <a:solidFill>
-                  <a:srgbClr val="1C1730"/>
-                </a:solidFill>
-                <a:latin typeface="Calibri"/>
-              </a:rPr>
-              <a:t>Introduce a rogue block on one peer and watch the rest of the network reject it.</a:t>
-            </a:r>
-          </a:p>
-        </p:txBody>
-      </p:sp>
-      <p:sp>
-        <p:nvSpPr>
-          <p:cNvPr id="11" name="TextBox 10"/>
+              <a:t>In 2019 and 2020, Ethereum Classic suffered three confirmed 51%-attacks totaling $10.1M in double-spends. The attacker rewrote recent block ordering to reverse their OWN sent transactions. They could NOT forge a signature for funds they never controlled, and could NOT touch other users' wallets — the Topic 02 cryptography held perfectly throughout. A 51% attack breaks “who got here first,” not the underlying math.</a:t>
+            </a:r>
+          </a:p>
+        </p:txBody>
+      </p:sp>
+      <p:sp>
+        <p:nvSpPr>
+          <p:cNvPr id="7" name="TextBox 6"/>
           <p:cNvSpPr txBox="1"/>
           <p:nvPr/>
         </p:nvSpPr>
@@ -5776,7 +5880,7 @@
                 </a:solidFill>
                 <a:latin typeface="Consolas"/>
               </a:rPr>
-              <a:t>14 / 15</a:t>
+              <a:t>14 / 18</a:t>
             </a:r>
           </a:p>
         </p:txBody>
@@ -5814,6 +5918,1238 @@
             <a:avLst/>
           </a:prstGeom>
           <a:solidFill>
+            <a:srgbClr val="F8F6F2"/>
+          </a:solidFill>
+          <a:ln>
+            <a:noFill/>
+          </a:ln>
+          <a:effectLst/>
+        </p:spPr>
+        <p:style>
+          <a:lnRef idx="1">
+            <a:schemeClr val="accent1"/>
+          </a:lnRef>
+          <a:fillRef idx="3">
+            <a:schemeClr val="accent1"/>
+          </a:fillRef>
+          <a:effectRef idx="2">
+            <a:schemeClr val="accent1"/>
+          </a:effectRef>
+          <a:fontRef idx="minor">
+            <a:schemeClr val="lt1"/>
+          </a:fontRef>
+        </p:style>
+        <p:txBody>
+          <a:bodyPr rtlCol="0" anchor="ctr"/>
+          <a:lstStyle/>
+          <a:p>
+            <a:pPr algn="ctr"/>
+          </a:p>
+        </p:txBody>
+      </p:sp>
+      <p:sp>
+        <p:nvSpPr>
+          <p:cNvPr id="3" name="TextBox 2"/>
+          <p:cNvSpPr txBox="1"/>
+          <p:nvPr/>
+        </p:nvSpPr>
+        <p:spPr>
+          <a:xfrm>
+            <a:off x="822960" y="640080"/>
+            <a:ext cx="10058400" cy="365760"/>
+          </a:xfrm>
+          <a:prstGeom prst="rect">
+            <a:avLst/>
+          </a:prstGeom>
+          <a:noFill/>
+        </p:spPr>
+        <p:txBody>
+          <a:bodyPr wrap="square" anchor="t" lIns="0" rIns="0" tIns="0" bIns="0">
+            <a:spAutoFit/>
+          </a:bodyPr>
+          <a:lstStyle/>
+          <a:p>
+            <a:pPr algn="l">
+              <a:lnSpc>
+                <a:spcPct val="115000"/>
+              </a:lnSpc>
+            </a:pPr>
+            <a:r>
+              <a:rPr sz="1300" b="1" i="0">
+                <a:solidFill>
+                  <a:srgbClr val="12746A"/>
+                </a:solidFill>
+                <a:latin typeface="Calibri"/>
+              </a:rPr>
+              <a:t>REAL-LIFE ANALOGY</a:t>
+            </a:r>
+          </a:p>
+        </p:txBody>
+      </p:sp>
+      <p:sp>
+        <p:nvSpPr>
+          <p:cNvPr id="4" name="TextBox 3"/>
+          <p:cNvSpPr txBox="1"/>
+          <p:nvPr/>
+        </p:nvSpPr>
+        <p:spPr>
+          <a:xfrm>
+            <a:off x="822960" y="1097280"/>
+            <a:ext cx="10332720" cy="1005840"/>
+          </a:xfrm>
+          <a:prstGeom prst="rect">
+            <a:avLst/>
+          </a:prstGeom>
+          <a:noFill/>
+        </p:spPr>
+        <p:txBody>
+          <a:bodyPr wrap="square" anchor="t" lIns="0" rIns="0" tIns="0" bIns="0">
+            <a:spAutoFit/>
+          </a:bodyPr>
+          <a:lstStyle/>
+          <a:p>
+            <a:pPr algn="l">
+              <a:lnSpc>
+                <a:spcPct val="105000"/>
+              </a:lnSpc>
+            </a:pPr>
+            <a:r>
+              <a:rPr sz="3000" b="1" i="0">
+                <a:solidFill>
+                  <a:srgbClr val="1C1730"/>
+                </a:solidFill>
+                <a:latin typeface="Century Gothic"/>
+              </a:rPr>
+              <a:t>Generals Surrounding A City</a:t>
+            </a:r>
+          </a:p>
+        </p:txBody>
+      </p:sp>
+      <p:sp>
+        <p:nvSpPr>
+          <p:cNvPr id="5" name="Rectangle 4"/>
+          <p:cNvSpPr/>
+          <p:nvPr/>
+        </p:nvSpPr>
+        <p:spPr>
+          <a:xfrm>
+            <a:off x="822960" y="2286000"/>
+            <a:ext cx="91440" cy="3657600"/>
+          </a:xfrm>
+          <a:prstGeom prst="rect">
+            <a:avLst/>
+          </a:prstGeom>
+          <a:solidFill>
+            <a:srgbClr val="12746A"/>
+          </a:solidFill>
+          <a:ln>
+            <a:noFill/>
+          </a:ln>
+          <a:effectLst/>
+        </p:spPr>
+        <p:style>
+          <a:lnRef idx="1">
+            <a:schemeClr val="accent1"/>
+          </a:lnRef>
+          <a:fillRef idx="3">
+            <a:schemeClr val="accent1"/>
+          </a:fillRef>
+          <a:effectRef idx="2">
+            <a:schemeClr val="accent1"/>
+          </a:effectRef>
+          <a:fontRef idx="minor">
+            <a:schemeClr val="lt1"/>
+          </a:fontRef>
+        </p:style>
+        <p:txBody>
+          <a:bodyPr rtlCol="0" anchor="ctr"/>
+          <a:lstStyle/>
+          <a:p>
+            <a:pPr algn="ctr"/>
+          </a:p>
+        </p:txBody>
+      </p:sp>
+      <p:sp>
+        <p:nvSpPr>
+          <p:cNvPr id="6" name="TextBox 5"/>
+          <p:cNvSpPr txBox="1"/>
+          <p:nvPr/>
+        </p:nvSpPr>
+        <p:spPr>
+          <a:xfrm>
+            <a:off x="1280160" y="2377440"/>
+            <a:ext cx="9784080" cy="3566160"/>
+          </a:xfrm>
+          <a:prstGeom prst="rect">
+            <a:avLst/>
+          </a:prstGeom>
+          <a:noFill/>
+        </p:spPr>
+        <p:txBody>
+          <a:bodyPr wrap="square" anchor="t" lIns="0" rIns="0" tIns="0" bIns="0">
+            <a:spAutoFit/>
+          </a:bodyPr>
+          <a:lstStyle/>
+          <a:p>
+            <a:pPr algn="l">
+              <a:lnSpc>
+                <a:spcPct val="160000"/>
+              </a:lnSpc>
+            </a:pPr>
+            <a:r>
+              <a:rPr sz="1800" b="0" i="0">
+                <a:solidFill>
+                  <a:srgbClr val="1C1730"/>
+                </a:solidFill>
+                <a:latin typeface="Calibri"/>
+              </a:rPr>
+              <a:t>Several generals must all attack together, or all retreat together — communicating only via messengers who might be delayed, lost, or secretly traitorous. This is exactly the situation a blockchain network is in: independent nodes, unreliable networks, some possibly malicious — and PoW / PoS are two different, practical answers to how the honest majority still reaches agreement anyway.</a:t>
+            </a:r>
+          </a:p>
+        </p:txBody>
+      </p:sp>
+      <p:sp>
+        <p:nvSpPr>
+          <p:cNvPr id="7" name="TextBox 6"/>
+          <p:cNvSpPr txBox="1"/>
+          <p:nvPr/>
+        </p:nvSpPr>
+        <p:spPr>
+          <a:xfrm>
+            <a:off x="9966960" y="502920"/>
+            <a:ext cx="1371600" cy="320040"/>
+          </a:xfrm>
+          <a:prstGeom prst="rect">
+            <a:avLst/>
+          </a:prstGeom>
+          <a:noFill/>
+        </p:spPr>
+        <p:txBody>
+          <a:bodyPr wrap="square" anchor="t" lIns="0" rIns="0" tIns="0" bIns="0">
+            <a:spAutoFit/>
+          </a:bodyPr>
+          <a:lstStyle/>
+          <a:p>
+            <a:pPr algn="r">
+              <a:lnSpc>
+                <a:spcPct val="115000"/>
+              </a:lnSpc>
+            </a:pPr>
+            <a:r>
+              <a:rPr sz="1100" b="1" i="0">
+                <a:solidFill>
+                  <a:srgbClr val="5C576E"/>
+                </a:solidFill>
+                <a:latin typeface="Consolas"/>
+              </a:rPr>
+              <a:t>15 / 18</a:t>
+            </a:r>
+          </a:p>
+        </p:txBody>
+      </p:sp>
+    </p:spTree>
+  </p:cSld>
+  <p:clrMapOvr>
+    <a:masterClrMapping/>
+  </p:clrMapOvr>
+</p:sld>
+</file>
+
+<file path=ppt/slides/slide16.xml><?xml version="1.0" encoding="utf-8"?>
+<p:sld xmlns:a="http://schemas.openxmlformats.org/drawingml/2006/main" xmlns:p="http://schemas.openxmlformats.org/presentationml/2006/main" xmlns:r="http://schemas.openxmlformats.org/officeDocument/2006/relationships">
+  <p:cSld>
+    <p:spTree>
+      <p:nvGrpSpPr>
+        <p:cNvPr id="1" name=""/>
+        <p:cNvGrpSpPr/>
+        <p:nvPr/>
+      </p:nvGrpSpPr>
+      <p:grpSpPr/>
+      <p:sp>
+        <p:nvSpPr>
+          <p:cNvPr id="2" name="Rectangle 1"/>
+          <p:cNvSpPr/>
+          <p:nvPr/>
+        </p:nvSpPr>
+        <p:spPr>
+          <a:xfrm>
+            <a:off x="0" y="0"/>
+            <a:ext cx="12191695" cy="6858000"/>
+          </a:xfrm>
+          <a:prstGeom prst="rect">
+            <a:avLst/>
+          </a:prstGeom>
+          <a:solidFill>
+            <a:srgbClr val="F8F6F2"/>
+          </a:solidFill>
+          <a:ln>
+            <a:noFill/>
+          </a:ln>
+          <a:effectLst/>
+        </p:spPr>
+        <p:style>
+          <a:lnRef idx="1">
+            <a:schemeClr val="accent1"/>
+          </a:lnRef>
+          <a:fillRef idx="3">
+            <a:schemeClr val="accent1"/>
+          </a:fillRef>
+          <a:effectRef idx="2">
+            <a:schemeClr val="accent1"/>
+          </a:effectRef>
+          <a:fontRef idx="minor">
+            <a:schemeClr val="lt1"/>
+          </a:fontRef>
+        </p:style>
+        <p:txBody>
+          <a:bodyPr rtlCol="0" anchor="ctr"/>
+          <a:lstStyle/>
+          <a:p>
+            <a:pPr algn="ctr"/>
+          </a:p>
+        </p:txBody>
+      </p:sp>
+      <p:sp>
+        <p:nvSpPr>
+          <p:cNvPr id="3" name="TextBox 2"/>
+          <p:cNvSpPr txBox="1"/>
+          <p:nvPr/>
+        </p:nvSpPr>
+        <p:spPr>
+          <a:xfrm>
+            <a:off x="822960" y="640080"/>
+            <a:ext cx="10058400" cy="365760"/>
+          </a:xfrm>
+          <a:prstGeom prst="rect">
+            <a:avLst/>
+          </a:prstGeom>
+          <a:noFill/>
+        </p:spPr>
+        <p:txBody>
+          <a:bodyPr wrap="square" anchor="t" lIns="0" rIns="0" tIns="0" bIns="0">
+            <a:spAutoFit/>
+          </a:bodyPr>
+          <a:lstStyle/>
+          <a:p>
+            <a:pPr algn="l">
+              <a:lnSpc>
+                <a:spcPct val="115000"/>
+              </a:lnSpc>
+            </a:pPr>
+            <a:r>
+              <a:rPr sz="1300" b="1" i="0">
+                <a:solidFill>
+                  <a:srgbClr val="12746A"/>
+                </a:solidFill>
+                <a:latin typeface="Calibri"/>
+              </a:rPr>
+              <a:t>COMMON MISCONCEPTIONS</a:t>
+            </a:r>
+          </a:p>
+        </p:txBody>
+      </p:sp>
+      <p:sp>
+        <p:nvSpPr>
+          <p:cNvPr id="4" name="TextBox 3"/>
+          <p:cNvSpPr txBox="1"/>
+          <p:nvPr/>
+        </p:nvSpPr>
+        <p:spPr>
+          <a:xfrm>
+            <a:off x="822960" y="1051560"/>
+            <a:ext cx="9601200" cy="1005840"/>
+          </a:xfrm>
+          <a:prstGeom prst="rect">
+            <a:avLst/>
+          </a:prstGeom>
+          <a:noFill/>
+        </p:spPr>
+        <p:txBody>
+          <a:bodyPr wrap="square" anchor="t" lIns="0" rIns="0" tIns="0" bIns="0">
+            <a:spAutoFit/>
+          </a:bodyPr>
+          <a:lstStyle/>
+          <a:p>
+            <a:pPr algn="l">
+              <a:lnSpc>
+                <a:spcPct val="105000"/>
+              </a:lnSpc>
+            </a:pPr>
+            <a:r>
+              <a:rPr sz="3000" b="1" i="0">
+                <a:solidFill>
+                  <a:srgbClr val="1C1730"/>
+                </a:solidFill>
+                <a:latin typeface="Century Gothic"/>
+              </a:rPr>
+              <a:t>Where People Get Tripped Up</a:t>
+            </a:r>
+          </a:p>
+        </p:txBody>
+      </p:sp>
+      <p:sp>
+        <p:nvSpPr>
+          <p:cNvPr id="5" name="Rounded Rectangle 4"/>
+          <p:cNvSpPr/>
+          <p:nvPr/>
+        </p:nvSpPr>
+        <p:spPr>
+          <a:xfrm>
+            <a:off x="822960" y="2057400"/>
+            <a:ext cx="10515600" cy="1874519"/>
+          </a:xfrm>
+          <a:prstGeom prst="roundRect">
+            <a:avLst>
+              <a:gd name="adj" fmla="val 5000"/>
+            </a:avLst>
+          </a:prstGeom>
+          <a:solidFill>
+            <a:srgbClr val="FFFFFF"/>
+          </a:solidFill>
+          <a:ln>
+            <a:noFill/>
+          </a:ln>
+          <a:effectLst/>
+        </p:spPr>
+        <p:style>
+          <a:lnRef idx="1">
+            <a:schemeClr val="accent1"/>
+          </a:lnRef>
+          <a:fillRef idx="3">
+            <a:schemeClr val="accent1"/>
+          </a:fillRef>
+          <a:effectRef idx="2">
+            <a:schemeClr val="accent1"/>
+          </a:effectRef>
+          <a:fontRef idx="minor">
+            <a:schemeClr val="lt1"/>
+          </a:fontRef>
+        </p:style>
+        <p:txBody>
+          <a:bodyPr rtlCol="0" anchor="ctr"/>
+          <a:lstStyle/>
+          <a:p>
+            <a:pPr algn="ctr"/>
+          </a:p>
+        </p:txBody>
+      </p:sp>
+      <p:sp>
+        <p:nvSpPr>
+          <p:cNvPr id="6" name="Rectangle 5"/>
+          <p:cNvSpPr/>
+          <p:nvPr/>
+        </p:nvSpPr>
+        <p:spPr>
+          <a:xfrm>
+            <a:off x="822960" y="2057400"/>
+            <a:ext cx="82296" cy="1874519"/>
+          </a:xfrm>
+          <a:prstGeom prst="rect">
+            <a:avLst/>
+          </a:prstGeom>
+          <a:solidFill>
+            <a:srgbClr val="12746A"/>
+          </a:solidFill>
+          <a:ln>
+            <a:noFill/>
+          </a:ln>
+          <a:effectLst/>
+        </p:spPr>
+        <p:style>
+          <a:lnRef idx="1">
+            <a:schemeClr val="accent1"/>
+          </a:lnRef>
+          <a:fillRef idx="3">
+            <a:schemeClr val="accent1"/>
+          </a:fillRef>
+          <a:effectRef idx="2">
+            <a:schemeClr val="accent1"/>
+          </a:effectRef>
+          <a:fontRef idx="minor">
+            <a:schemeClr val="lt1"/>
+          </a:fontRef>
+        </p:style>
+        <p:txBody>
+          <a:bodyPr rtlCol="0" anchor="ctr"/>
+          <a:lstStyle/>
+          <a:p>
+            <a:pPr algn="ctr"/>
+          </a:p>
+        </p:txBody>
+      </p:sp>
+      <p:sp>
+        <p:nvSpPr>
+          <p:cNvPr id="7" name="TextBox 6"/>
+          <p:cNvSpPr txBox="1"/>
+          <p:nvPr/>
+        </p:nvSpPr>
+        <p:spPr>
+          <a:xfrm>
+            <a:off x="1188720" y="2258568"/>
+            <a:ext cx="9784080" cy="457200"/>
+          </a:xfrm>
+          <a:prstGeom prst="rect">
+            <a:avLst/>
+          </a:prstGeom>
+          <a:noFill/>
+        </p:spPr>
+        <p:txBody>
+          <a:bodyPr wrap="square" anchor="t" lIns="0" rIns="0" tIns="0" bIns="0">
+            <a:spAutoFit/>
+          </a:bodyPr>
+          <a:lstStyle/>
+          <a:p>
+            <a:pPr algn="l">
+              <a:lnSpc>
+                <a:spcPct val="115000"/>
+              </a:lnSpc>
+            </a:pPr>
+            <a:r>
+              <a:rPr sz="1700" b="1" i="0">
+                <a:solidFill>
+                  <a:srgbClr val="12746A"/>
+                </a:solidFill>
+                <a:latin typeface="Century Gothic"/>
+              </a:rPr>
+              <a:t>“Proof of Stake is just Proof of Work without the hardware.”</a:t>
+            </a:r>
+          </a:p>
+        </p:txBody>
+      </p:sp>
+      <p:sp>
+        <p:nvSpPr>
+          <p:cNvPr id="8" name="TextBox 7"/>
+          <p:cNvSpPr txBox="1"/>
+          <p:nvPr/>
+        </p:nvSpPr>
+        <p:spPr>
+          <a:xfrm>
+            <a:off x="1188720" y="2743200"/>
+            <a:ext cx="9784080" cy="1097280"/>
+          </a:xfrm>
+          <a:prstGeom prst="rect">
+            <a:avLst/>
+          </a:prstGeom>
+          <a:noFill/>
+        </p:spPr>
+        <p:txBody>
+          <a:bodyPr wrap="square" anchor="t" lIns="0" rIns="0" tIns="0" bIns="0">
+            <a:spAutoFit/>
+          </a:bodyPr>
+          <a:lstStyle/>
+          <a:p>
+            <a:pPr algn="l">
+              <a:lnSpc>
+                <a:spcPct val="135000"/>
+              </a:lnSpc>
+            </a:pPr>
+            <a:r>
+              <a:rPr sz="1300" b="0" i="0">
+                <a:solidFill>
+                  <a:srgbClr val="5C576E"/>
+                </a:solidFill>
+                <a:latin typeface="Calibri"/>
+              </a:rPr>
+              <a:t>The security models are genuinely different, not a simple swap: PoW's security is external sunk cost (electricity you can't get back). PoS's security is internal at-risk collateral (money the protocol itself destroys).</a:t>
+            </a:r>
+          </a:p>
+        </p:txBody>
+      </p:sp>
+      <p:sp>
+        <p:nvSpPr>
+          <p:cNvPr id="9" name="Rounded Rectangle 8"/>
+          <p:cNvSpPr/>
+          <p:nvPr/>
+        </p:nvSpPr>
+        <p:spPr>
+          <a:xfrm>
+            <a:off x="822960" y="4160520"/>
+            <a:ext cx="10515600" cy="1874519"/>
+          </a:xfrm>
+          <a:prstGeom prst="roundRect">
+            <a:avLst>
+              <a:gd name="adj" fmla="val 5000"/>
+            </a:avLst>
+          </a:prstGeom>
+          <a:solidFill>
+            <a:srgbClr val="FFFFFF"/>
+          </a:solidFill>
+          <a:ln>
+            <a:noFill/>
+          </a:ln>
+          <a:effectLst/>
+        </p:spPr>
+        <p:style>
+          <a:lnRef idx="1">
+            <a:schemeClr val="accent1"/>
+          </a:lnRef>
+          <a:fillRef idx="3">
+            <a:schemeClr val="accent1"/>
+          </a:fillRef>
+          <a:effectRef idx="2">
+            <a:schemeClr val="accent1"/>
+          </a:effectRef>
+          <a:fontRef idx="minor">
+            <a:schemeClr val="lt1"/>
+          </a:fontRef>
+        </p:style>
+        <p:txBody>
+          <a:bodyPr rtlCol="0" anchor="ctr"/>
+          <a:lstStyle/>
+          <a:p>
+            <a:pPr algn="ctr"/>
+          </a:p>
+        </p:txBody>
+      </p:sp>
+      <p:sp>
+        <p:nvSpPr>
+          <p:cNvPr id="10" name="Rectangle 9"/>
+          <p:cNvSpPr/>
+          <p:nvPr/>
+        </p:nvSpPr>
+        <p:spPr>
+          <a:xfrm>
+            <a:off x="822960" y="4160520"/>
+            <a:ext cx="82296" cy="1874519"/>
+          </a:xfrm>
+          <a:prstGeom prst="rect">
+            <a:avLst/>
+          </a:prstGeom>
+          <a:solidFill>
+            <a:srgbClr val="12746A"/>
+          </a:solidFill>
+          <a:ln>
+            <a:noFill/>
+          </a:ln>
+          <a:effectLst/>
+        </p:spPr>
+        <p:style>
+          <a:lnRef idx="1">
+            <a:schemeClr val="accent1"/>
+          </a:lnRef>
+          <a:fillRef idx="3">
+            <a:schemeClr val="accent1"/>
+          </a:fillRef>
+          <a:effectRef idx="2">
+            <a:schemeClr val="accent1"/>
+          </a:effectRef>
+          <a:fontRef idx="minor">
+            <a:schemeClr val="lt1"/>
+          </a:fontRef>
+        </p:style>
+        <p:txBody>
+          <a:bodyPr rtlCol="0" anchor="ctr"/>
+          <a:lstStyle/>
+          <a:p>
+            <a:pPr algn="ctr"/>
+          </a:p>
+        </p:txBody>
+      </p:sp>
+      <p:sp>
+        <p:nvSpPr>
+          <p:cNvPr id="11" name="TextBox 10"/>
+          <p:cNvSpPr txBox="1"/>
+          <p:nvPr/>
+        </p:nvSpPr>
+        <p:spPr>
+          <a:xfrm>
+            <a:off x="1188720" y="4361688"/>
+            <a:ext cx="9784080" cy="457200"/>
+          </a:xfrm>
+          <a:prstGeom prst="rect">
+            <a:avLst/>
+          </a:prstGeom>
+          <a:noFill/>
+        </p:spPr>
+        <p:txBody>
+          <a:bodyPr wrap="square" anchor="t" lIns="0" rIns="0" tIns="0" bIns="0">
+            <a:spAutoFit/>
+          </a:bodyPr>
+          <a:lstStyle/>
+          <a:p>
+            <a:pPr algn="l">
+              <a:lnSpc>
+                <a:spcPct val="115000"/>
+              </a:lnSpc>
+            </a:pPr>
+            <a:r>
+              <a:rPr sz="1700" b="1" i="0">
+                <a:solidFill>
+                  <a:srgbClr val="12746A"/>
+                </a:solidFill>
+                <a:latin typeface="Century Gothic"/>
+              </a:rPr>
+              <a:t>“A 51% attack lets you steal anyone's funds.”</a:t>
+            </a:r>
+          </a:p>
+        </p:txBody>
+      </p:sp>
+      <p:sp>
+        <p:nvSpPr>
+          <p:cNvPr id="12" name="TextBox 11"/>
+          <p:cNvSpPr txBox="1"/>
+          <p:nvPr/>
+        </p:nvSpPr>
+        <p:spPr>
+          <a:xfrm>
+            <a:off x="1188720" y="4846320"/>
+            <a:ext cx="9784080" cy="1097280"/>
+          </a:xfrm>
+          <a:prstGeom prst="rect">
+            <a:avLst/>
+          </a:prstGeom>
+          <a:noFill/>
+        </p:spPr>
+        <p:txBody>
+          <a:bodyPr wrap="square" anchor="t" lIns="0" rIns="0" tIns="0" bIns="0">
+            <a:spAutoFit/>
+          </a:bodyPr>
+          <a:lstStyle/>
+          <a:p>
+            <a:pPr algn="l">
+              <a:lnSpc>
+                <a:spcPct val="135000"/>
+              </a:lnSpc>
+            </a:pPr>
+            <a:r>
+              <a:rPr sz="1300" b="0" i="0">
+                <a:solidFill>
+                  <a:srgbClr val="5C576E"/>
+                </a:solidFill>
+                <a:latin typeface="Calibri"/>
+              </a:rPr>
+              <a:t>It lets you rewrite the recent ordering of YOUR OWN transactions — not forge signatures for wallets you don't control. See the case study above.</a:t>
+            </a:r>
+          </a:p>
+        </p:txBody>
+      </p:sp>
+      <p:sp>
+        <p:nvSpPr>
+          <p:cNvPr id="13" name="TextBox 12"/>
+          <p:cNvSpPr txBox="1"/>
+          <p:nvPr/>
+        </p:nvSpPr>
+        <p:spPr>
+          <a:xfrm>
+            <a:off x="9966960" y="502920"/>
+            <a:ext cx="1371600" cy="320040"/>
+          </a:xfrm>
+          <a:prstGeom prst="rect">
+            <a:avLst/>
+          </a:prstGeom>
+          <a:noFill/>
+        </p:spPr>
+        <p:txBody>
+          <a:bodyPr wrap="square" anchor="t" lIns="0" rIns="0" tIns="0" bIns="0">
+            <a:spAutoFit/>
+          </a:bodyPr>
+          <a:lstStyle/>
+          <a:p>
+            <a:pPr algn="r">
+              <a:lnSpc>
+                <a:spcPct val="115000"/>
+              </a:lnSpc>
+            </a:pPr>
+            <a:r>
+              <a:rPr sz="1100" b="1" i="0">
+                <a:solidFill>
+                  <a:srgbClr val="5C576E"/>
+                </a:solidFill>
+                <a:latin typeface="Consolas"/>
+              </a:rPr>
+              <a:t>16 / 18</a:t>
+            </a:r>
+          </a:p>
+        </p:txBody>
+      </p:sp>
+    </p:spTree>
+  </p:cSld>
+  <p:clrMapOvr>
+    <a:masterClrMapping/>
+  </p:clrMapOvr>
+</p:sld>
+</file>
+
+<file path=ppt/slides/slide17.xml><?xml version="1.0" encoding="utf-8"?>
+<p:sld xmlns:a="http://schemas.openxmlformats.org/drawingml/2006/main" xmlns:p="http://schemas.openxmlformats.org/presentationml/2006/main" xmlns:r="http://schemas.openxmlformats.org/officeDocument/2006/relationships">
+  <p:cSld>
+    <p:spTree>
+      <p:nvGrpSpPr>
+        <p:cNvPr id="1" name=""/>
+        <p:cNvGrpSpPr/>
+        <p:nvPr/>
+      </p:nvGrpSpPr>
+      <p:grpSpPr/>
+      <p:sp>
+        <p:nvSpPr>
+          <p:cNvPr id="2" name="Rectangle 1"/>
+          <p:cNvSpPr/>
+          <p:nvPr/>
+        </p:nvSpPr>
+        <p:spPr>
+          <a:xfrm>
+            <a:off x="0" y="0"/>
+            <a:ext cx="12191695" cy="6858000"/>
+          </a:xfrm>
+          <a:prstGeom prst="rect">
+            <a:avLst/>
+          </a:prstGeom>
+          <a:solidFill>
+            <a:srgbClr val="F8F6F2"/>
+          </a:solidFill>
+          <a:ln>
+            <a:noFill/>
+          </a:ln>
+          <a:effectLst/>
+        </p:spPr>
+        <p:style>
+          <a:lnRef idx="1">
+            <a:schemeClr val="accent1"/>
+          </a:lnRef>
+          <a:fillRef idx="3">
+            <a:schemeClr val="accent1"/>
+          </a:fillRef>
+          <a:effectRef idx="2">
+            <a:schemeClr val="accent1"/>
+          </a:effectRef>
+          <a:fontRef idx="minor">
+            <a:schemeClr val="lt1"/>
+          </a:fontRef>
+        </p:style>
+        <p:txBody>
+          <a:bodyPr rtlCol="0" anchor="ctr"/>
+          <a:lstStyle/>
+          <a:p>
+            <a:pPr algn="ctr"/>
+          </a:p>
+        </p:txBody>
+      </p:sp>
+      <p:sp>
+        <p:nvSpPr>
+          <p:cNvPr id="3" name="TextBox 2"/>
+          <p:cNvSpPr txBox="1"/>
+          <p:nvPr/>
+        </p:nvSpPr>
+        <p:spPr>
+          <a:xfrm>
+            <a:off x="822960" y="640080"/>
+            <a:ext cx="10058400" cy="365760"/>
+          </a:xfrm>
+          <a:prstGeom prst="rect">
+            <a:avLst/>
+          </a:prstGeom>
+          <a:noFill/>
+        </p:spPr>
+        <p:txBody>
+          <a:bodyPr wrap="square" anchor="t" lIns="0" rIns="0" tIns="0" bIns="0">
+            <a:spAutoFit/>
+          </a:bodyPr>
+          <a:lstStyle/>
+          <a:p>
+            <a:pPr algn="l">
+              <a:lnSpc>
+                <a:spcPct val="115000"/>
+              </a:lnSpc>
+            </a:pPr>
+            <a:r>
+              <a:rPr sz="1300" b="1" i="0">
+                <a:solidFill>
+                  <a:srgbClr val="12746A"/>
+                </a:solidFill>
+                <a:latin typeface="Calibri"/>
+              </a:rPr>
+              <a:t>HANDS-ON PRACTICE</a:t>
+            </a:r>
+          </a:p>
+        </p:txBody>
+      </p:sp>
+      <p:sp>
+        <p:nvSpPr>
+          <p:cNvPr id="4" name="TextBox 3"/>
+          <p:cNvSpPr txBox="1"/>
+          <p:nvPr/>
+        </p:nvSpPr>
+        <p:spPr>
+          <a:xfrm>
+            <a:off x="822960" y="1051560"/>
+            <a:ext cx="9601200" cy="1005840"/>
+          </a:xfrm>
+          <a:prstGeom prst="rect">
+            <a:avLst/>
+          </a:prstGeom>
+          <a:noFill/>
+        </p:spPr>
+        <p:txBody>
+          <a:bodyPr wrap="square" anchor="t" lIns="0" rIns="0" tIns="0" bIns="0">
+            <a:spAutoFit/>
+          </a:bodyPr>
+          <a:lstStyle/>
+          <a:p>
+            <a:pPr algn="l">
+              <a:lnSpc>
+                <a:spcPct val="105000"/>
+              </a:lnSpc>
+            </a:pPr>
+            <a:r>
+              <a:rPr sz="3200" b="1" i="0">
+                <a:solidFill>
+                  <a:srgbClr val="1C1730"/>
+                </a:solidFill>
+                <a:latin typeface="Century Gothic"/>
+              </a:rPr>
+              <a:t>Do This Now</a:t>
+            </a:r>
+          </a:p>
+        </p:txBody>
+      </p:sp>
+      <p:sp>
+        <p:nvSpPr>
+          <p:cNvPr id="5" name="Oval 4"/>
+          <p:cNvSpPr/>
+          <p:nvPr/>
+        </p:nvSpPr>
+        <p:spPr>
+          <a:xfrm>
+            <a:off x="822960" y="2148840"/>
+            <a:ext cx="502920" cy="502920"/>
+          </a:xfrm>
+          <a:prstGeom prst="ellipse">
+            <a:avLst/>
+          </a:prstGeom>
+          <a:solidFill>
+            <a:srgbClr val="12746A"/>
+          </a:solidFill>
+          <a:ln>
+            <a:noFill/>
+          </a:ln>
+          <a:effectLst/>
+        </p:spPr>
+        <p:style>
+          <a:lnRef idx="1">
+            <a:schemeClr val="accent1"/>
+          </a:lnRef>
+          <a:fillRef idx="3">
+            <a:schemeClr val="accent1"/>
+          </a:fillRef>
+          <a:effectRef idx="2">
+            <a:schemeClr val="accent1"/>
+          </a:effectRef>
+          <a:fontRef idx="minor">
+            <a:schemeClr val="lt1"/>
+          </a:fontRef>
+        </p:style>
+        <p:txBody>
+          <a:bodyPr rtlCol="0" anchor="ctr" wrap="none"/>
+          <a:lstStyle/>
+          <a:p>
+            <a:pPr algn="ctr"/>
+            <a:r>
+              <a:rPr sz="1500" b="1">
+                <a:solidFill>
+                  <a:srgbClr val="FFFFFF"/>
+                </a:solidFill>
+                <a:latin typeface="Century Gothic"/>
+              </a:rPr>
+              <a:t>1</a:t>
+            </a:r>
+          </a:p>
+        </p:txBody>
+      </p:sp>
+      <p:sp>
+        <p:nvSpPr>
+          <p:cNvPr id="6" name="TextBox 5"/>
+          <p:cNvSpPr txBox="1"/>
+          <p:nvPr/>
+        </p:nvSpPr>
+        <p:spPr>
+          <a:xfrm>
+            <a:off x="1600200" y="2203704"/>
+            <a:ext cx="9509760" cy="822960"/>
+          </a:xfrm>
+          <a:prstGeom prst="rect">
+            <a:avLst/>
+          </a:prstGeom>
+          <a:noFill/>
+        </p:spPr>
+        <p:txBody>
+          <a:bodyPr wrap="square" anchor="t" lIns="0" rIns="0" tIns="0" bIns="0">
+            <a:spAutoFit/>
+          </a:bodyPr>
+          <a:lstStyle/>
+          <a:p>
+            <a:pPr algn="l">
+              <a:lnSpc>
+                <a:spcPct val="130000"/>
+              </a:lnSpc>
+            </a:pPr>
+            <a:r>
+              <a:rPr sz="1500" b="0" i="0">
+                <a:solidFill>
+                  <a:srgbClr val="1C1730"/>
+                </a:solidFill>
+                <a:latin typeface="Calibri"/>
+              </a:rPr>
+              <a:t>Work out by hand: for a network of 31 nodes, what's the max tolerable count of dishonest nodes?</a:t>
+            </a:r>
+          </a:p>
+        </p:txBody>
+      </p:sp>
+      <p:sp>
+        <p:nvSpPr>
+          <p:cNvPr id="7" name="Oval 6"/>
+          <p:cNvSpPr/>
+          <p:nvPr/>
+        </p:nvSpPr>
+        <p:spPr>
+          <a:xfrm>
+            <a:off x="822960" y="3108960"/>
+            <a:ext cx="502920" cy="502920"/>
+          </a:xfrm>
+          <a:prstGeom prst="ellipse">
+            <a:avLst/>
+          </a:prstGeom>
+          <a:solidFill>
+            <a:srgbClr val="12746A"/>
+          </a:solidFill>
+          <a:ln>
+            <a:noFill/>
+          </a:ln>
+          <a:effectLst/>
+        </p:spPr>
+        <p:style>
+          <a:lnRef idx="1">
+            <a:schemeClr val="accent1"/>
+          </a:lnRef>
+          <a:fillRef idx="3">
+            <a:schemeClr val="accent1"/>
+          </a:fillRef>
+          <a:effectRef idx="2">
+            <a:schemeClr val="accent1"/>
+          </a:effectRef>
+          <a:fontRef idx="minor">
+            <a:schemeClr val="lt1"/>
+          </a:fontRef>
+        </p:style>
+        <p:txBody>
+          <a:bodyPr rtlCol="0" anchor="ctr" wrap="none"/>
+          <a:lstStyle/>
+          <a:p>
+            <a:pPr algn="ctr"/>
+            <a:r>
+              <a:rPr sz="1500" b="1">
+                <a:solidFill>
+                  <a:srgbClr val="FFFFFF"/>
+                </a:solidFill>
+                <a:latin typeface="Century Gothic"/>
+              </a:rPr>
+              <a:t>2</a:t>
+            </a:r>
+          </a:p>
+        </p:txBody>
+      </p:sp>
+      <p:sp>
+        <p:nvSpPr>
+          <p:cNvPr id="8" name="TextBox 7"/>
+          <p:cNvSpPr txBox="1"/>
+          <p:nvPr/>
+        </p:nvSpPr>
+        <p:spPr>
+          <a:xfrm>
+            <a:off x="1600200" y="3163824"/>
+            <a:ext cx="9509760" cy="822960"/>
+          </a:xfrm>
+          <a:prstGeom prst="rect">
+            <a:avLst/>
+          </a:prstGeom>
+          <a:noFill/>
+        </p:spPr>
+        <p:txBody>
+          <a:bodyPr wrap="square" anchor="t" lIns="0" rIns="0" tIns="0" bIns="0">
+            <a:spAutoFit/>
+          </a:bodyPr>
+          <a:lstStyle/>
+          <a:p>
+            <a:pPr algn="l">
+              <a:lnSpc>
+                <a:spcPct val="130000"/>
+              </a:lnSpc>
+            </a:pPr>
+            <a:r>
+              <a:rPr sz="1500" b="0" i="0">
+                <a:solidFill>
+                  <a:srgbClr val="1C1730"/>
+                </a:solidFill>
+                <a:latin typeface="Calibri"/>
+              </a:rPr>
+              <a:t>On the Anders Brownworth distributed demo, mine a block on one peer and watch it propagate.</a:t>
+            </a:r>
+          </a:p>
+        </p:txBody>
+      </p:sp>
+      <p:sp>
+        <p:nvSpPr>
+          <p:cNvPr id="9" name="Oval 8"/>
+          <p:cNvSpPr/>
+          <p:nvPr/>
+        </p:nvSpPr>
+        <p:spPr>
+          <a:xfrm>
+            <a:off x="822960" y="4069080"/>
+            <a:ext cx="502920" cy="502920"/>
+          </a:xfrm>
+          <a:prstGeom prst="ellipse">
+            <a:avLst/>
+          </a:prstGeom>
+          <a:solidFill>
+            <a:srgbClr val="12746A"/>
+          </a:solidFill>
+          <a:ln>
+            <a:noFill/>
+          </a:ln>
+          <a:effectLst/>
+        </p:spPr>
+        <p:style>
+          <a:lnRef idx="1">
+            <a:schemeClr val="accent1"/>
+          </a:lnRef>
+          <a:fillRef idx="3">
+            <a:schemeClr val="accent1"/>
+          </a:fillRef>
+          <a:effectRef idx="2">
+            <a:schemeClr val="accent1"/>
+          </a:effectRef>
+          <a:fontRef idx="minor">
+            <a:schemeClr val="lt1"/>
+          </a:fontRef>
+        </p:style>
+        <p:txBody>
+          <a:bodyPr rtlCol="0" anchor="ctr" wrap="none"/>
+          <a:lstStyle/>
+          <a:p>
+            <a:pPr algn="ctr"/>
+            <a:r>
+              <a:rPr sz="1500" b="1">
+                <a:solidFill>
+                  <a:srgbClr val="FFFFFF"/>
+                </a:solidFill>
+                <a:latin typeface="Century Gothic"/>
+              </a:rPr>
+              <a:t>3</a:t>
+            </a:r>
+          </a:p>
+        </p:txBody>
+      </p:sp>
+      <p:sp>
+        <p:nvSpPr>
+          <p:cNvPr id="10" name="TextBox 9"/>
+          <p:cNvSpPr txBox="1"/>
+          <p:nvPr/>
+        </p:nvSpPr>
+        <p:spPr>
+          <a:xfrm>
+            <a:off x="1600200" y="4123944"/>
+            <a:ext cx="9509760" cy="822960"/>
+          </a:xfrm>
+          <a:prstGeom prst="rect">
+            <a:avLst/>
+          </a:prstGeom>
+          <a:noFill/>
+        </p:spPr>
+        <p:txBody>
+          <a:bodyPr wrap="square" anchor="t" lIns="0" rIns="0" tIns="0" bIns="0">
+            <a:spAutoFit/>
+          </a:bodyPr>
+          <a:lstStyle/>
+          <a:p>
+            <a:pPr algn="l">
+              <a:lnSpc>
+                <a:spcPct val="130000"/>
+              </a:lnSpc>
+            </a:pPr>
+            <a:r>
+              <a:rPr sz="1500" b="0" i="0">
+                <a:solidFill>
+                  <a:srgbClr val="1C1730"/>
+                </a:solidFill>
+                <a:latin typeface="Calibri"/>
+              </a:rPr>
+              <a:t>Introduce a rogue block on one peer and watch the rest of the network reject it.</a:t>
+            </a:r>
+          </a:p>
+        </p:txBody>
+      </p:sp>
+      <p:sp>
+        <p:nvSpPr>
+          <p:cNvPr id="11" name="TextBox 10"/>
+          <p:cNvSpPr txBox="1"/>
+          <p:nvPr/>
+        </p:nvSpPr>
+        <p:spPr>
+          <a:xfrm>
+            <a:off x="9966960" y="502920"/>
+            <a:ext cx="1371600" cy="320040"/>
+          </a:xfrm>
+          <a:prstGeom prst="rect">
+            <a:avLst/>
+          </a:prstGeom>
+          <a:noFill/>
+        </p:spPr>
+        <p:txBody>
+          <a:bodyPr wrap="square" anchor="t" lIns="0" rIns="0" tIns="0" bIns="0">
+            <a:spAutoFit/>
+          </a:bodyPr>
+          <a:lstStyle/>
+          <a:p>
+            <a:pPr algn="r">
+              <a:lnSpc>
+                <a:spcPct val="115000"/>
+              </a:lnSpc>
+            </a:pPr>
+            <a:r>
+              <a:rPr sz="1100" b="1" i="0">
+                <a:solidFill>
+                  <a:srgbClr val="5C576E"/>
+                </a:solidFill>
+                <a:latin typeface="Consolas"/>
+              </a:rPr>
+              <a:t>17 / 18</a:t>
+            </a:r>
+          </a:p>
+        </p:txBody>
+      </p:sp>
+    </p:spTree>
+  </p:cSld>
+  <p:clrMapOvr>
+    <a:masterClrMapping/>
+  </p:clrMapOvr>
+</p:sld>
+</file>
+
+<file path=ppt/slides/slide18.xml><?xml version="1.0" encoding="utf-8"?>
+<p:sld xmlns:a="http://schemas.openxmlformats.org/drawingml/2006/main" xmlns:p="http://schemas.openxmlformats.org/presentationml/2006/main" xmlns:r="http://schemas.openxmlformats.org/officeDocument/2006/relationships">
+  <p:cSld>
+    <p:spTree>
+      <p:nvGrpSpPr>
+        <p:cNvPr id="1" name=""/>
+        <p:cNvGrpSpPr/>
+        <p:nvPr/>
+      </p:nvGrpSpPr>
+      <p:grpSpPr/>
+      <p:sp>
+        <p:nvSpPr>
+          <p:cNvPr id="2" name="Rectangle 1"/>
+          <p:cNvSpPr/>
+          <p:nvPr/>
+        </p:nvSpPr>
+        <p:spPr>
+          <a:xfrm>
+            <a:off x="0" y="0"/>
+            <a:ext cx="12191695" cy="6858000"/>
+          </a:xfrm>
+          <a:prstGeom prst="rect">
+            <a:avLst/>
+          </a:prstGeom>
+          <a:solidFill>
             <a:srgbClr val="1C1730"/>
           </a:solidFill>
           <a:ln>
@@ -6399,7 +7735,7 @@
                 </a:solidFill>
                 <a:latin typeface="Consolas"/>
               </a:rPr>
-              <a:t>15 / 15</a:t>
+              <a:t>18 / 18</a:t>
             </a:r>
           </a:p>
         </p:txBody>
@@ -6496,11 +7832,11 @@
             <a:r>
               <a:rPr sz="1300" b="1" i="0">
                 <a:solidFill>
-                  <a:srgbClr val="12746A"/>
+                  <a:srgbClr val="5C576E"/>
                 </a:solidFill>
                 <a:latin typeface="Calibri"/>
               </a:rPr>
-              <a:t>TOPIC 04 — CONSENSUS</a:t>
+              <a:t>HOW THIS COURSE IS STRUCTURED</a:t>
             </a:r>
           </a:p>
         </p:txBody>
@@ -6539,21 +7875,69 @@
                 </a:solidFill>
                 <a:latin typeface="Century Gothic"/>
               </a:rPr>
-              <a:t>Why This Matters</a:t>
-            </a:r>
-          </a:p>
-        </p:txBody>
-      </p:sp>
-      <p:sp>
-        <p:nvSpPr>
-          <p:cNvPr id="5" name="TextBox 4"/>
-          <p:cNvSpPr txBox="1"/>
-          <p:nvPr/>
-        </p:nvSpPr>
-        <p:spPr>
-          <a:xfrm>
-            <a:off x="822960" y="1965960"/>
-            <a:ext cx="9875520" cy="1463040"/>
+              <a:t>Two Halves, Four Weeks Each</a:t>
+            </a:r>
+          </a:p>
+        </p:txBody>
+      </p:sp>
+      <p:sp>
+        <p:nvSpPr>
+          <p:cNvPr id="5" name="Rounded Rectangle 4"/>
+          <p:cNvSpPr/>
+          <p:nvPr/>
+        </p:nvSpPr>
+        <p:spPr>
+          <a:xfrm>
+            <a:off x="822960" y="2103120"/>
+            <a:ext cx="5120640" cy="2743200"/>
+          </a:xfrm>
+          <a:prstGeom prst="roundRect">
+            <a:avLst>
+              <a:gd name="adj" fmla="val 9000"/>
+            </a:avLst>
+          </a:prstGeom>
+          <a:solidFill>
+            <a:srgbClr val="FFFFFF"/>
+          </a:solidFill>
+          <a:ln w="12700">
+            <a:solidFill>
+              <a:srgbClr val="DED9EA"/>
+            </a:solidFill>
+          </a:ln>
+          <a:effectLst/>
+        </p:spPr>
+        <p:style>
+          <a:lnRef idx="1">
+            <a:schemeClr val="accent1"/>
+          </a:lnRef>
+          <a:fillRef idx="3">
+            <a:schemeClr val="accent1"/>
+          </a:fillRef>
+          <a:effectRef idx="2">
+            <a:schemeClr val="accent1"/>
+          </a:effectRef>
+          <a:fontRef idx="minor">
+            <a:schemeClr val="lt1"/>
+          </a:fontRef>
+        </p:style>
+        <p:txBody>
+          <a:bodyPr rtlCol="0" anchor="ctr"/>
+          <a:lstStyle/>
+          <a:p>
+            <a:pPr algn="ctr"/>
+          </a:p>
+        </p:txBody>
+      </p:sp>
+      <p:sp>
+        <p:nvSpPr>
+          <p:cNvPr id="6" name="TextBox 5"/>
+          <p:cNvSpPr txBox="1"/>
+          <p:nvPr/>
+        </p:nvSpPr>
+        <p:spPr>
+          <a:xfrm>
+            <a:off x="1078992" y="2359152"/>
+            <a:ext cx="4608576" cy="457200"/>
           </a:xfrm>
           <a:prstGeom prst="rect">
             <a:avLst/>
@@ -6568,73 +7952,201 @@
           <a:p>
             <a:pPr algn="l">
               <a:lnSpc>
-                <a:spcPct val="140000"/>
-              </a:lnSpc>
-            </a:pPr>
-            <a:r>
-              <a:rPr sz="1600" b="0" i="0">
+                <a:spcPct val="115000"/>
+              </a:lnSpc>
+            </a:pPr>
+            <a:r>
+              <a:rPr sz="1800" b="1" i="0">
+                <a:solidFill>
+                  <a:srgbClr val="1C1730"/>
+                </a:solidFill>
+                <a:latin typeface="Century Gothic"/>
+              </a:rPr>
+              <a:t>Half 1 · Weeks 1–4</a:t>
+            </a:r>
+          </a:p>
+        </p:txBody>
+      </p:sp>
+      <p:sp>
+        <p:nvSpPr>
+          <p:cNvPr id="7" name="TextBox 6"/>
+          <p:cNvSpPr txBox="1"/>
+          <p:nvPr/>
+        </p:nvSpPr>
+        <p:spPr>
+          <a:xfrm>
+            <a:off x="1078992" y="2816352"/>
+            <a:ext cx="4608576" cy="1892808"/>
+          </a:xfrm>
+          <a:prstGeom prst="rect">
+            <a:avLst/>
+          </a:prstGeom>
+          <a:noFill/>
+        </p:spPr>
+        <p:txBody>
+          <a:bodyPr wrap="square" anchor="t" lIns="0" rIns="0" tIns="0" bIns="0">
+            <a:spAutoFit/>
+          </a:bodyPr>
+          <a:lstStyle/>
+          <a:p>
+            <a:pPr algn="l">
+              <a:lnSpc>
+                <a:spcPct val="128000"/>
+              </a:lnSpc>
+            </a:pPr>
+            <a:r>
+              <a:rPr sz="1350" b="0" i="0">
+                <a:solidFill>
+                  <a:srgbClr val="1C1730"/>
+                </a:solidFill>
+                <a:latin typeface="Calibri"/>
+              </a:rPr>
+              <a:t>Basics &amp; Core Concepts. Everything you need to walk into a hackathon and build something real — wallets, contracts, tokens, a working dApp.</a:t>
+            </a:r>
+          </a:p>
+        </p:txBody>
+      </p:sp>
+      <p:sp>
+        <p:nvSpPr>
+          <p:cNvPr id="8" name="Rounded Rectangle 7"/>
+          <p:cNvSpPr/>
+          <p:nvPr/>
+        </p:nvSpPr>
+        <p:spPr>
+          <a:xfrm>
+            <a:off x="6217920" y="2103120"/>
+            <a:ext cx="5120640" cy="2743200"/>
+          </a:xfrm>
+          <a:prstGeom prst="roundRect">
+            <a:avLst>
+              <a:gd name="adj" fmla="val 9000"/>
+            </a:avLst>
+          </a:prstGeom>
+          <a:solidFill>
+            <a:srgbClr val="FFFFFF"/>
+          </a:solidFill>
+          <a:ln w="12700">
+            <a:solidFill>
+              <a:srgbClr val="DED9EA"/>
+            </a:solidFill>
+          </a:ln>
+          <a:effectLst/>
+        </p:spPr>
+        <p:style>
+          <a:lnRef idx="1">
+            <a:schemeClr val="accent1"/>
+          </a:lnRef>
+          <a:fillRef idx="3">
+            <a:schemeClr val="accent1"/>
+          </a:fillRef>
+          <a:effectRef idx="2">
+            <a:schemeClr val="accent1"/>
+          </a:effectRef>
+          <a:fontRef idx="minor">
+            <a:schemeClr val="lt1"/>
+          </a:fontRef>
+        </p:style>
+        <p:txBody>
+          <a:bodyPr rtlCol="0" anchor="ctr"/>
+          <a:lstStyle/>
+          <a:p>
+            <a:pPr algn="ctr"/>
+          </a:p>
+        </p:txBody>
+      </p:sp>
+      <p:sp>
+        <p:nvSpPr>
+          <p:cNvPr id="9" name="TextBox 8"/>
+          <p:cNvSpPr txBox="1"/>
+          <p:nvPr/>
+        </p:nvSpPr>
+        <p:spPr>
+          <a:xfrm>
+            <a:off x="6473952" y="2359152"/>
+            <a:ext cx="4608576" cy="457200"/>
+          </a:xfrm>
+          <a:prstGeom prst="rect">
+            <a:avLst/>
+          </a:prstGeom>
+          <a:noFill/>
+        </p:spPr>
+        <p:txBody>
+          <a:bodyPr wrap="square" anchor="t" lIns="0" rIns="0" tIns="0" bIns="0">
+            <a:spAutoFit/>
+          </a:bodyPr>
+          <a:lstStyle/>
+          <a:p>
+            <a:pPr algn="l">
+              <a:lnSpc>
+                <a:spcPct val="115000"/>
+              </a:lnSpc>
+            </a:pPr>
+            <a:r>
+              <a:rPr sz="1800" b="1" i="0">
                 <a:solidFill>
                   <a:srgbClr val="5C576E"/>
                 </a:solidFill>
+                <a:latin typeface="Century Gothic"/>
+              </a:rPr>
+              <a:t>Half 2 · Weeks 5–8</a:t>
+            </a:r>
+          </a:p>
+        </p:txBody>
+      </p:sp>
+      <p:sp>
+        <p:nvSpPr>
+          <p:cNvPr id="10" name="TextBox 9"/>
+          <p:cNvSpPr txBox="1"/>
+          <p:nvPr/>
+        </p:nvSpPr>
+        <p:spPr>
+          <a:xfrm>
+            <a:off x="6473952" y="2816352"/>
+            <a:ext cx="4608576" cy="1892808"/>
+          </a:xfrm>
+          <a:prstGeom prst="rect">
+            <a:avLst/>
+          </a:prstGeom>
+          <a:noFill/>
+        </p:spPr>
+        <p:txBody>
+          <a:bodyPr wrap="square" anchor="t" lIns="0" rIns="0" tIns="0" bIns="0">
+            <a:spAutoFit/>
+          </a:bodyPr>
+          <a:lstStyle/>
+          <a:p>
+            <a:pPr algn="l">
+              <a:lnSpc>
+                <a:spcPct val="128000"/>
+              </a:lnSpc>
+            </a:pPr>
+            <a:r>
+              <a:rPr sz="1350" b="0" i="0">
+                <a:solidFill>
+                  <a:srgbClr val="5C576E"/>
+                </a:solidFill>
                 <a:latin typeface="Calibri"/>
               </a:rPr>
-              <a:t>The final piece: with no bank or admin, how do thousands of independent, possibly-dishonest computers agree on a single shared history, in the right order? This is the consensus problem, and it's the piece that makes everything from Topics 01–03 actually trustworthy at scale.</a:t>
-            </a:r>
-          </a:p>
-        </p:txBody>
-      </p:sp>
-      <p:sp>
-        <p:nvSpPr>
-          <p:cNvPr id="6" name="TextBox 5"/>
-          <p:cNvSpPr txBox="1"/>
-          <p:nvPr/>
-        </p:nvSpPr>
-        <p:spPr>
-          <a:xfrm>
-            <a:off x="822960" y="3657600"/>
-            <a:ext cx="9875520" cy="365760"/>
-          </a:xfrm>
-          <a:prstGeom prst="rect">
-            <a:avLst/>
-          </a:prstGeom>
-          <a:noFill/>
-        </p:spPr>
-        <p:txBody>
-          <a:bodyPr wrap="square" anchor="t" lIns="0" rIns="0" tIns="0" bIns="0">
-            <a:spAutoFit/>
-          </a:bodyPr>
-          <a:lstStyle/>
-          <a:p>
-            <a:pPr algn="l">
-              <a:lnSpc>
-                <a:spcPct val="115000"/>
-              </a:lnSpc>
-            </a:pPr>
-            <a:r>
-              <a:rPr sz="1200" b="1" i="0">
-                <a:solidFill>
-                  <a:srgbClr val="12746A"/>
-                </a:solidFill>
-                <a:latin typeface="Calibri"/>
-              </a:rPr>
-              <a:t>WHAT THIS SECTION COVERS</a:t>
-            </a:r>
-          </a:p>
-        </p:txBody>
-      </p:sp>
-      <p:sp>
-        <p:nvSpPr>
-          <p:cNvPr id="7" name="Rectangle 6"/>
+              <a:t>Advanced Topics. Security, upgradeable contracts, Layer 2s, and the wider ecosystem — what separates a prototype from production.</a:t>
+            </a:r>
+          </a:p>
+        </p:txBody>
+      </p:sp>
+      <p:sp>
+        <p:nvSpPr>
+          <p:cNvPr id="11" name="Rounded Rectangle 10"/>
           <p:cNvSpPr/>
           <p:nvPr/>
         </p:nvSpPr>
         <p:spPr>
           <a:xfrm>
-            <a:off x="822960" y="4197096"/>
-            <a:ext cx="82296" cy="82296"/>
-          </a:xfrm>
-          <a:prstGeom prst="rect">
-            <a:avLst/>
+            <a:off x="822960" y="5074920"/>
+            <a:ext cx="3291840" cy="502920"/>
+          </a:xfrm>
+          <a:prstGeom prst="roundRect">
+            <a:avLst>
+              <a:gd name="adj" fmla="val 50000"/>
+            </a:avLst>
           </a:prstGeom>
           <a:solidFill>
             <a:srgbClr val="12746A"/>
@@ -6668,14 +8180,14 @@
       </p:sp>
       <p:sp>
         <p:nvSpPr>
-          <p:cNvPr id="8" name="TextBox 7"/>
-          <p:cNvSpPr txBox="1"/>
-          <p:nvPr/>
-        </p:nvSpPr>
-        <p:spPr>
-          <a:xfrm>
-            <a:off x="1051560" y="4114800"/>
-            <a:ext cx="4709160" cy="365760"/>
+          <p:cNvPr id="12" name="TextBox 11"/>
+          <p:cNvSpPr txBox="1"/>
+          <p:nvPr/>
+        </p:nvSpPr>
+        <p:spPr>
+          <a:xfrm>
+            <a:off x="1097280" y="5193792"/>
+            <a:ext cx="2926080" cy="320040"/>
           </a:xfrm>
           <a:prstGeom prst="rect">
             <a:avLst/>
@@ -6694,684 +8206,20 @@
               </a:lnSpc>
             </a:pPr>
             <a:r>
-              <a:rPr sz="1350" b="0" i="0">
-                <a:solidFill>
-                  <a:srgbClr val="1C1730"/>
+              <a:rPr sz="1250" b="1" i="0">
+                <a:solidFill>
+                  <a:srgbClr val="FFFFFF"/>
                 </a:solidFill>
                 <a:latin typeface="Calibri"/>
               </a:rPr>
-              <a:t>Core concept</a:t>
-            </a:r>
-          </a:p>
-        </p:txBody>
-      </p:sp>
-      <p:sp>
-        <p:nvSpPr>
-          <p:cNvPr id="9" name="Rectangle 8"/>
-          <p:cNvSpPr/>
-          <p:nvPr/>
-        </p:nvSpPr>
-        <p:spPr>
-          <a:xfrm>
-            <a:off x="6035040" y="4197096"/>
-            <a:ext cx="82296" cy="82296"/>
-          </a:xfrm>
-          <a:prstGeom prst="rect">
-            <a:avLst/>
-          </a:prstGeom>
-          <a:solidFill>
-            <a:srgbClr val="12746A"/>
-          </a:solidFill>
-          <a:ln>
-            <a:noFill/>
-          </a:ln>
-          <a:effectLst/>
-        </p:spPr>
-        <p:style>
-          <a:lnRef idx="1">
-            <a:schemeClr val="accent1"/>
-          </a:lnRef>
-          <a:fillRef idx="3">
-            <a:schemeClr val="accent1"/>
-          </a:fillRef>
-          <a:effectRef idx="2">
-            <a:schemeClr val="accent1"/>
-          </a:effectRef>
-          <a:fontRef idx="minor">
-            <a:schemeClr val="lt1"/>
-          </a:fontRef>
-        </p:style>
-        <p:txBody>
-          <a:bodyPr rtlCol="0" anchor="ctr"/>
-          <a:lstStyle/>
-          <a:p>
-            <a:pPr algn="ctr"/>
-          </a:p>
-        </p:txBody>
-      </p:sp>
-      <p:sp>
-        <p:nvSpPr>
-          <p:cNvPr id="10" name="TextBox 9"/>
-          <p:cNvSpPr txBox="1"/>
-          <p:nvPr/>
-        </p:nvSpPr>
-        <p:spPr>
-          <a:xfrm>
-            <a:off x="6263640" y="4114800"/>
-            <a:ext cx="4709160" cy="365760"/>
-          </a:xfrm>
-          <a:prstGeom prst="rect">
-            <a:avLst/>
-          </a:prstGeom>
-          <a:noFill/>
-        </p:spPr>
-        <p:txBody>
-          <a:bodyPr wrap="square" anchor="t" lIns="0" rIns="0" tIns="0" bIns="0">
-            <a:spAutoFit/>
-          </a:bodyPr>
-          <a:lstStyle/>
-          <a:p>
-            <a:pPr algn="l">
-              <a:lnSpc>
-                <a:spcPct val="115000"/>
-              </a:lnSpc>
-            </a:pPr>
-            <a:r>
-              <a:rPr sz="1350" b="0" i="0">
-                <a:solidFill>
-                  <a:srgbClr val="1C1730"/>
-                </a:solidFill>
-                <a:latin typeface="Calibri"/>
-              </a:rPr>
-              <a:t>Four key ideas, one at a time</a:t>
-            </a:r>
-          </a:p>
-        </p:txBody>
-      </p:sp>
-      <p:sp>
-        <p:nvSpPr>
-          <p:cNvPr id="11" name="Rectangle 10"/>
-          <p:cNvSpPr/>
-          <p:nvPr/>
-        </p:nvSpPr>
-        <p:spPr>
-          <a:xfrm>
-            <a:off x="822960" y="4654296"/>
-            <a:ext cx="82296" cy="82296"/>
-          </a:xfrm>
-          <a:prstGeom prst="rect">
-            <a:avLst/>
-          </a:prstGeom>
-          <a:solidFill>
-            <a:srgbClr val="12746A"/>
-          </a:solidFill>
-          <a:ln>
-            <a:noFill/>
-          </a:ln>
-          <a:effectLst/>
-        </p:spPr>
-        <p:style>
-          <a:lnRef idx="1">
-            <a:schemeClr val="accent1"/>
-          </a:lnRef>
-          <a:fillRef idx="3">
-            <a:schemeClr val="accent1"/>
-          </a:fillRef>
-          <a:effectRef idx="2">
-            <a:schemeClr val="accent1"/>
-          </a:effectRef>
-          <a:fontRef idx="minor">
-            <a:schemeClr val="lt1"/>
-          </a:fontRef>
-        </p:style>
-        <p:txBody>
-          <a:bodyPr rtlCol="0" anchor="ctr"/>
-          <a:lstStyle/>
-          <a:p>
-            <a:pPr algn="ctr"/>
-          </a:p>
-        </p:txBody>
-      </p:sp>
-      <p:sp>
-        <p:nvSpPr>
-          <p:cNvPr id="12" name="TextBox 11"/>
-          <p:cNvSpPr txBox="1"/>
-          <p:nvPr/>
-        </p:nvSpPr>
-        <p:spPr>
-          <a:xfrm>
-            <a:off x="1051560" y="4572000"/>
-            <a:ext cx="4709160" cy="365760"/>
-          </a:xfrm>
-          <a:prstGeom prst="rect">
-            <a:avLst/>
-          </a:prstGeom>
-          <a:noFill/>
-        </p:spPr>
-        <p:txBody>
-          <a:bodyPr wrap="square" anchor="t" lIns="0" rIns="0" tIns="0" bIns="0">
-            <a:spAutoFit/>
-          </a:bodyPr>
-          <a:lstStyle/>
-          <a:p>
-            <a:pPr algn="l">
-              <a:lnSpc>
-                <a:spcPct val="115000"/>
-              </a:lnSpc>
-            </a:pPr>
-            <a:r>
-              <a:rPr sz="1350" b="0" i="0">
-                <a:solidFill>
-                  <a:srgbClr val="1C1730"/>
-                </a:solidFill>
-                <a:latin typeface="Calibri"/>
-              </a:rPr>
-              <a:t>A real, reproducible worked example</a:t>
-            </a:r>
-          </a:p>
-        </p:txBody>
-      </p:sp>
-      <p:sp>
-        <p:nvSpPr>
-          <p:cNvPr id="13" name="Rectangle 12"/>
-          <p:cNvSpPr/>
-          <p:nvPr/>
-        </p:nvSpPr>
-        <p:spPr>
-          <a:xfrm>
-            <a:off x="6035040" y="4654296"/>
-            <a:ext cx="82296" cy="82296"/>
-          </a:xfrm>
-          <a:prstGeom prst="rect">
-            <a:avLst/>
-          </a:prstGeom>
-          <a:solidFill>
-            <a:srgbClr val="12746A"/>
-          </a:solidFill>
-          <a:ln>
-            <a:noFill/>
-          </a:ln>
-          <a:effectLst/>
-        </p:spPr>
-        <p:style>
-          <a:lnRef idx="1">
-            <a:schemeClr val="accent1"/>
-          </a:lnRef>
-          <a:fillRef idx="3">
-            <a:schemeClr val="accent1"/>
-          </a:fillRef>
-          <a:effectRef idx="2">
-            <a:schemeClr val="accent1"/>
-          </a:effectRef>
-          <a:fontRef idx="minor">
-            <a:schemeClr val="lt1"/>
-          </a:fontRef>
-        </p:style>
-        <p:txBody>
-          <a:bodyPr rtlCol="0" anchor="ctr"/>
-          <a:lstStyle/>
-          <a:p>
-            <a:pPr algn="ctr"/>
-          </a:p>
-        </p:txBody>
-      </p:sp>
-      <p:sp>
-        <p:nvSpPr>
-          <p:cNvPr id="14" name="TextBox 13"/>
-          <p:cNvSpPr txBox="1"/>
-          <p:nvPr/>
-        </p:nvSpPr>
-        <p:spPr>
-          <a:xfrm>
-            <a:off x="6263640" y="4572000"/>
-            <a:ext cx="4709160" cy="365760"/>
-          </a:xfrm>
-          <a:prstGeom prst="rect">
-            <a:avLst/>
-          </a:prstGeom>
-          <a:noFill/>
-        </p:spPr>
-        <p:txBody>
-          <a:bodyPr wrap="square" anchor="t" lIns="0" rIns="0" tIns="0" bIns="0">
-            <a:spAutoFit/>
-          </a:bodyPr>
-          <a:lstStyle/>
-          <a:p>
-            <a:pPr algn="l">
-              <a:lnSpc>
-                <a:spcPct val="115000"/>
-              </a:lnSpc>
-            </a:pPr>
-            <a:r>
-              <a:rPr sz="1350" b="0" i="0">
-                <a:solidFill>
-                  <a:srgbClr val="1C1730"/>
-                </a:solidFill>
-                <a:latin typeface="Calibri"/>
-              </a:rPr>
-              <a:t>Real-world uses beyond blockchain</a:t>
-            </a:r>
-          </a:p>
-        </p:txBody>
-      </p:sp>
-      <p:sp>
-        <p:nvSpPr>
-          <p:cNvPr id="15" name="Rectangle 14"/>
-          <p:cNvSpPr/>
-          <p:nvPr/>
-        </p:nvSpPr>
-        <p:spPr>
-          <a:xfrm>
-            <a:off x="822960" y="5111496"/>
-            <a:ext cx="82296" cy="82296"/>
-          </a:xfrm>
-          <a:prstGeom prst="rect">
-            <a:avLst/>
-          </a:prstGeom>
-          <a:solidFill>
-            <a:srgbClr val="12746A"/>
-          </a:solidFill>
-          <a:ln>
-            <a:noFill/>
-          </a:ln>
-          <a:effectLst/>
-        </p:spPr>
-        <p:style>
-          <a:lnRef idx="1">
-            <a:schemeClr val="accent1"/>
-          </a:lnRef>
-          <a:fillRef idx="3">
-            <a:schemeClr val="accent1"/>
-          </a:fillRef>
-          <a:effectRef idx="2">
-            <a:schemeClr val="accent1"/>
-          </a:effectRef>
-          <a:fontRef idx="minor">
-            <a:schemeClr val="lt1"/>
-          </a:fontRef>
-        </p:style>
-        <p:txBody>
-          <a:bodyPr rtlCol="0" anchor="ctr"/>
-          <a:lstStyle/>
-          <a:p>
-            <a:pPr algn="ctr"/>
-          </a:p>
-        </p:txBody>
-      </p:sp>
-      <p:sp>
-        <p:nvSpPr>
-          <p:cNvPr id="16" name="TextBox 15"/>
-          <p:cNvSpPr txBox="1"/>
-          <p:nvPr/>
-        </p:nvSpPr>
-        <p:spPr>
-          <a:xfrm>
-            <a:off x="1051560" y="5029200"/>
-            <a:ext cx="4709160" cy="365760"/>
-          </a:xfrm>
-          <a:prstGeom prst="rect">
-            <a:avLst/>
-          </a:prstGeom>
-          <a:noFill/>
-        </p:spPr>
-        <p:txBody>
-          <a:bodyPr wrap="square" anchor="t" lIns="0" rIns="0" tIns="0" bIns="0">
-            <a:spAutoFit/>
-          </a:bodyPr>
-          <a:lstStyle/>
-          <a:p>
-            <a:pPr algn="l">
-              <a:lnSpc>
-                <a:spcPct val="115000"/>
-              </a:lnSpc>
-            </a:pPr>
-            <a:r>
-              <a:rPr sz="1350" b="0" i="0">
-                <a:solidFill>
-                  <a:srgbClr val="1C1730"/>
-                </a:solidFill>
-                <a:latin typeface="Calibri"/>
-              </a:rPr>
-              <a:t>A flagship case study</a:t>
-            </a:r>
-          </a:p>
-        </p:txBody>
-      </p:sp>
-      <p:sp>
-        <p:nvSpPr>
-          <p:cNvPr id="17" name="Rectangle 16"/>
-          <p:cNvSpPr/>
-          <p:nvPr/>
-        </p:nvSpPr>
-        <p:spPr>
-          <a:xfrm>
-            <a:off x="6035040" y="5111496"/>
-            <a:ext cx="82296" cy="82296"/>
-          </a:xfrm>
-          <a:prstGeom prst="rect">
-            <a:avLst/>
-          </a:prstGeom>
-          <a:solidFill>
-            <a:srgbClr val="12746A"/>
-          </a:solidFill>
-          <a:ln>
-            <a:noFill/>
-          </a:ln>
-          <a:effectLst/>
-        </p:spPr>
-        <p:style>
-          <a:lnRef idx="1">
-            <a:schemeClr val="accent1"/>
-          </a:lnRef>
-          <a:fillRef idx="3">
-            <a:schemeClr val="accent1"/>
-          </a:fillRef>
-          <a:effectRef idx="2">
-            <a:schemeClr val="accent1"/>
-          </a:effectRef>
-          <a:fontRef idx="minor">
-            <a:schemeClr val="lt1"/>
-          </a:fontRef>
-        </p:style>
-        <p:txBody>
-          <a:bodyPr rtlCol="0" anchor="ctr"/>
-          <a:lstStyle/>
-          <a:p>
-            <a:pPr algn="ctr"/>
-          </a:p>
-        </p:txBody>
-      </p:sp>
-      <p:sp>
-        <p:nvSpPr>
-          <p:cNvPr id="18" name="TextBox 17"/>
-          <p:cNvSpPr txBox="1"/>
-          <p:nvPr/>
-        </p:nvSpPr>
-        <p:spPr>
-          <a:xfrm>
-            <a:off x="6263640" y="5029200"/>
-            <a:ext cx="4709160" cy="365760"/>
-          </a:xfrm>
-          <a:prstGeom prst="rect">
-            <a:avLst/>
-          </a:prstGeom>
-          <a:noFill/>
-        </p:spPr>
-        <p:txBody>
-          <a:bodyPr wrap="square" anchor="t" lIns="0" rIns="0" tIns="0" bIns="0">
-            <a:spAutoFit/>
-          </a:bodyPr>
-          <a:lstStyle/>
-          <a:p>
-            <a:pPr algn="l">
-              <a:lnSpc>
-                <a:spcPct val="115000"/>
-              </a:lnSpc>
-            </a:pPr>
-            <a:r>
-              <a:rPr sz="1350" b="0" i="0">
-                <a:solidFill>
-                  <a:srgbClr val="1C1730"/>
-                </a:solidFill>
-                <a:latin typeface="Calibri"/>
-              </a:rPr>
-              <a:t>A real-life analogy</a:t>
-            </a:r>
-          </a:p>
-        </p:txBody>
-      </p:sp>
-      <p:sp>
-        <p:nvSpPr>
-          <p:cNvPr id="19" name="Rectangle 18"/>
-          <p:cNvSpPr/>
-          <p:nvPr/>
-        </p:nvSpPr>
-        <p:spPr>
-          <a:xfrm>
-            <a:off x="822960" y="5568696"/>
-            <a:ext cx="82296" cy="82296"/>
-          </a:xfrm>
-          <a:prstGeom prst="rect">
-            <a:avLst/>
-          </a:prstGeom>
-          <a:solidFill>
-            <a:srgbClr val="12746A"/>
-          </a:solidFill>
-          <a:ln>
-            <a:noFill/>
-          </a:ln>
-          <a:effectLst/>
-        </p:spPr>
-        <p:style>
-          <a:lnRef idx="1">
-            <a:schemeClr val="accent1"/>
-          </a:lnRef>
-          <a:fillRef idx="3">
-            <a:schemeClr val="accent1"/>
-          </a:fillRef>
-          <a:effectRef idx="2">
-            <a:schemeClr val="accent1"/>
-          </a:effectRef>
-          <a:fontRef idx="minor">
-            <a:schemeClr val="lt1"/>
-          </a:fontRef>
-        </p:style>
-        <p:txBody>
-          <a:bodyPr rtlCol="0" anchor="ctr"/>
-          <a:lstStyle/>
-          <a:p>
-            <a:pPr algn="ctr"/>
-          </a:p>
-        </p:txBody>
-      </p:sp>
-      <p:sp>
-        <p:nvSpPr>
-          <p:cNvPr id="20" name="TextBox 19"/>
-          <p:cNvSpPr txBox="1"/>
-          <p:nvPr/>
-        </p:nvSpPr>
-        <p:spPr>
-          <a:xfrm>
-            <a:off x="1051560" y="5486400"/>
-            <a:ext cx="4709160" cy="365760"/>
-          </a:xfrm>
-          <a:prstGeom prst="rect">
-            <a:avLst/>
-          </a:prstGeom>
-          <a:noFill/>
-        </p:spPr>
-        <p:txBody>
-          <a:bodyPr wrap="square" anchor="t" lIns="0" rIns="0" tIns="0" bIns="0">
-            <a:spAutoFit/>
-          </a:bodyPr>
-          <a:lstStyle/>
-          <a:p>
-            <a:pPr algn="l">
-              <a:lnSpc>
-                <a:spcPct val="115000"/>
-              </a:lnSpc>
-            </a:pPr>
-            <a:r>
-              <a:rPr sz="1350" b="0" i="0">
-                <a:solidFill>
-                  <a:srgbClr val="1C1730"/>
-                </a:solidFill>
-                <a:latin typeface="Calibri"/>
-              </a:rPr>
-              <a:t>Common misconceptions</a:t>
-            </a:r>
-          </a:p>
-        </p:txBody>
-      </p:sp>
-      <p:sp>
-        <p:nvSpPr>
-          <p:cNvPr id="21" name="Rectangle 20"/>
-          <p:cNvSpPr/>
-          <p:nvPr/>
-        </p:nvSpPr>
-        <p:spPr>
-          <a:xfrm>
-            <a:off x="6035040" y="5568696"/>
-            <a:ext cx="82296" cy="82296"/>
-          </a:xfrm>
-          <a:prstGeom prst="rect">
-            <a:avLst/>
-          </a:prstGeom>
-          <a:solidFill>
-            <a:srgbClr val="12746A"/>
-          </a:solidFill>
-          <a:ln>
-            <a:noFill/>
-          </a:ln>
-          <a:effectLst/>
-        </p:spPr>
-        <p:style>
-          <a:lnRef idx="1">
-            <a:schemeClr val="accent1"/>
-          </a:lnRef>
-          <a:fillRef idx="3">
-            <a:schemeClr val="accent1"/>
-          </a:fillRef>
-          <a:effectRef idx="2">
-            <a:schemeClr val="accent1"/>
-          </a:effectRef>
-          <a:fontRef idx="minor">
-            <a:schemeClr val="lt1"/>
-          </a:fontRef>
-        </p:style>
-        <p:txBody>
-          <a:bodyPr rtlCol="0" anchor="ctr"/>
-          <a:lstStyle/>
-          <a:p>
-            <a:pPr algn="ctr"/>
-          </a:p>
-        </p:txBody>
-      </p:sp>
-      <p:sp>
-        <p:nvSpPr>
-          <p:cNvPr id="22" name="TextBox 21"/>
-          <p:cNvSpPr txBox="1"/>
-          <p:nvPr/>
-        </p:nvSpPr>
-        <p:spPr>
-          <a:xfrm>
-            <a:off x="6263640" y="5486400"/>
-            <a:ext cx="4709160" cy="365760"/>
-          </a:xfrm>
-          <a:prstGeom prst="rect">
-            <a:avLst/>
-          </a:prstGeom>
-          <a:noFill/>
-        </p:spPr>
-        <p:txBody>
-          <a:bodyPr wrap="square" anchor="t" lIns="0" rIns="0" tIns="0" bIns="0">
-            <a:spAutoFit/>
-          </a:bodyPr>
-          <a:lstStyle/>
-          <a:p>
-            <a:pPr algn="l">
-              <a:lnSpc>
-                <a:spcPct val="115000"/>
-              </a:lnSpc>
-            </a:pPr>
-            <a:r>
-              <a:rPr sz="1350" b="0" i="0">
-                <a:solidFill>
-                  <a:srgbClr val="1C1730"/>
-                </a:solidFill>
-                <a:latin typeface="Calibri"/>
-              </a:rPr>
-              <a:t>Hands-on practice</a:t>
-            </a:r>
-          </a:p>
-        </p:txBody>
-      </p:sp>
-      <p:sp>
-        <p:nvSpPr>
-          <p:cNvPr id="23" name="Rectangle 22"/>
-          <p:cNvSpPr/>
-          <p:nvPr/>
-        </p:nvSpPr>
-        <p:spPr>
-          <a:xfrm>
-            <a:off x="822960" y="6025896"/>
-            <a:ext cx="82296" cy="82296"/>
-          </a:xfrm>
-          <a:prstGeom prst="rect">
-            <a:avLst/>
-          </a:prstGeom>
-          <a:solidFill>
-            <a:srgbClr val="12746A"/>
-          </a:solidFill>
-          <a:ln>
-            <a:noFill/>
-          </a:ln>
-          <a:effectLst/>
-        </p:spPr>
-        <p:style>
-          <a:lnRef idx="1">
-            <a:schemeClr val="accent1"/>
-          </a:lnRef>
-          <a:fillRef idx="3">
-            <a:schemeClr val="accent1"/>
-          </a:fillRef>
-          <a:effectRef idx="2">
-            <a:schemeClr val="accent1"/>
-          </a:effectRef>
-          <a:fontRef idx="minor">
-            <a:schemeClr val="lt1"/>
-          </a:fontRef>
-        </p:style>
-        <p:txBody>
-          <a:bodyPr rtlCol="0" anchor="ctr"/>
-          <a:lstStyle/>
-          <a:p>
-            <a:pPr algn="ctr"/>
-          </a:p>
-        </p:txBody>
-      </p:sp>
-      <p:sp>
-        <p:nvSpPr>
-          <p:cNvPr id="24" name="TextBox 23"/>
-          <p:cNvSpPr txBox="1"/>
-          <p:nvPr/>
-        </p:nvSpPr>
-        <p:spPr>
-          <a:xfrm>
-            <a:off x="1051560" y="5943600"/>
-            <a:ext cx="4709160" cy="365760"/>
-          </a:xfrm>
-          <a:prstGeom prst="rect">
-            <a:avLst/>
-          </a:prstGeom>
-          <a:noFill/>
-        </p:spPr>
-        <p:txBody>
-          <a:bodyPr wrap="square" anchor="t" lIns="0" rIns="0" tIns="0" bIns="0">
-            <a:spAutoFit/>
-          </a:bodyPr>
-          <a:lstStyle/>
-          <a:p>
-            <a:pPr algn="l">
-              <a:lnSpc>
-                <a:spcPct val="115000"/>
-              </a:lnSpc>
-            </a:pPr>
-            <a:r>
-              <a:rPr sz="1350" b="0" i="0">
-                <a:solidFill>
-                  <a:srgbClr val="1C1730"/>
-                </a:solidFill>
-                <a:latin typeface="Calibri"/>
-              </a:rPr>
-              <a:t>Take-home assignment</a:t>
-            </a:r>
-          </a:p>
-        </p:txBody>
-      </p:sp>
-      <p:sp>
-        <p:nvSpPr>
-          <p:cNvPr id="25" name="TextBox 24"/>
+              <a:t>◉  YOU ARE HERE — WEEK 01</a:t>
+            </a:r>
+          </a:p>
+        </p:txBody>
+      </p:sp>
+      <p:sp>
+        <p:nvSpPr>
+          <p:cNvPr id="13" name="TextBox 12"/>
           <p:cNvSpPr txBox="1"/>
           <p:nvPr/>
         </p:nvSpPr>
@@ -7403,7 +8251,7 @@
                 </a:solidFill>
                 <a:latin typeface="Consolas"/>
               </a:rPr>
-              <a:t>02 / 15</a:t>
+              <a:t>02 / 18</a:t>
             </a:r>
           </a:p>
         </p:txBody>
@@ -7441,7 +8289,7 @@
             <a:avLst/>
           </a:prstGeom>
           <a:solidFill>
-            <a:srgbClr val="F8F6F2"/>
+            <a:srgbClr val="1C1730"/>
           </a:solidFill>
           <a:ln>
             <a:noFill/>
@@ -7478,7 +8326,7 @@
         </p:nvSpPr>
         <p:spPr>
           <a:xfrm>
-            <a:off x="822960" y="640080"/>
+            <a:off x="822960" y="731520"/>
             <a:ext cx="10058400" cy="365760"/>
           </a:xfrm>
           <a:prstGeom prst="rect">
@@ -7500,11 +8348,11 @@
             <a:r>
               <a:rPr sz="1300" b="1" i="0">
                 <a:solidFill>
-                  <a:srgbClr val="12746A"/>
+                  <a:srgbClr val="FFC53D"/>
                 </a:solidFill>
                 <a:latin typeface="Calibri"/>
               </a:rPr>
-              <a:t>TOPIC 04 — CONSENSUS</a:t>
+              <a:t>GROUND RULES</a:t>
             </a:r>
           </a:p>
         </p:txBody>
@@ -7517,7 +8365,7 @@
         </p:nvSpPr>
         <p:spPr>
           <a:xfrm>
-            <a:off x="822960" y="1097280"/>
+            <a:off x="822960" y="1188720"/>
             <a:ext cx="9601200" cy="1005840"/>
           </a:xfrm>
           <a:prstGeom prst="rect">
@@ -7539,102 +8387,90 @@
             <a:r>
               <a:rPr sz="3400" b="1" i="0">
                 <a:solidFill>
-                  <a:srgbClr val="1C1730"/>
+                  <a:srgbClr val="FFFFFF"/>
                 </a:solidFill>
                 <a:latin typeface="Century Gothic"/>
               </a:rPr>
-              <a:t>The Core Concept</a:t>
-            </a:r>
-          </a:p>
-        </p:txBody>
-      </p:sp>
-      <p:sp>
-        <p:nvSpPr>
-          <p:cNvPr id="5" name="Rounded Rectangle 4"/>
-          <p:cNvSpPr/>
+              <a:t>Before You Begin</a:t>
+            </a:r>
+          </a:p>
+        </p:txBody>
+      </p:sp>
+      <p:sp>
+        <p:nvSpPr>
+          <p:cNvPr id="5" name="TextBox 4"/>
+          <p:cNvSpPr txBox="1"/>
           <p:nvPr/>
         </p:nvSpPr>
         <p:spPr>
           <a:xfrm>
             <a:off x="822960" y="2286000"/>
-            <a:ext cx="10515600" cy="3291840"/>
-          </a:xfrm>
-          <a:prstGeom prst="roundRect">
-            <a:avLst>
-              <a:gd name="adj" fmla="val 4000"/>
-            </a:avLst>
-          </a:prstGeom>
-          <a:solidFill>
-            <a:srgbClr val="FFFFFF"/>
-          </a:solidFill>
-          <a:ln>
-            <a:noFill/>
-          </a:ln>
-          <a:effectLst/>
-        </p:spPr>
-        <p:style>
-          <a:lnRef idx="1">
-            <a:schemeClr val="accent1"/>
-          </a:lnRef>
-          <a:fillRef idx="3">
-            <a:schemeClr val="accent1"/>
-          </a:fillRef>
-          <a:effectRef idx="2">
-            <a:schemeClr val="accent1"/>
-          </a:effectRef>
-          <a:fontRef idx="minor">
-            <a:schemeClr val="lt1"/>
-          </a:fontRef>
-        </p:style>
-        <p:txBody>
-          <a:bodyPr rtlCol="0" anchor="ctr"/>
-          <a:lstStyle/>
-          <a:p>
-            <a:pPr algn="ctr"/>
-          </a:p>
-        </p:txBody>
-      </p:sp>
-      <p:sp>
-        <p:nvSpPr>
-          <p:cNvPr id="6" name="Rectangle 5"/>
-          <p:cNvSpPr/>
-          <p:nvPr/>
-        </p:nvSpPr>
-        <p:spPr>
-          <a:xfrm>
-            <a:off x="822960" y="2286000"/>
-            <a:ext cx="91440" cy="3291840"/>
-          </a:xfrm>
-          <a:prstGeom prst="rect">
-            <a:avLst/>
-          </a:prstGeom>
-          <a:solidFill>
-            <a:srgbClr val="12746A"/>
-          </a:solidFill>
-          <a:ln>
-            <a:noFill/>
-          </a:ln>
-          <a:effectLst/>
-        </p:spPr>
-        <p:style>
-          <a:lnRef idx="1">
-            <a:schemeClr val="accent1"/>
-          </a:lnRef>
-          <a:fillRef idx="3">
-            <a:schemeClr val="accent1"/>
-          </a:fillRef>
-          <a:effectRef idx="2">
-            <a:schemeClr val="accent1"/>
-          </a:effectRef>
-          <a:fontRef idx="minor">
-            <a:schemeClr val="lt1"/>
-          </a:fontRef>
-        </p:style>
-        <p:txBody>
-          <a:bodyPr rtlCol="0" anchor="ctr"/>
-          <a:lstStyle/>
-          <a:p>
-            <a:pPr algn="ctr"/>
+            <a:ext cx="548640" cy="457200"/>
+          </a:xfrm>
+          <a:prstGeom prst="rect">
+            <a:avLst/>
+          </a:prstGeom>
+          <a:noFill/>
+        </p:spPr>
+        <p:txBody>
+          <a:bodyPr wrap="square" anchor="t" lIns="0" rIns="0" tIns="0" bIns="0">
+            <a:spAutoFit/>
+          </a:bodyPr>
+          <a:lstStyle/>
+          <a:p>
+            <a:pPr algn="l">
+              <a:lnSpc>
+                <a:spcPct val="115000"/>
+              </a:lnSpc>
+            </a:pPr>
+            <a:r>
+              <a:rPr sz="1800" b="1" i="0">
+                <a:solidFill>
+                  <a:srgbClr val="FFC53D"/>
+                </a:solidFill>
+                <a:latin typeface="Century Gothic"/>
+              </a:rPr>
+              <a:t>01</a:t>
+            </a:r>
+          </a:p>
+        </p:txBody>
+      </p:sp>
+      <p:sp>
+        <p:nvSpPr>
+          <p:cNvPr id="6" name="TextBox 5"/>
+          <p:cNvSpPr txBox="1"/>
+          <p:nvPr/>
+        </p:nvSpPr>
+        <p:spPr>
+          <a:xfrm>
+            <a:off x="1463040" y="2313432"/>
+            <a:ext cx="9326880" cy="548640"/>
+          </a:xfrm>
+          <a:prstGeom prst="rect">
+            <a:avLst/>
+          </a:prstGeom>
+          <a:noFill/>
+        </p:spPr>
+        <p:txBody>
+          <a:bodyPr wrap="square" anchor="t" lIns="0" rIns="0" tIns="0" bIns="0">
+            <a:spAutoFit/>
+          </a:bodyPr>
+          <a:lstStyle/>
+          <a:p>
+            <a:pPr algn="l">
+              <a:lnSpc>
+                <a:spcPct val="130000"/>
+              </a:lnSpc>
+            </a:pPr>
+            <a:r>
+              <a:rPr sz="1450" b="0" i="0">
+                <a:solidFill>
+                  <a:srgbClr val="E9E6F2"/>
+                </a:solidFill>
+                <a:latin typeface="Calibri"/>
+              </a:rPr>
+              <a:t>Understand before you copy — if you can't explain a line of code, don't ship it.</a:t>
+            </a:r>
           </a:p>
         </p:txBody>
       </p:sp>
@@ -7646,8 +8482,8 @@
         </p:nvSpPr>
         <p:spPr>
           <a:xfrm>
-            <a:off x="1280160" y="2697480"/>
-            <a:ext cx="9601200" cy="2560320"/>
+            <a:off x="822960" y="2999232"/>
+            <a:ext cx="548640" cy="457200"/>
           </a:xfrm>
           <a:prstGeom prst="rect">
             <a:avLst/>
@@ -7662,24 +8498,297 @@
           <a:p>
             <a:pPr algn="l">
               <a:lnSpc>
-                <a:spcPct val="155000"/>
-              </a:lnSpc>
-            </a:pPr>
-            <a:r>
-              <a:rPr sz="2000" b="0" i="0">
-                <a:solidFill>
-                  <a:srgbClr val="1C1730"/>
+                <a:spcPct val="115000"/>
+              </a:lnSpc>
+            </a:pPr>
+            <a:r>
+              <a:rPr sz="1800" b="1" i="0">
+                <a:solidFill>
+                  <a:srgbClr val="FFC53D"/>
+                </a:solidFill>
+                <a:latin typeface="Century Gothic"/>
+              </a:rPr>
+              <a:t>02</a:t>
+            </a:r>
+          </a:p>
+        </p:txBody>
+      </p:sp>
+      <p:sp>
+        <p:nvSpPr>
+          <p:cNvPr id="8" name="TextBox 7"/>
+          <p:cNvSpPr txBox="1"/>
+          <p:nvPr/>
+        </p:nvSpPr>
+        <p:spPr>
+          <a:xfrm>
+            <a:off x="1463040" y="3026664"/>
+            <a:ext cx="9326880" cy="548640"/>
+          </a:xfrm>
+          <a:prstGeom prst="rect">
+            <a:avLst/>
+          </a:prstGeom>
+          <a:noFill/>
+        </p:spPr>
+        <p:txBody>
+          <a:bodyPr wrap="square" anchor="t" lIns="0" rIns="0" tIns="0" bIns="0">
+            <a:spAutoFit/>
+          </a:bodyPr>
+          <a:lstStyle/>
+          <a:p>
+            <a:pPr algn="l">
+              <a:lnSpc>
+                <a:spcPct val="130000"/>
+              </a:lnSpc>
+            </a:pPr>
+            <a:r>
+              <a:rPr sz="1450" b="0" i="0">
+                <a:solidFill>
+                  <a:srgbClr val="E9E6F2"/>
                 </a:solidFill>
                 <a:latin typeface="Calibri"/>
               </a:rPr>
-              <a:t>A consensus mechanism is the rule set a blockchain uses to decide which block gets added next, and get the entire network to agree on it. The two you'll hear most about: Proof of Work (Bitcoin) and Proof of Stake (Ethereum, since September 2022).</a:t>
-            </a:r>
-          </a:p>
-        </p:txBody>
-      </p:sp>
-      <p:sp>
-        <p:nvSpPr>
-          <p:cNvPr id="8" name="TextBox 7"/>
+              <a:t>Testnet first, always — never deploy something you haven't tested locally and on a testnet.</a:t>
+            </a:r>
+          </a:p>
+        </p:txBody>
+      </p:sp>
+      <p:sp>
+        <p:nvSpPr>
+          <p:cNvPr id="9" name="TextBox 8"/>
+          <p:cNvSpPr txBox="1"/>
+          <p:nvPr/>
+        </p:nvSpPr>
+        <p:spPr>
+          <a:xfrm>
+            <a:off x="822960" y="3712464"/>
+            <a:ext cx="548640" cy="457200"/>
+          </a:xfrm>
+          <a:prstGeom prst="rect">
+            <a:avLst/>
+          </a:prstGeom>
+          <a:noFill/>
+        </p:spPr>
+        <p:txBody>
+          <a:bodyPr wrap="square" anchor="t" lIns="0" rIns="0" tIns="0" bIns="0">
+            <a:spAutoFit/>
+          </a:bodyPr>
+          <a:lstStyle/>
+          <a:p>
+            <a:pPr algn="l">
+              <a:lnSpc>
+                <a:spcPct val="115000"/>
+              </a:lnSpc>
+            </a:pPr>
+            <a:r>
+              <a:rPr sz="1800" b="1" i="0">
+                <a:solidFill>
+                  <a:srgbClr val="FFC53D"/>
+                </a:solidFill>
+                <a:latin typeface="Century Gothic"/>
+              </a:rPr>
+              <a:t>03</a:t>
+            </a:r>
+          </a:p>
+        </p:txBody>
+      </p:sp>
+      <p:sp>
+        <p:nvSpPr>
+          <p:cNvPr id="10" name="TextBox 9"/>
+          <p:cNvSpPr txBox="1"/>
+          <p:nvPr/>
+        </p:nvSpPr>
+        <p:spPr>
+          <a:xfrm>
+            <a:off x="1463040" y="3739896"/>
+            <a:ext cx="9326880" cy="548640"/>
+          </a:xfrm>
+          <a:prstGeom prst="rect">
+            <a:avLst/>
+          </a:prstGeom>
+          <a:noFill/>
+        </p:spPr>
+        <p:txBody>
+          <a:bodyPr wrap="square" anchor="t" lIns="0" rIns="0" tIns="0" bIns="0">
+            <a:spAutoFit/>
+          </a:bodyPr>
+          <a:lstStyle/>
+          <a:p>
+            <a:pPr algn="l">
+              <a:lnSpc>
+                <a:spcPct val="130000"/>
+              </a:lnSpc>
+            </a:pPr>
+            <a:r>
+              <a:rPr sz="1450" b="0" i="0">
+                <a:solidFill>
+                  <a:srgbClr val="E9E6F2"/>
+                </a:solidFill>
+                <a:latin typeface="Calibri"/>
+              </a:rPr>
+              <a:t>No frontend before your contract works from the command line.</a:t>
+            </a:r>
+          </a:p>
+        </p:txBody>
+      </p:sp>
+      <p:sp>
+        <p:nvSpPr>
+          <p:cNvPr id="11" name="TextBox 10"/>
+          <p:cNvSpPr txBox="1"/>
+          <p:nvPr/>
+        </p:nvSpPr>
+        <p:spPr>
+          <a:xfrm>
+            <a:off x="822960" y="4425696"/>
+            <a:ext cx="548640" cy="457200"/>
+          </a:xfrm>
+          <a:prstGeom prst="rect">
+            <a:avLst/>
+          </a:prstGeom>
+          <a:noFill/>
+        </p:spPr>
+        <p:txBody>
+          <a:bodyPr wrap="square" anchor="t" lIns="0" rIns="0" tIns="0" bIns="0">
+            <a:spAutoFit/>
+          </a:bodyPr>
+          <a:lstStyle/>
+          <a:p>
+            <a:pPr algn="l">
+              <a:lnSpc>
+                <a:spcPct val="115000"/>
+              </a:lnSpc>
+            </a:pPr>
+            <a:r>
+              <a:rPr sz="1800" b="1" i="0">
+                <a:solidFill>
+                  <a:srgbClr val="FFC53D"/>
+                </a:solidFill>
+                <a:latin typeface="Century Gothic"/>
+              </a:rPr>
+              <a:t>04</a:t>
+            </a:r>
+          </a:p>
+        </p:txBody>
+      </p:sp>
+      <p:sp>
+        <p:nvSpPr>
+          <p:cNvPr id="12" name="TextBox 11"/>
+          <p:cNvSpPr txBox="1"/>
+          <p:nvPr/>
+        </p:nvSpPr>
+        <p:spPr>
+          <a:xfrm>
+            <a:off x="1463040" y="4453128"/>
+            <a:ext cx="9326880" cy="548640"/>
+          </a:xfrm>
+          <a:prstGeom prst="rect">
+            <a:avLst/>
+          </a:prstGeom>
+          <a:noFill/>
+        </p:spPr>
+        <p:txBody>
+          <a:bodyPr wrap="square" anchor="t" lIns="0" rIns="0" tIns="0" bIns="0">
+            <a:spAutoFit/>
+          </a:bodyPr>
+          <a:lstStyle/>
+          <a:p>
+            <a:pPr algn="l">
+              <a:lnSpc>
+                <a:spcPct val="130000"/>
+              </a:lnSpc>
+            </a:pPr>
+            <a:r>
+              <a:rPr sz="1450" b="0" i="0">
+                <a:solidFill>
+                  <a:srgbClr val="E9E6F2"/>
+                </a:solidFill>
+                <a:latin typeface="Calibri"/>
+              </a:rPr>
+              <a:t>Every contract gets at least a basic test — an untested contract is unfinished.</a:t>
+            </a:r>
+          </a:p>
+        </p:txBody>
+      </p:sp>
+      <p:sp>
+        <p:nvSpPr>
+          <p:cNvPr id="13" name="TextBox 12"/>
+          <p:cNvSpPr txBox="1"/>
+          <p:nvPr/>
+        </p:nvSpPr>
+        <p:spPr>
+          <a:xfrm>
+            <a:off x="822960" y="5138928"/>
+            <a:ext cx="548640" cy="457200"/>
+          </a:xfrm>
+          <a:prstGeom prst="rect">
+            <a:avLst/>
+          </a:prstGeom>
+          <a:noFill/>
+        </p:spPr>
+        <p:txBody>
+          <a:bodyPr wrap="square" anchor="t" lIns="0" rIns="0" tIns="0" bIns="0">
+            <a:spAutoFit/>
+          </a:bodyPr>
+          <a:lstStyle/>
+          <a:p>
+            <a:pPr algn="l">
+              <a:lnSpc>
+                <a:spcPct val="115000"/>
+              </a:lnSpc>
+            </a:pPr>
+            <a:r>
+              <a:rPr sz="1800" b="1" i="0">
+                <a:solidFill>
+                  <a:srgbClr val="FFC53D"/>
+                </a:solidFill>
+                <a:latin typeface="Century Gothic"/>
+              </a:rPr>
+              <a:t>05</a:t>
+            </a:r>
+          </a:p>
+        </p:txBody>
+      </p:sp>
+      <p:sp>
+        <p:nvSpPr>
+          <p:cNvPr id="14" name="TextBox 13"/>
+          <p:cNvSpPr txBox="1"/>
+          <p:nvPr/>
+        </p:nvSpPr>
+        <p:spPr>
+          <a:xfrm>
+            <a:off x="1463040" y="5166360"/>
+            <a:ext cx="9326880" cy="548640"/>
+          </a:xfrm>
+          <a:prstGeom prst="rect">
+            <a:avLst/>
+          </a:prstGeom>
+          <a:noFill/>
+        </p:spPr>
+        <p:txBody>
+          <a:bodyPr wrap="square" anchor="t" lIns="0" rIns="0" tIns="0" bIns="0">
+            <a:spAutoFit/>
+          </a:bodyPr>
+          <a:lstStyle/>
+          <a:p>
+            <a:pPr algn="l">
+              <a:lnSpc>
+                <a:spcPct val="130000"/>
+              </a:lnSpc>
+            </a:pPr>
+            <a:r>
+              <a:rPr sz="1450" b="0" i="0">
+                <a:solidFill>
+                  <a:srgbClr val="E9E6F2"/>
+                </a:solidFill>
+                <a:latin typeface="Calibri"/>
+              </a:rPr>
+              <a:t>Treat every external call as a potential attack.</a:t>
+            </a:r>
+          </a:p>
+        </p:txBody>
+      </p:sp>
+      <p:sp>
+        <p:nvSpPr>
+          <p:cNvPr id="15" name="TextBox 14"/>
           <p:cNvSpPr txBox="1"/>
           <p:nvPr/>
         </p:nvSpPr>
@@ -7711,7 +8820,7 @@
                 </a:solidFill>
                 <a:latin typeface="Consolas"/>
               </a:rPr>
-              <a:t>03 / 15</a:t>
+              <a:t>03 / 18</a:t>
             </a:r>
           </a:p>
         </p:txBody>
@@ -7749,7 +8858,7 @@
             <a:avLst/>
           </a:prstGeom>
           <a:solidFill>
-            <a:srgbClr val="F8F6F2"/>
+            <a:srgbClr val="1C1730"/>
           </a:solidFill>
           <a:ln>
             <a:noFill/>
@@ -7778,180 +8887,48 @@
           </a:p>
         </p:txBody>
       </p:sp>
-      <p:sp>
-        <p:nvSpPr>
-          <p:cNvPr id="3" name="TextBox 2"/>
-          <p:cNvSpPr txBox="1"/>
-          <p:nvPr/>
-        </p:nvSpPr>
-        <p:spPr>
-          <a:xfrm>
-            <a:off x="822960" y="640080"/>
-            <a:ext cx="10058400" cy="365760"/>
-          </a:xfrm>
-          <a:prstGeom prst="rect">
-            <a:avLst/>
-          </a:prstGeom>
-          <a:noFill/>
-        </p:spPr>
-        <p:txBody>
-          <a:bodyPr wrap="square" anchor="t" lIns="0" rIns="0" tIns="0" bIns="0">
-            <a:spAutoFit/>
-          </a:bodyPr>
-          <a:lstStyle/>
-          <a:p>
-            <a:pPr algn="l">
-              <a:lnSpc>
-                <a:spcPct val="115000"/>
-              </a:lnSpc>
-            </a:pPr>
-            <a:r>
-              <a:rPr sz="1300" b="1" i="0">
-                <a:solidFill>
-                  <a:srgbClr val="12746A"/>
-                </a:solidFill>
-                <a:latin typeface="Calibri"/>
-              </a:rPr>
-              <a:t>TOPIC 04 — CONSENSUS</a:t>
-            </a:r>
-          </a:p>
-        </p:txBody>
-      </p:sp>
-      <p:sp>
-        <p:nvSpPr>
-          <p:cNvPr id="4" name="TextBox 3"/>
-          <p:cNvSpPr txBox="1"/>
-          <p:nvPr/>
-        </p:nvSpPr>
-        <p:spPr>
-          <a:xfrm>
-            <a:off x="8503920" y="640080"/>
-            <a:ext cx="2834640" cy="365760"/>
-          </a:xfrm>
-          <a:prstGeom prst="rect">
-            <a:avLst/>
-          </a:prstGeom>
-          <a:noFill/>
-        </p:spPr>
-        <p:txBody>
-          <a:bodyPr wrap="square" anchor="t" lIns="0" rIns="0" tIns="0" bIns="0">
-            <a:spAutoFit/>
-          </a:bodyPr>
-          <a:lstStyle/>
-          <a:p>
-            <a:pPr algn="r">
-              <a:lnSpc>
-                <a:spcPct val="115000"/>
-              </a:lnSpc>
-            </a:pPr>
-            <a:r>
-              <a:rPr sz="1200" b="1" i="0">
-                <a:solidFill>
-                  <a:srgbClr val="5C576E"/>
-                </a:solidFill>
-                <a:latin typeface="Calibri"/>
-              </a:rPr>
-              <a:t>KEY IDEA 1 / 4</a:t>
-            </a:r>
-          </a:p>
-        </p:txBody>
-      </p:sp>
-      <p:sp>
-        <p:nvSpPr>
-          <p:cNvPr id="5" name="TextBox 4"/>
-          <p:cNvSpPr txBox="1"/>
-          <p:nvPr/>
-        </p:nvSpPr>
-        <p:spPr>
-          <a:xfrm>
-            <a:off x="822960" y="1097280"/>
-            <a:ext cx="9601200" cy="1005840"/>
-          </a:xfrm>
-          <a:prstGeom prst="rect">
-            <a:avLst/>
-          </a:prstGeom>
-          <a:noFill/>
-        </p:spPr>
-        <p:txBody>
-          <a:bodyPr wrap="square" anchor="t" lIns="0" rIns="0" tIns="0" bIns="0">
-            <a:spAutoFit/>
-          </a:bodyPr>
-          <a:lstStyle/>
-          <a:p>
-            <a:pPr algn="l">
-              <a:lnSpc>
-                <a:spcPct val="105000"/>
-              </a:lnSpc>
-            </a:pPr>
-            <a:r>
-              <a:rPr sz="3200" b="1" i="0">
-                <a:solidFill>
-                  <a:srgbClr val="1C1730"/>
-                </a:solidFill>
-                <a:latin typeface="Century Gothic"/>
-              </a:rPr>
-              <a:t>Proof of Work</a:t>
-            </a:r>
-          </a:p>
-        </p:txBody>
-      </p:sp>
-      <p:sp>
-        <p:nvSpPr>
-          <p:cNvPr id="6" name="TextBox 5"/>
-          <p:cNvSpPr txBox="1"/>
-          <p:nvPr/>
-        </p:nvSpPr>
-        <p:spPr>
-          <a:xfrm>
-            <a:off x="822960" y="2148840"/>
-            <a:ext cx="9875520" cy="2011680"/>
-          </a:xfrm>
-          <a:prstGeom prst="rect">
-            <a:avLst/>
-          </a:prstGeom>
-          <a:noFill/>
-        </p:spPr>
-        <p:txBody>
-          <a:bodyPr wrap="square" anchor="t" lIns="0" rIns="0" tIns="0" bIns="0">
-            <a:spAutoFit/>
-          </a:bodyPr>
-          <a:lstStyle/>
-          <a:p>
-            <a:pPr algn="l">
-              <a:lnSpc>
-                <a:spcPct val="150000"/>
-              </a:lnSpc>
-            </a:pPr>
-            <a:r>
-              <a:rPr sz="1650" b="0" i="0">
-                <a:solidFill>
-                  <a:srgbClr val="1C1730"/>
-                </a:solidFill>
-                <a:latin typeface="Calibri"/>
-              </a:rPr>
-              <a:t>Miners burn real electricity solving a computational puzzle. Hard to solve, but instant for anyone else to verify. Cheating simply wastes the cheater's own money.</a:t>
-            </a:r>
-          </a:p>
-        </p:txBody>
-      </p:sp>
-      <p:sp>
-        <p:nvSpPr>
-          <p:cNvPr id="7" name="Rounded Rectangle 6"/>
+      <p:pic>
+        <p:nvPicPr>
+          <p:cNvPr id="3" name="Picture 2" descr="_cover_04.jpg"/>
+          <p:cNvPicPr>
+            <a:picLocks noChangeAspect="1"/>
+          </p:cNvPicPr>
+          <p:nvPr/>
+        </p:nvPicPr>
+        <p:blipFill>
+          <a:blip r:embed="rId2"/>
+          <a:stretch>
+            <a:fillRect/>
+          </a:stretch>
+        </p:blipFill>
+        <p:spPr>
+          <a:xfrm>
+            <a:off x="0" y="0"/>
+            <a:ext cx="12191695" cy="6858000"/>
+          </a:xfrm>
+          <a:prstGeom prst="rect">
+            <a:avLst/>
+          </a:prstGeom>
+        </p:spPr>
+      </p:pic>
+      <p:sp>
+        <p:nvSpPr>
+          <p:cNvPr id="4" name="Rectangle 3"/>
           <p:cNvSpPr/>
           <p:nvPr/>
         </p:nvSpPr>
         <p:spPr>
           <a:xfrm>
-            <a:off x="822960" y="4434840"/>
-            <a:ext cx="10515600" cy="1280160"/>
-          </a:xfrm>
-          <a:prstGeom prst="roundRect">
-            <a:avLst>
-              <a:gd name="adj" fmla="val 6000"/>
-            </a:avLst>
+            <a:off x="0" y="0"/>
+            <a:ext cx="12191695" cy="6858000"/>
+          </a:xfrm>
+          <a:prstGeom prst="rect">
+            <a:avLst/>
           </a:prstGeom>
           <a:solidFill>
-            <a:srgbClr val="E7F1F0"/>
+            <a:srgbClr val="1C1730">
+              <a:alpha val="45000"/>
+            </a:srgbClr>
           </a:solidFill>
           <a:ln>
             <a:noFill/>
@@ -7982,14 +8959,138 @@
       </p:sp>
       <p:sp>
         <p:nvSpPr>
+          <p:cNvPr id="5" name="Rectangle 4"/>
+          <p:cNvSpPr/>
+          <p:nvPr/>
+        </p:nvSpPr>
+        <p:spPr>
+          <a:xfrm>
+            <a:off x="0" y="0"/>
+            <a:ext cx="12191695" cy="6858000"/>
+          </a:xfrm>
+          <a:prstGeom prst="rect">
+            <a:avLst/>
+          </a:prstGeom>
+          <a:solidFill>
+            <a:srgbClr val="12746A">
+              <a:alpha val="35000"/>
+            </a:srgbClr>
+          </a:solidFill>
+          <a:ln>
+            <a:noFill/>
+          </a:ln>
+          <a:effectLst/>
+        </p:spPr>
+        <p:style>
+          <a:lnRef idx="1">
+            <a:schemeClr val="accent1"/>
+          </a:lnRef>
+          <a:fillRef idx="3">
+            <a:schemeClr val="accent1"/>
+          </a:fillRef>
+          <a:effectRef idx="2">
+            <a:schemeClr val="accent1"/>
+          </a:effectRef>
+          <a:fontRef idx="minor">
+            <a:schemeClr val="lt1"/>
+          </a:fontRef>
+        </p:style>
+        <p:txBody>
+          <a:bodyPr rtlCol="0" anchor="ctr"/>
+          <a:lstStyle/>
+          <a:p>
+            <a:pPr algn="ctr"/>
+          </a:p>
+        </p:txBody>
+      </p:sp>
+      <p:sp>
+        <p:nvSpPr>
+          <p:cNvPr id="6" name="TextBox 5"/>
+          <p:cNvSpPr txBox="1"/>
+          <p:nvPr/>
+        </p:nvSpPr>
+        <p:spPr>
+          <a:xfrm>
+            <a:off x="822960" y="502920"/>
+            <a:ext cx="9144000" cy="365760"/>
+          </a:xfrm>
+          <a:prstGeom prst="rect">
+            <a:avLst/>
+          </a:prstGeom>
+          <a:noFill/>
+        </p:spPr>
+        <p:txBody>
+          <a:bodyPr wrap="square" anchor="t" lIns="0" rIns="0" tIns="0" bIns="0">
+            <a:spAutoFit/>
+          </a:bodyPr>
+          <a:lstStyle/>
+          <a:p>
+            <a:pPr algn="l">
+              <a:lnSpc>
+                <a:spcPct val="115000"/>
+              </a:lnSpc>
+            </a:pPr>
+            <a:r>
+              <a:rPr sz="1300" b="1" i="0">
+                <a:solidFill>
+                  <a:srgbClr val="FFC53D"/>
+                </a:solidFill>
+                <a:latin typeface="Calibri"/>
+              </a:rPr>
+              <a:t>BlockchainCourse · Curriculum · Week 01 · Topic 04 of 04</a:t>
+            </a:r>
+          </a:p>
+        </p:txBody>
+      </p:sp>
+      <p:sp>
+        <p:nvSpPr>
+          <p:cNvPr id="7" name="TextBox 6"/>
+          <p:cNvSpPr txBox="1"/>
+          <p:nvPr/>
+        </p:nvSpPr>
+        <p:spPr>
+          <a:xfrm>
+            <a:off x="822960" y="1188720"/>
+            <a:ext cx="5486400" cy="1188720"/>
+          </a:xfrm>
+          <a:prstGeom prst="rect">
+            <a:avLst/>
+          </a:prstGeom>
+          <a:noFill/>
+        </p:spPr>
+        <p:txBody>
+          <a:bodyPr wrap="square" anchor="t" lIns="0" rIns="0" tIns="0" bIns="0">
+            <a:spAutoFit/>
+          </a:bodyPr>
+          <a:lstStyle/>
+          <a:p>
+            <a:pPr algn="l">
+              <a:lnSpc>
+                <a:spcPct val="115000"/>
+              </a:lnSpc>
+            </a:pPr>
+            <a:r>
+              <a:rPr sz="10000" b="1" i="0">
+                <a:solidFill>
+                  <a:srgbClr val="FFFFFF"/>
+                </a:solidFill>
+                <a:latin typeface="Century Gothic"/>
+              </a:rPr>
+              <a:t>04</a:t>
+            </a:r>
+          </a:p>
+        </p:txBody>
+      </p:sp>
+      <p:sp>
+        <p:nvSpPr>
           <p:cNvPr id="8" name="TextBox 7"/>
           <p:cNvSpPr txBox="1"/>
           <p:nvPr/>
         </p:nvSpPr>
         <p:spPr>
           <a:xfrm>
-            <a:off x="1143000" y="4617720"/>
-            <a:ext cx="9875520" cy="320040"/>
+            <a:off x="822960" y="2423160"/>
+            <a:ext cx="8961120" cy="1554480"/>
           </a:xfrm>
           <a:prstGeom prst="rect">
             <a:avLst/>
@@ -8004,63 +9105,334 @@
           <a:p>
             <a:pPr algn="l">
               <a:lnSpc>
+                <a:spcPct val="105000"/>
+              </a:lnSpc>
+            </a:pPr>
+            <a:r>
+              <a:rPr sz="4600" b="1" i="0">
+                <a:solidFill>
+                  <a:srgbClr val="FFFFFF"/>
+                </a:solidFill>
+                <a:latin typeface="Century Gothic"/>
+              </a:rPr>
+              <a:t>Consensus</a:t>
+            </a:r>
+          </a:p>
+        </p:txBody>
+      </p:sp>
+      <p:sp>
+        <p:nvSpPr>
+          <p:cNvPr id="9" name="TextBox 8"/>
+          <p:cNvSpPr txBox="1"/>
+          <p:nvPr/>
+        </p:nvSpPr>
+        <p:spPr>
+          <a:xfrm>
+            <a:off x="822960" y="4160520"/>
+            <a:ext cx="6858000" cy="1097280"/>
+          </a:xfrm>
+          <a:prstGeom prst="rect">
+            <a:avLst/>
+          </a:prstGeom>
+          <a:noFill/>
+        </p:spPr>
+        <p:txBody>
+          <a:bodyPr wrap="square" anchor="t" lIns="0" rIns="0" tIns="0" bIns="0">
+            <a:spAutoFit/>
+          </a:bodyPr>
+          <a:lstStyle/>
+          <a:p>
+            <a:pPr algn="l">
+              <a:lnSpc>
+                <a:spcPct val="125000"/>
+              </a:lnSpc>
+            </a:pPr>
+            <a:r>
+              <a:rPr sz="1900" b="0" i="0">
+                <a:solidFill>
+                  <a:srgbClr val="FFFFFF"/>
+                </a:solidFill>
+                <a:latin typeface="Calibri"/>
+              </a:rPr>
+              <a:t>How thousands of strangers agree on one shared truth, with no referee.</a:t>
+            </a:r>
+          </a:p>
+        </p:txBody>
+      </p:sp>
+      <p:sp>
+        <p:nvSpPr>
+          <p:cNvPr id="10" name="Rounded Rectangle 9"/>
+          <p:cNvSpPr/>
+          <p:nvPr/>
+        </p:nvSpPr>
+        <p:spPr>
+          <a:xfrm>
+            <a:off x="822960" y="5669280"/>
+            <a:ext cx="1100937" cy="402336"/>
+          </a:xfrm>
+          <a:prstGeom prst="roundRect">
+            <a:avLst>
+              <a:gd name="adj" fmla="val 50000"/>
+            </a:avLst>
+          </a:prstGeom>
+          <a:solidFill>
+            <a:srgbClr val="FFFFFF">
+              <a:alpha val="14000"/>
+            </a:srgbClr>
+          </a:solidFill>
+          <a:ln w="9525">
+            <a:solidFill>
+              <a:srgbClr val="FFFFFF"/>
+            </a:solidFill>
+          </a:ln>
+          <a:effectLst/>
+        </p:spPr>
+        <p:style>
+          <a:lnRef idx="1">
+            <a:schemeClr val="accent1"/>
+          </a:lnRef>
+          <a:fillRef idx="3">
+            <a:schemeClr val="accent1"/>
+          </a:fillRef>
+          <a:effectRef idx="2">
+            <a:schemeClr val="accent1"/>
+          </a:effectRef>
+          <a:fontRef idx="minor">
+            <a:schemeClr val="lt1"/>
+          </a:fontRef>
+        </p:style>
+        <p:txBody>
+          <a:bodyPr rtlCol="0" anchor="ctr" lIns="109728" rIns="109728" tIns="18288" bIns="18288" wrap="none"/>
+          <a:lstStyle/>
+          <a:p>
+            <a:pPr algn="ctr"/>
+            <a:r>
+              <a:rPr sz="1100" b="0">
+                <a:solidFill>
+                  <a:srgbClr val="DDD9E8"/>
+                </a:solidFill>
+                <a:latin typeface="Calibri"/>
+              </a:rPr>
+              <a:t>01 · Hashing</a:t>
+            </a:r>
+          </a:p>
+        </p:txBody>
+      </p:sp>
+      <p:sp>
+        <p:nvSpPr>
+          <p:cNvPr id="11" name="Rounded Rectangle 10"/>
+          <p:cNvSpPr/>
+          <p:nvPr/>
+        </p:nvSpPr>
+        <p:spPr>
+          <a:xfrm>
+            <a:off x="2070201" y="5669280"/>
+            <a:ext cx="2022652" cy="402336"/>
+          </a:xfrm>
+          <a:prstGeom prst="roundRect">
+            <a:avLst>
+              <a:gd name="adj" fmla="val 50000"/>
+            </a:avLst>
+          </a:prstGeom>
+          <a:solidFill>
+            <a:srgbClr val="FFFFFF">
+              <a:alpha val="14000"/>
+            </a:srgbClr>
+          </a:solidFill>
+          <a:ln w="9525">
+            <a:solidFill>
+              <a:srgbClr val="FFFFFF"/>
+            </a:solidFill>
+          </a:ln>
+          <a:effectLst/>
+        </p:spPr>
+        <p:style>
+          <a:lnRef idx="1">
+            <a:schemeClr val="accent1"/>
+          </a:lnRef>
+          <a:fillRef idx="3">
+            <a:schemeClr val="accent1"/>
+          </a:fillRef>
+          <a:effectRef idx="2">
+            <a:schemeClr val="accent1"/>
+          </a:effectRef>
+          <a:fontRef idx="minor">
+            <a:schemeClr val="lt1"/>
+          </a:fontRef>
+        </p:style>
+        <p:txBody>
+          <a:bodyPr rtlCol="0" anchor="ctr" lIns="109728" rIns="109728" tIns="18288" bIns="18288" wrap="none"/>
+          <a:lstStyle/>
+          <a:p>
+            <a:pPr algn="ctr"/>
+            <a:r>
+              <a:rPr sz="1100" b="0">
+                <a:solidFill>
+                  <a:srgbClr val="DDD9E8"/>
+                </a:solidFill>
+                <a:latin typeface="Calibri"/>
+              </a:rPr>
+              <a:t>02 · Public / Private Keys</a:t>
+            </a:r>
+          </a:p>
+        </p:txBody>
+      </p:sp>
+      <p:sp>
+        <p:nvSpPr>
+          <p:cNvPr id="12" name="Rounded Rectangle 11"/>
+          <p:cNvSpPr/>
+          <p:nvPr/>
+        </p:nvSpPr>
+        <p:spPr>
+          <a:xfrm>
+            <a:off x="4239157" y="5669280"/>
+            <a:ext cx="1627632" cy="402336"/>
+          </a:xfrm>
+          <a:prstGeom prst="roundRect">
+            <a:avLst>
+              <a:gd name="adj" fmla="val 50000"/>
+            </a:avLst>
+          </a:prstGeom>
+          <a:solidFill>
+            <a:srgbClr val="FFFFFF">
+              <a:alpha val="14000"/>
+            </a:srgbClr>
+          </a:solidFill>
+          <a:ln w="9525">
+            <a:solidFill>
+              <a:srgbClr val="FFFFFF"/>
+            </a:solidFill>
+          </a:ln>
+          <a:effectLst/>
+        </p:spPr>
+        <p:style>
+          <a:lnRef idx="1">
+            <a:schemeClr val="accent1"/>
+          </a:lnRef>
+          <a:fillRef idx="3">
+            <a:schemeClr val="accent1"/>
+          </a:fillRef>
+          <a:effectRef idx="2">
+            <a:schemeClr val="accent1"/>
+          </a:effectRef>
+          <a:fontRef idx="minor">
+            <a:schemeClr val="lt1"/>
+          </a:fontRef>
+        </p:style>
+        <p:txBody>
+          <a:bodyPr rtlCol="0" anchor="ctr" lIns="109728" rIns="109728" tIns="18288" bIns="18288" wrap="none"/>
+          <a:lstStyle/>
+          <a:p>
+            <a:pPr algn="ctr"/>
+            <a:r>
+              <a:rPr sz="1100" b="0">
+                <a:solidFill>
+                  <a:srgbClr val="DDD9E8"/>
+                </a:solidFill>
+                <a:latin typeface="Calibri"/>
+              </a:rPr>
+              <a:t>03 · Blocks &amp; Chains</a:t>
+            </a:r>
+          </a:p>
+        </p:txBody>
+      </p:sp>
+      <p:sp>
+        <p:nvSpPr>
+          <p:cNvPr id="13" name="Rounded Rectangle 12"/>
+          <p:cNvSpPr/>
+          <p:nvPr/>
+        </p:nvSpPr>
+        <p:spPr>
+          <a:xfrm>
+            <a:off x="6013093" y="5669280"/>
+            <a:ext cx="1232611" cy="402336"/>
+          </a:xfrm>
+          <a:prstGeom prst="roundRect">
+            <a:avLst>
+              <a:gd name="adj" fmla="val 50000"/>
+            </a:avLst>
+          </a:prstGeom>
+          <a:solidFill>
+            <a:srgbClr val="12746A"/>
+          </a:solidFill>
+          <a:ln>
+            <a:noFill/>
+          </a:ln>
+          <a:effectLst/>
+        </p:spPr>
+        <p:style>
+          <a:lnRef idx="1">
+            <a:schemeClr val="accent1"/>
+          </a:lnRef>
+          <a:fillRef idx="3">
+            <a:schemeClr val="accent1"/>
+          </a:fillRef>
+          <a:effectRef idx="2">
+            <a:schemeClr val="accent1"/>
+          </a:effectRef>
+          <a:fontRef idx="minor">
+            <a:schemeClr val="lt1"/>
+          </a:fontRef>
+        </p:style>
+        <p:txBody>
+          <a:bodyPr rtlCol="0" anchor="ctr" lIns="109728" rIns="109728" tIns="18288" bIns="18288" wrap="none"/>
+          <a:lstStyle/>
+          <a:p>
+            <a:pPr algn="ctr"/>
+            <a:r>
+              <a:rPr sz="1100" b="1">
+                <a:solidFill>
+                  <a:srgbClr val="FFFFFF"/>
+                </a:solidFill>
+                <a:latin typeface="Calibri"/>
+              </a:rPr>
+              <a:t>04 · Consensus</a:t>
+            </a:r>
+          </a:p>
+        </p:txBody>
+      </p:sp>
+      <p:sp>
+        <p:nvSpPr>
+          <p:cNvPr id="14" name="TextBox 13"/>
+          <p:cNvSpPr txBox="1"/>
+          <p:nvPr/>
+        </p:nvSpPr>
+        <p:spPr>
+          <a:xfrm>
+            <a:off x="822960" y="6446520"/>
+            <a:ext cx="8229600" cy="320040"/>
+          </a:xfrm>
+          <a:prstGeom prst="rect">
+            <a:avLst/>
+          </a:prstGeom>
+          <a:noFill/>
+        </p:spPr>
+        <p:txBody>
+          <a:bodyPr wrap="square" anchor="t" lIns="0" rIns="0" tIns="0" bIns="0">
+            <a:spAutoFit/>
+          </a:bodyPr>
+          <a:lstStyle/>
+          <a:p>
+            <a:pPr algn="l">
+              <a:lnSpc>
                 <a:spcPct val="115000"/>
               </a:lnSpc>
             </a:pPr>
             <a:r>
-              <a:rPr sz="1100" b="1" i="0">
-                <a:solidFill>
-                  <a:srgbClr val="12746A"/>
+              <a:rPr sz="1000" b="0" i="0">
+                <a:solidFill>
+                  <a:srgbClr val="E9E6F2"/>
                 </a:solidFill>
                 <a:latin typeface="Calibri"/>
               </a:rPr>
-              <a:t>EXAMPLE</a:t>
-            </a:r>
-          </a:p>
-        </p:txBody>
-      </p:sp>
-      <p:sp>
-        <p:nvSpPr>
-          <p:cNvPr id="9" name="TextBox 8"/>
-          <p:cNvSpPr txBox="1"/>
-          <p:nvPr/>
-        </p:nvSpPr>
-        <p:spPr>
-          <a:xfrm>
-            <a:off x="1143000" y="4956048"/>
-            <a:ext cx="9875520" cy="640080"/>
-          </a:xfrm>
-          <a:prstGeom prst="rect">
-            <a:avLst/>
-          </a:prstGeom>
-          <a:noFill/>
-        </p:spPr>
-        <p:txBody>
-          <a:bodyPr wrap="square" anchor="t" lIns="0" rIns="0" tIns="0" bIns="0">
-            <a:spAutoFit/>
-          </a:bodyPr>
-          <a:lstStyle/>
-          <a:p>
-            <a:pPr algn="l">
-              <a:lnSpc>
-                <a:spcPct val="130000"/>
-              </a:lnSpc>
-            </a:pPr>
-            <a:r>
-              <a:rPr sz="1400" b="0" i="0">
-                <a:solidFill>
-                  <a:srgbClr val="1C1730"/>
-                </a:solidFill>
-                <a:latin typeface="Consolas"/>
-              </a:rPr>
-              <a:t>Bitcoin targets a new block roughly every 10 minutes, difficulty adjusted every ~2 weeks.</a:t>
-            </a:r>
-          </a:p>
-        </p:txBody>
-      </p:sp>
-      <p:sp>
-        <p:nvSpPr>
-          <p:cNvPr id="10" name="TextBox 9"/>
+              <a:t>Photo: Carl Lender / Wikimedia Commons, CC BY 2.0</a:t>
+            </a:r>
+          </a:p>
+        </p:txBody>
+      </p:sp>
+      <p:sp>
+        <p:nvSpPr>
+          <p:cNvPr id="15" name="TextBox 14"/>
           <p:cNvSpPr txBox="1"/>
           <p:nvPr/>
         </p:nvSpPr>
@@ -8092,7 +9464,7 @@
                 </a:solidFill>
                 <a:latin typeface="Consolas"/>
               </a:rPr>
-              <a:t>04 / 15</a:t>
+              <a:t>04 / 18</a:t>
             </a:r>
           </a:p>
         </p:txBody>
@@ -8206,21 +9578,99 @@
         </p:nvSpPr>
         <p:spPr>
           <a:xfrm>
-            <a:off x="8503920" y="640080"/>
-            <a:ext cx="2834640" cy="365760"/>
-          </a:xfrm>
-          <a:prstGeom prst="rect">
-            <a:avLst/>
-          </a:prstGeom>
-          <a:noFill/>
-        </p:spPr>
-        <p:txBody>
-          <a:bodyPr wrap="square" anchor="t" lIns="0" rIns="0" tIns="0" bIns="0">
-            <a:spAutoFit/>
-          </a:bodyPr>
-          <a:lstStyle/>
-          <a:p>
-            <a:pPr algn="r">
+            <a:off x="822960" y="1051560"/>
+            <a:ext cx="9601200" cy="1005840"/>
+          </a:xfrm>
+          <a:prstGeom prst="rect">
+            <a:avLst/>
+          </a:prstGeom>
+          <a:noFill/>
+        </p:spPr>
+        <p:txBody>
+          <a:bodyPr wrap="square" anchor="t" lIns="0" rIns="0" tIns="0" bIns="0">
+            <a:spAutoFit/>
+          </a:bodyPr>
+          <a:lstStyle/>
+          <a:p>
+            <a:pPr algn="l">
+              <a:lnSpc>
+                <a:spcPct val="105000"/>
+              </a:lnSpc>
+            </a:pPr>
+            <a:r>
+              <a:rPr sz="3200" b="1" i="0">
+                <a:solidFill>
+                  <a:srgbClr val="1C1730"/>
+                </a:solidFill>
+                <a:latin typeface="Century Gothic"/>
+              </a:rPr>
+              <a:t>Why This Matters</a:t>
+            </a:r>
+          </a:p>
+        </p:txBody>
+      </p:sp>
+      <p:sp>
+        <p:nvSpPr>
+          <p:cNvPr id="5" name="TextBox 4"/>
+          <p:cNvSpPr txBox="1"/>
+          <p:nvPr/>
+        </p:nvSpPr>
+        <p:spPr>
+          <a:xfrm>
+            <a:off x="822960" y="1965960"/>
+            <a:ext cx="9875520" cy="1463040"/>
+          </a:xfrm>
+          <a:prstGeom prst="rect">
+            <a:avLst/>
+          </a:prstGeom>
+          <a:noFill/>
+        </p:spPr>
+        <p:txBody>
+          <a:bodyPr wrap="square" anchor="t" lIns="0" rIns="0" tIns="0" bIns="0">
+            <a:spAutoFit/>
+          </a:bodyPr>
+          <a:lstStyle/>
+          <a:p>
+            <a:pPr algn="l">
+              <a:lnSpc>
+                <a:spcPct val="140000"/>
+              </a:lnSpc>
+            </a:pPr>
+            <a:r>
+              <a:rPr sz="1600" b="0" i="0">
+                <a:solidFill>
+                  <a:srgbClr val="5C576E"/>
+                </a:solidFill>
+                <a:latin typeface="Calibri"/>
+              </a:rPr>
+              <a:t>The final piece: with no bank or admin, how do thousands of independent, possibly-dishonest computers agree on a single shared history, in the right order? This is the consensus problem, and it's the piece that makes everything from Topics 01–03 actually trustworthy at scale.</a:t>
+            </a:r>
+          </a:p>
+        </p:txBody>
+      </p:sp>
+      <p:sp>
+        <p:nvSpPr>
+          <p:cNvPr id="6" name="TextBox 5"/>
+          <p:cNvSpPr txBox="1"/>
+          <p:nvPr/>
+        </p:nvSpPr>
+        <p:spPr>
+          <a:xfrm>
+            <a:off x="822960" y="3657600"/>
+            <a:ext cx="9875520" cy="365760"/>
+          </a:xfrm>
+          <a:prstGeom prst="rect">
+            <a:avLst/>
+          </a:prstGeom>
+          <a:noFill/>
+        </p:spPr>
+        <p:txBody>
+          <a:bodyPr wrap="square" anchor="t" lIns="0" rIns="0" tIns="0" bIns="0">
+            <a:spAutoFit/>
+          </a:bodyPr>
+          <a:lstStyle/>
+          <a:p>
+            <a:pPr algn="l">
               <a:lnSpc>
                 <a:spcPct val="115000"/>
               </a:lnSpc>
@@ -8228,111 +9678,31 @@
             <a:r>
               <a:rPr sz="1200" b="1" i="0">
                 <a:solidFill>
-                  <a:srgbClr val="5C576E"/>
+                  <a:srgbClr val="12746A"/>
                 </a:solidFill>
                 <a:latin typeface="Calibri"/>
               </a:rPr>
-              <a:t>KEY IDEA 2 / 4</a:t>
-            </a:r>
-          </a:p>
-        </p:txBody>
-      </p:sp>
-      <p:sp>
-        <p:nvSpPr>
-          <p:cNvPr id="5" name="TextBox 4"/>
-          <p:cNvSpPr txBox="1"/>
-          <p:nvPr/>
-        </p:nvSpPr>
-        <p:spPr>
-          <a:xfrm>
-            <a:off x="822960" y="1097280"/>
-            <a:ext cx="9601200" cy="1005840"/>
-          </a:xfrm>
-          <a:prstGeom prst="rect">
-            <a:avLst/>
-          </a:prstGeom>
-          <a:noFill/>
-        </p:spPr>
-        <p:txBody>
-          <a:bodyPr wrap="square" anchor="t" lIns="0" rIns="0" tIns="0" bIns="0">
-            <a:spAutoFit/>
-          </a:bodyPr>
-          <a:lstStyle/>
-          <a:p>
-            <a:pPr algn="l">
-              <a:lnSpc>
-                <a:spcPct val="105000"/>
-              </a:lnSpc>
-            </a:pPr>
-            <a:r>
-              <a:rPr sz="3200" b="1" i="0">
-                <a:solidFill>
-                  <a:srgbClr val="1C1730"/>
-                </a:solidFill>
-                <a:latin typeface="Century Gothic"/>
-              </a:rPr>
-              <a:t>Proof of Stake</a:t>
-            </a:r>
-          </a:p>
-        </p:txBody>
-      </p:sp>
-      <p:sp>
-        <p:nvSpPr>
-          <p:cNvPr id="6" name="TextBox 5"/>
-          <p:cNvSpPr txBox="1"/>
-          <p:nvPr/>
-        </p:nvSpPr>
-        <p:spPr>
-          <a:xfrm>
-            <a:off x="822960" y="2148840"/>
-            <a:ext cx="9875520" cy="2011680"/>
-          </a:xfrm>
-          <a:prstGeom prst="rect">
-            <a:avLst/>
-          </a:prstGeom>
-          <a:noFill/>
-        </p:spPr>
-        <p:txBody>
-          <a:bodyPr wrap="square" anchor="t" lIns="0" rIns="0" tIns="0" bIns="0">
-            <a:spAutoFit/>
-          </a:bodyPr>
-          <a:lstStyle/>
-          <a:p>
-            <a:pPr algn="l">
-              <a:lnSpc>
-                <a:spcPct val="150000"/>
-              </a:lnSpc>
-            </a:pPr>
-            <a:r>
-              <a:rPr sz="1650" b="0" i="0">
-                <a:solidFill>
-                  <a:srgbClr val="1C1730"/>
-                </a:solidFill>
-                <a:latin typeface="Calibri"/>
-              </a:rPr>
-              <a:t>Validators lock up currency as collateral — exactly 32 ETH per validator, on Ethereum. Dishonesty gets that collateral destroyed ("slashed") by the protocol itself.</a:t>
-            </a:r>
-          </a:p>
-        </p:txBody>
-      </p:sp>
-      <p:sp>
-        <p:nvSpPr>
-          <p:cNvPr id="7" name="Rounded Rectangle 6"/>
+              <a:t>WHAT THIS SECTION COVERS</a:t>
+            </a:r>
+          </a:p>
+        </p:txBody>
+      </p:sp>
+      <p:sp>
+        <p:nvSpPr>
+          <p:cNvPr id="7" name="Rectangle 6"/>
           <p:cNvSpPr/>
           <p:nvPr/>
         </p:nvSpPr>
         <p:spPr>
           <a:xfrm>
-            <a:off x="822960" y="4434840"/>
-            <a:ext cx="10515600" cy="1280160"/>
-          </a:xfrm>
-          <a:prstGeom prst="roundRect">
-            <a:avLst>
-              <a:gd name="adj" fmla="val 6000"/>
-            </a:avLst>
+            <a:off x="822960" y="4197096"/>
+            <a:ext cx="82296" cy="82296"/>
+          </a:xfrm>
+          <a:prstGeom prst="rect">
+            <a:avLst/>
           </a:prstGeom>
           <a:solidFill>
-            <a:srgbClr val="E7F1F0"/>
+            <a:srgbClr val="12746A"/>
           </a:solidFill>
           <a:ln>
             <a:noFill/>
@@ -8369,8 +9739,8 @@
         </p:nvSpPr>
         <p:spPr>
           <a:xfrm>
-            <a:off x="1143000" y="4617720"/>
-            <a:ext cx="9875520" cy="320040"/>
+            <a:off x="1051560" y="4114800"/>
+            <a:ext cx="4709160" cy="365760"/>
           </a:xfrm>
           <a:prstGeom prst="rect">
             <a:avLst/>
@@ -8389,27 +9759,71 @@
               </a:lnSpc>
             </a:pPr>
             <a:r>
-              <a:rPr sz="1100" b="1" i="0">
-                <a:solidFill>
-                  <a:srgbClr val="12746A"/>
+              <a:rPr sz="1350" b="0" i="0">
+                <a:solidFill>
+                  <a:srgbClr val="1C1730"/>
                 </a:solidFill>
                 <a:latin typeface="Calibri"/>
               </a:rPr>
-              <a:t>EXAMPLE</a:t>
-            </a:r>
-          </a:p>
-        </p:txBody>
-      </p:sp>
-      <p:sp>
-        <p:nvSpPr>
-          <p:cNvPr id="9" name="TextBox 8"/>
-          <p:cNvSpPr txBox="1"/>
-          <p:nvPr/>
-        </p:nvSpPr>
-        <p:spPr>
-          <a:xfrm>
-            <a:off x="1143000" y="4956048"/>
-            <a:ext cx="9875520" cy="640080"/>
+              <a:t>Core concept</a:t>
+            </a:r>
+          </a:p>
+        </p:txBody>
+      </p:sp>
+      <p:sp>
+        <p:nvSpPr>
+          <p:cNvPr id="9" name="Rectangle 8"/>
+          <p:cNvSpPr/>
+          <p:nvPr/>
+        </p:nvSpPr>
+        <p:spPr>
+          <a:xfrm>
+            <a:off x="6035040" y="4197096"/>
+            <a:ext cx="82296" cy="82296"/>
+          </a:xfrm>
+          <a:prstGeom prst="rect">
+            <a:avLst/>
+          </a:prstGeom>
+          <a:solidFill>
+            <a:srgbClr val="12746A"/>
+          </a:solidFill>
+          <a:ln>
+            <a:noFill/>
+          </a:ln>
+          <a:effectLst/>
+        </p:spPr>
+        <p:style>
+          <a:lnRef idx="1">
+            <a:schemeClr val="accent1"/>
+          </a:lnRef>
+          <a:fillRef idx="3">
+            <a:schemeClr val="accent1"/>
+          </a:fillRef>
+          <a:effectRef idx="2">
+            <a:schemeClr val="accent1"/>
+          </a:effectRef>
+          <a:fontRef idx="minor">
+            <a:schemeClr val="lt1"/>
+          </a:fontRef>
+        </p:style>
+        <p:txBody>
+          <a:bodyPr rtlCol="0" anchor="ctr"/>
+          <a:lstStyle/>
+          <a:p>
+            <a:pPr algn="ctr"/>
+          </a:p>
+        </p:txBody>
+      </p:sp>
+      <p:sp>
+        <p:nvSpPr>
+          <p:cNvPr id="10" name="TextBox 9"/>
+          <p:cNvSpPr txBox="1"/>
+          <p:nvPr/>
+        </p:nvSpPr>
+        <p:spPr>
+          <a:xfrm>
+            <a:off x="6263640" y="4114800"/>
+            <a:ext cx="4709160" cy="365760"/>
           </a:xfrm>
           <a:prstGeom prst="rect">
             <a:avLst/>
@@ -8424,24 +9838,605 @@
           <a:p>
             <a:pPr algn="l">
               <a:lnSpc>
-                <a:spcPct val="130000"/>
-              </a:lnSpc>
-            </a:pPr>
-            <a:r>
-              <a:rPr sz="1400" b="0" i="0">
+                <a:spcPct val="115000"/>
+              </a:lnSpc>
+            </a:pPr>
+            <a:r>
+              <a:rPr sz="1350" b="0" i="0">
                 <a:solidFill>
                   <a:srgbClr val="1C1730"/>
                 </a:solidFill>
-                <a:latin typeface="Consolas"/>
-              </a:rPr>
-              <a:t>Ethereum switched from PoW to PoS in September 2022.</a:t>
-            </a:r>
-          </a:p>
-        </p:txBody>
-      </p:sp>
-      <p:sp>
-        <p:nvSpPr>
-          <p:cNvPr id="10" name="TextBox 9"/>
+                <a:latin typeface="Calibri"/>
+              </a:rPr>
+              <a:t>Four key ideas, one at a time</a:t>
+            </a:r>
+          </a:p>
+        </p:txBody>
+      </p:sp>
+      <p:sp>
+        <p:nvSpPr>
+          <p:cNvPr id="11" name="Rectangle 10"/>
+          <p:cNvSpPr/>
+          <p:nvPr/>
+        </p:nvSpPr>
+        <p:spPr>
+          <a:xfrm>
+            <a:off x="822960" y="4654296"/>
+            <a:ext cx="82296" cy="82296"/>
+          </a:xfrm>
+          <a:prstGeom prst="rect">
+            <a:avLst/>
+          </a:prstGeom>
+          <a:solidFill>
+            <a:srgbClr val="12746A"/>
+          </a:solidFill>
+          <a:ln>
+            <a:noFill/>
+          </a:ln>
+          <a:effectLst/>
+        </p:spPr>
+        <p:style>
+          <a:lnRef idx="1">
+            <a:schemeClr val="accent1"/>
+          </a:lnRef>
+          <a:fillRef idx="3">
+            <a:schemeClr val="accent1"/>
+          </a:fillRef>
+          <a:effectRef idx="2">
+            <a:schemeClr val="accent1"/>
+          </a:effectRef>
+          <a:fontRef idx="minor">
+            <a:schemeClr val="lt1"/>
+          </a:fontRef>
+        </p:style>
+        <p:txBody>
+          <a:bodyPr rtlCol="0" anchor="ctr"/>
+          <a:lstStyle/>
+          <a:p>
+            <a:pPr algn="ctr"/>
+          </a:p>
+        </p:txBody>
+      </p:sp>
+      <p:sp>
+        <p:nvSpPr>
+          <p:cNvPr id="12" name="TextBox 11"/>
+          <p:cNvSpPr txBox="1"/>
+          <p:nvPr/>
+        </p:nvSpPr>
+        <p:spPr>
+          <a:xfrm>
+            <a:off x="1051560" y="4572000"/>
+            <a:ext cx="4709160" cy="365760"/>
+          </a:xfrm>
+          <a:prstGeom prst="rect">
+            <a:avLst/>
+          </a:prstGeom>
+          <a:noFill/>
+        </p:spPr>
+        <p:txBody>
+          <a:bodyPr wrap="square" anchor="t" lIns="0" rIns="0" tIns="0" bIns="0">
+            <a:spAutoFit/>
+          </a:bodyPr>
+          <a:lstStyle/>
+          <a:p>
+            <a:pPr algn="l">
+              <a:lnSpc>
+                <a:spcPct val="115000"/>
+              </a:lnSpc>
+            </a:pPr>
+            <a:r>
+              <a:rPr sz="1350" b="0" i="0">
+                <a:solidFill>
+                  <a:srgbClr val="1C1730"/>
+                </a:solidFill>
+                <a:latin typeface="Calibri"/>
+              </a:rPr>
+              <a:t>A real, reproducible worked example</a:t>
+            </a:r>
+          </a:p>
+        </p:txBody>
+      </p:sp>
+      <p:sp>
+        <p:nvSpPr>
+          <p:cNvPr id="13" name="Rectangle 12"/>
+          <p:cNvSpPr/>
+          <p:nvPr/>
+        </p:nvSpPr>
+        <p:spPr>
+          <a:xfrm>
+            <a:off x="6035040" y="4654296"/>
+            <a:ext cx="82296" cy="82296"/>
+          </a:xfrm>
+          <a:prstGeom prst="rect">
+            <a:avLst/>
+          </a:prstGeom>
+          <a:solidFill>
+            <a:srgbClr val="12746A"/>
+          </a:solidFill>
+          <a:ln>
+            <a:noFill/>
+          </a:ln>
+          <a:effectLst/>
+        </p:spPr>
+        <p:style>
+          <a:lnRef idx="1">
+            <a:schemeClr val="accent1"/>
+          </a:lnRef>
+          <a:fillRef idx="3">
+            <a:schemeClr val="accent1"/>
+          </a:fillRef>
+          <a:effectRef idx="2">
+            <a:schemeClr val="accent1"/>
+          </a:effectRef>
+          <a:fontRef idx="minor">
+            <a:schemeClr val="lt1"/>
+          </a:fontRef>
+        </p:style>
+        <p:txBody>
+          <a:bodyPr rtlCol="0" anchor="ctr"/>
+          <a:lstStyle/>
+          <a:p>
+            <a:pPr algn="ctr"/>
+          </a:p>
+        </p:txBody>
+      </p:sp>
+      <p:sp>
+        <p:nvSpPr>
+          <p:cNvPr id="14" name="TextBox 13"/>
+          <p:cNvSpPr txBox="1"/>
+          <p:nvPr/>
+        </p:nvSpPr>
+        <p:spPr>
+          <a:xfrm>
+            <a:off x="6263640" y="4572000"/>
+            <a:ext cx="4709160" cy="365760"/>
+          </a:xfrm>
+          <a:prstGeom prst="rect">
+            <a:avLst/>
+          </a:prstGeom>
+          <a:noFill/>
+        </p:spPr>
+        <p:txBody>
+          <a:bodyPr wrap="square" anchor="t" lIns="0" rIns="0" tIns="0" bIns="0">
+            <a:spAutoFit/>
+          </a:bodyPr>
+          <a:lstStyle/>
+          <a:p>
+            <a:pPr algn="l">
+              <a:lnSpc>
+                <a:spcPct val="115000"/>
+              </a:lnSpc>
+            </a:pPr>
+            <a:r>
+              <a:rPr sz="1350" b="0" i="0">
+                <a:solidFill>
+                  <a:srgbClr val="1C1730"/>
+                </a:solidFill>
+                <a:latin typeface="Calibri"/>
+              </a:rPr>
+              <a:t>Real-world uses beyond blockchain</a:t>
+            </a:r>
+          </a:p>
+        </p:txBody>
+      </p:sp>
+      <p:sp>
+        <p:nvSpPr>
+          <p:cNvPr id="15" name="Rectangle 14"/>
+          <p:cNvSpPr/>
+          <p:nvPr/>
+        </p:nvSpPr>
+        <p:spPr>
+          <a:xfrm>
+            <a:off x="822960" y="5111496"/>
+            <a:ext cx="82296" cy="82296"/>
+          </a:xfrm>
+          <a:prstGeom prst="rect">
+            <a:avLst/>
+          </a:prstGeom>
+          <a:solidFill>
+            <a:srgbClr val="12746A"/>
+          </a:solidFill>
+          <a:ln>
+            <a:noFill/>
+          </a:ln>
+          <a:effectLst/>
+        </p:spPr>
+        <p:style>
+          <a:lnRef idx="1">
+            <a:schemeClr val="accent1"/>
+          </a:lnRef>
+          <a:fillRef idx="3">
+            <a:schemeClr val="accent1"/>
+          </a:fillRef>
+          <a:effectRef idx="2">
+            <a:schemeClr val="accent1"/>
+          </a:effectRef>
+          <a:fontRef idx="minor">
+            <a:schemeClr val="lt1"/>
+          </a:fontRef>
+        </p:style>
+        <p:txBody>
+          <a:bodyPr rtlCol="0" anchor="ctr"/>
+          <a:lstStyle/>
+          <a:p>
+            <a:pPr algn="ctr"/>
+          </a:p>
+        </p:txBody>
+      </p:sp>
+      <p:sp>
+        <p:nvSpPr>
+          <p:cNvPr id="16" name="TextBox 15"/>
+          <p:cNvSpPr txBox="1"/>
+          <p:nvPr/>
+        </p:nvSpPr>
+        <p:spPr>
+          <a:xfrm>
+            <a:off x="1051560" y="5029200"/>
+            <a:ext cx="4709160" cy="365760"/>
+          </a:xfrm>
+          <a:prstGeom prst="rect">
+            <a:avLst/>
+          </a:prstGeom>
+          <a:noFill/>
+        </p:spPr>
+        <p:txBody>
+          <a:bodyPr wrap="square" anchor="t" lIns="0" rIns="0" tIns="0" bIns="0">
+            <a:spAutoFit/>
+          </a:bodyPr>
+          <a:lstStyle/>
+          <a:p>
+            <a:pPr algn="l">
+              <a:lnSpc>
+                <a:spcPct val="115000"/>
+              </a:lnSpc>
+            </a:pPr>
+            <a:r>
+              <a:rPr sz="1350" b="0" i="0">
+                <a:solidFill>
+                  <a:srgbClr val="1C1730"/>
+                </a:solidFill>
+                <a:latin typeface="Calibri"/>
+              </a:rPr>
+              <a:t>A flagship case study</a:t>
+            </a:r>
+          </a:p>
+        </p:txBody>
+      </p:sp>
+      <p:sp>
+        <p:nvSpPr>
+          <p:cNvPr id="17" name="Rectangle 16"/>
+          <p:cNvSpPr/>
+          <p:nvPr/>
+        </p:nvSpPr>
+        <p:spPr>
+          <a:xfrm>
+            <a:off x="6035040" y="5111496"/>
+            <a:ext cx="82296" cy="82296"/>
+          </a:xfrm>
+          <a:prstGeom prst="rect">
+            <a:avLst/>
+          </a:prstGeom>
+          <a:solidFill>
+            <a:srgbClr val="12746A"/>
+          </a:solidFill>
+          <a:ln>
+            <a:noFill/>
+          </a:ln>
+          <a:effectLst/>
+        </p:spPr>
+        <p:style>
+          <a:lnRef idx="1">
+            <a:schemeClr val="accent1"/>
+          </a:lnRef>
+          <a:fillRef idx="3">
+            <a:schemeClr val="accent1"/>
+          </a:fillRef>
+          <a:effectRef idx="2">
+            <a:schemeClr val="accent1"/>
+          </a:effectRef>
+          <a:fontRef idx="minor">
+            <a:schemeClr val="lt1"/>
+          </a:fontRef>
+        </p:style>
+        <p:txBody>
+          <a:bodyPr rtlCol="0" anchor="ctr"/>
+          <a:lstStyle/>
+          <a:p>
+            <a:pPr algn="ctr"/>
+          </a:p>
+        </p:txBody>
+      </p:sp>
+      <p:sp>
+        <p:nvSpPr>
+          <p:cNvPr id="18" name="TextBox 17"/>
+          <p:cNvSpPr txBox="1"/>
+          <p:nvPr/>
+        </p:nvSpPr>
+        <p:spPr>
+          <a:xfrm>
+            <a:off x="6263640" y="5029200"/>
+            <a:ext cx="4709160" cy="365760"/>
+          </a:xfrm>
+          <a:prstGeom prst="rect">
+            <a:avLst/>
+          </a:prstGeom>
+          <a:noFill/>
+        </p:spPr>
+        <p:txBody>
+          <a:bodyPr wrap="square" anchor="t" lIns="0" rIns="0" tIns="0" bIns="0">
+            <a:spAutoFit/>
+          </a:bodyPr>
+          <a:lstStyle/>
+          <a:p>
+            <a:pPr algn="l">
+              <a:lnSpc>
+                <a:spcPct val="115000"/>
+              </a:lnSpc>
+            </a:pPr>
+            <a:r>
+              <a:rPr sz="1350" b="0" i="0">
+                <a:solidFill>
+                  <a:srgbClr val="1C1730"/>
+                </a:solidFill>
+                <a:latin typeface="Calibri"/>
+              </a:rPr>
+              <a:t>A real-life analogy</a:t>
+            </a:r>
+          </a:p>
+        </p:txBody>
+      </p:sp>
+      <p:sp>
+        <p:nvSpPr>
+          <p:cNvPr id="19" name="Rectangle 18"/>
+          <p:cNvSpPr/>
+          <p:nvPr/>
+        </p:nvSpPr>
+        <p:spPr>
+          <a:xfrm>
+            <a:off x="822960" y="5568696"/>
+            <a:ext cx="82296" cy="82296"/>
+          </a:xfrm>
+          <a:prstGeom prst="rect">
+            <a:avLst/>
+          </a:prstGeom>
+          <a:solidFill>
+            <a:srgbClr val="12746A"/>
+          </a:solidFill>
+          <a:ln>
+            <a:noFill/>
+          </a:ln>
+          <a:effectLst/>
+        </p:spPr>
+        <p:style>
+          <a:lnRef idx="1">
+            <a:schemeClr val="accent1"/>
+          </a:lnRef>
+          <a:fillRef idx="3">
+            <a:schemeClr val="accent1"/>
+          </a:fillRef>
+          <a:effectRef idx="2">
+            <a:schemeClr val="accent1"/>
+          </a:effectRef>
+          <a:fontRef idx="minor">
+            <a:schemeClr val="lt1"/>
+          </a:fontRef>
+        </p:style>
+        <p:txBody>
+          <a:bodyPr rtlCol="0" anchor="ctr"/>
+          <a:lstStyle/>
+          <a:p>
+            <a:pPr algn="ctr"/>
+          </a:p>
+        </p:txBody>
+      </p:sp>
+      <p:sp>
+        <p:nvSpPr>
+          <p:cNvPr id="20" name="TextBox 19"/>
+          <p:cNvSpPr txBox="1"/>
+          <p:nvPr/>
+        </p:nvSpPr>
+        <p:spPr>
+          <a:xfrm>
+            <a:off x="1051560" y="5486400"/>
+            <a:ext cx="4709160" cy="365760"/>
+          </a:xfrm>
+          <a:prstGeom prst="rect">
+            <a:avLst/>
+          </a:prstGeom>
+          <a:noFill/>
+        </p:spPr>
+        <p:txBody>
+          <a:bodyPr wrap="square" anchor="t" lIns="0" rIns="0" tIns="0" bIns="0">
+            <a:spAutoFit/>
+          </a:bodyPr>
+          <a:lstStyle/>
+          <a:p>
+            <a:pPr algn="l">
+              <a:lnSpc>
+                <a:spcPct val="115000"/>
+              </a:lnSpc>
+            </a:pPr>
+            <a:r>
+              <a:rPr sz="1350" b="0" i="0">
+                <a:solidFill>
+                  <a:srgbClr val="1C1730"/>
+                </a:solidFill>
+                <a:latin typeface="Calibri"/>
+              </a:rPr>
+              <a:t>Common misconceptions</a:t>
+            </a:r>
+          </a:p>
+        </p:txBody>
+      </p:sp>
+      <p:sp>
+        <p:nvSpPr>
+          <p:cNvPr id="21" name="Rectangle 20"/>
+          <p:cNvSpPr/>
+          <p:nvPr/>
+        </p:nvSpPr>
+        <p:spPr>
+          <a:xfrm>
+            <a:off x="6035040" y="5568696"/>
+            <a:ext cx="82296" cy="82296"/>
+          </a:xfrm>
+          <a:prstGeom prst="rect">
+            <a:avLst/>
+          </a:prstGeom>
+          <a:solidFill>
+            <a:srgbClr val="12746A"/>
+          </a:solidFill>
+          <a:ln>
+            <a:noFill/>
+          </a:ln>
+          <a:effectLst/>
+        </p:spPr>
+        <p:style>
+          <a:lnRef idx="1">
+            <a:schemeClr val="accent1"/>
+          </a:lnRef>
+          <a:fillRef idx="3">
+            <a:schemeClr val="accent1"/>
+          </a:fillRef>
+          <a:effectRef idx="2">
+            <a:schemeClr val="accent1"/>
+          </a:effectRef>
+          <a:fontRef idx="minor">
+            <a:schemeClr val="lt1"/>
+          </a:fontRef>
+        </p:style>
+        <p:txBody>
+          <a:bodyPr rtlCol="0" anchor="ctr"/>
+          <a:lstStyle/>
+          <a:p>
+            <a:pPr algn="ctr"/>
+          </a:p>
+        </p:txBody>
+      </p:sp>
+      <p:sp>
+        <p:nvSpPr>
+          <p:cNvPr id="22" name="TextBox 21"/>
+          <p:cNvSpPr txBox="1"/>
+          <p:nvPr/>
+        </p:nvSpPr>
+        <p:spPr>
+          <a:xfrm>
+            <a:off x="6263640" y="5486400"/>
+            <a:ext cx="4709160" cy="365760"/>
+          </a:xfrm>
+          <a:prstGeom prst="rect">
+            <a:avLst/>
+          </a:prstGeom>
+          <a:noFill/>
+        </p:spPr>
+        <p:txBody>
+          <a:bodyPr wrap="square" anchor="t" lIns="0" rIns="0" tIns="0" bIns="0">
+            <a:spAutoFit/>
+          </a:bodyPr>
+          <a:lstStyle/>
+          <a:p>
+            <a:pPr algn="l">
+              <a:lnSpc>
+                <a:spcPct val="115000"/>
+              </a:lnSpc>
+            </a:pPr>
+            <a:r>
+              <a:rPr sz="1350" b="0" i="0">
+                <a:solidFill>
+                  <a:srgbClr val="1C1730"/>
+                </a:solidFill>
+                <a:latin typeface="Calibri"/>
+              </a:rPr>
+              <a:t>Hands-on practice</a:t>
+            </a:r>
+          </a:p>
+        </p:txBody>
+      </p:sp>
+      <p:sp>
+        <p:nvSpPr>
+          <p:cNvPr id="23" name="Rectangle 22"/>
+          <p:cNvSpPr/>
+          <p:nvPr/>
+        </p:nvSpPr>
+        <p:spPr>
+          <a:xfrm>
+            <a:off x="822960" y="6025896"/>
+            <a:ext cx="82296" cy="82296"/>
+          </a:xfrm>
+          <a:prstGeom prst="rect">
+            <a:avLst/>
+          </a:prstGeom>
+          <a:solidFill>
+            <a:srgbClr val="12746A"/>
+          </a:solidFill>
+          <a:ln>
+            <a:noFill/>
+          </a:ln>
+          <a:effectLst/>
+        </p:spPr>
+        <p:style>
+          <a:lnRef idx="1">
+            <a:schemeClr val="accent1"/>
+          </a:lnRef>
+          <a:fillRef idx="3">
+            <a:schemeClr val="accent1"/>
+          </a:fillRef>
+          <a:effectRef idx="2">
+            <a:schemeClr val="accent1"/>
+          </a:effectRef>
+          <a:fontRef idx="minor">
+            <a:schemeClr val="lt1"/>
+          </a:fontRef>
+        </p:style>
+        <p:txBody>
+          <a:bodyPr rtlCol="0" anchor="ctr"/>
+          <a:lstStyle/>
+          <a:p>
+            <a:pPr algn="ctr"/>
+          </a:p>
+        </p:txBody>
+      </p:sp>
+      <p:sp>
+        <p:nvSpPr>
+          <p:cNvPr id="24" name="TextBox 23"/>
+          <p:cNvSpPr txBox="1"/>
+          <p:nvPr/>
+        </p:nvSpPr>
+        <p:spPr>
+          <a:xfrm>
+            <a:off x="1051560" y="5943600"/>
+            <a:ext cx="4709160" cy="365760"/>
+          </a:xfrm>
+          <a:prstGeom prst="rect">
+            <a:avLst/>
+          </a:prstGeom>
+          <a:noFill/>
+        </p:spPr>
+        <p:txBody>
+          <a:bodyPr wrap="square" anchor="t" lIns="0" rIns="0" tIns="0" bIns="0">
+            <a:spAutoFit/>
+          </a:bodyPr>
+          <a:lstStyle/>
+          <a:p>
+            <a:pPr algn="l">
+              <a:lnSpc>
+                <a:spcPct val="115000"/>
+              </a:lnSpc>
+            </a:pPr>
+            <a:r>
+              <a:rPr sz="1350" b="0" i="0">
+                <a:solidFill>
+                  <a:srgbClr val="1C1730"/>
+                </a:solidFill>
+                <a:latin typeface="Calibri"/>
+              </a:rPr>
+              <a:t>Take-home assignment</a:t>
+            </a:r>
+          </a:p>
+        </p:txBody>
+      </p:sp>
+      <p:sp>
+        <p:nvSpPr>
+          <p:cNvPr id="25" name="TextBox 24"/>
           <p:cNvSpPr txBox="1"/>
           <p:nvPr/>
         </p:nvSpPr>
@@ -8473,7 +10468,7 @@
                 </a:solidFill>
                 <a:latin typeface="Consolas"/>
               </a:rPr>
-              <a:t>05 / 15</a:t>
+              <a:t>05 / 18</a:t>
             </a:r>
           </a:p>
         </p:txBody>
@@ -8587,45 +10582,6 @@
         </p:nvSpPr>
         <p:spPr>
           <a:xfrm>
-            <a:off x="8503920" y="640080"/>
-            <a:ext cx="2834640" cy="365760"/>
-          </a:xfrm>
-          <a:prstGeom prst="rect">
-            <a:avLst/>
-          </a:prstGeom>
-          <a:noFill/>
-        </p:spPr>
-        <p:txBody>
-          <a:bodyPr wrap="square" anchor="t" lIns="0" rIns="0" tIns="0" bIns="0">
-            <a:spAutoFit/>
-          </a:bodyPr>
-          <a:lstStyle/>
-          <a:p>
-            <a:pPr algn="r">
-              <a:lnSpc>
-                <a:spcPct val="115000"/>
-              </a:lnSpc>
-            </a:pPr>
-            <a:r>
-              <a:rPr sz="1200" b="1" i="0">
-                <a:solidFill>
-                  <a:srgbClr val="5C576E"/>
-                </a:solidFill>
-                <a:latin typeface="Calibri"/>
-              </a:rPr>
-              <a:t>KEY IDEA 3 / 4</a:t>
-            </a:r>
-          </a:p>
-        </p:txBody>
-      </p:sp>
-      <p:sp>
-        <p:nvSpPr>
-          <p:cNvPr id="5" name="TextBox 4"/>
-          <p:cNvSpPr txBox="1"/>
-          <p:nvPr/>
-        </p:nvSpPr>
-        <p:spPr>
-          <a:xfrm>
             <a:off x="822960" y="1097280"/>
             <a:ext cx="9601200" cy="1005840"/>
           </a:xfrm>
@@ -8646,74 +10602,35 @@
               </a:lnSpc>
             </a:pPr>
             <a:r>
-              <a:rPr sz="3200" b="1" i="0">
+              <a:rPr sz="3400" b="1" i="0">
                 <a:solidFill>
                   <a:srgbClr val="1C1730"/>
                 </a:solidFill>
                 <a:latin typeface="Century Gothic"/>
               </a:rPr>
-              <a:t>The Byzantine Generals Problem</a:t>
-            </a:r>
-          </a:p>
-        </p:txBody>
-      </p:sp>
-      <p:sp>
-        <p:nvSpPr>
-          <p:cNvPr id="6" name="TextBox 5"/>
-          <p:cNvSpPr txBox="1"/>
-          <p:nvPr/>
-        </p:nvSpPr>
-        <p:spPr>
-          <a:xfrm>
-            <a:off x="822960" y="2148840"/>
-            <a:ext cx="9875520" cy="2011680"/>
-          </a:xfrm>
-          <a:prstGeom prst="rect">
-            <a:avLst/>
-          </a:prstGeom>
-          <a:noFill/>
-        </p:spPr>
-        <p:txBody>
-          <a:bodyPr wrap="square" anchor="t" lIns="0" rIns="0" tIns="0" bIns="0">
-            <a:spAutoFit/>
-          </a:bodyPr>
-          <a:lstStyle/>
-          <a:p>
-            <a:pPr algn="l">
-              <a:lnSpc>
-                <a:spcPct val="150000"/>
-              </a:lnSpc>
-            </a:pPr>
-            <a:r>
-              <a:rPr sz="1650" b="0" i="0">
-                <a:solidFill>
-                  <a:srgbClr val="1C1730"/>
-                </a:solidFill>
-                <a:latin typeface="Calibri"/>
-              </a:rPr>
-              <a:t>Independent generals, unreliable messengers, and possible traitors among them — how do the loyal generals still reach reliable agreement? The classic 1982 thought experiment for exactly this problem.</a:t>
-            </a:r>
-          </a:p>
-        </p:txBody>
-      </p:sp>
-      <p:sp>
-        <p:nvSpPr>
-          <p:cNvPr id="7" name="Rounded Rectangle 6"/>
+              <a:t>The Core Concept</a:t>
+            </a:r>
+          </a:p>
+        </p:txBody>
+      </p:sp>
+      <p:sp>
+        <p:nvSpPr>
+          <p:cNvPr id="5" name="Rounded Rectangle 4"/>
           <p:cNvSpPr/>
           <p:nvPr/>
         </p:nvSpPr>
         <p:spPr>
           <a:xfrm>
-            <a:off x="822960" y="4434840"/>
-            <a:ext cx="10515600" cy="1280160"/>
+            <a:off x="822960" y="2286000"/>
+            <a:ext cx="10515600" cy="3291840"/>
           </a:xfrm>
           <a:prstGeom prst="roundRect">
             <a:avLst>
-              <a:gd name="adj" fmla="val 6000"/>
+              <a:gd name="adj" fmla="val 4000"/>
             </a:avLst>
           </a:prstGeom>
           <a:solidFill>
-            <a:srgbClr val="E7F1F0"/>
+            <a:srgbClr val="FFFFFF"/>
           </a:solidFill>
           <a:ln>
             <a:noFill/>
@@ -8744,85 +10661,90 @@
       </p:sp>
       <p:sp>
         <p:nvSpPr>
+          <p:cNvPr id="6" name="Rectangle 5"/>
+          <p:cNvSpPr/>
+          <p:nvPr/>
+        </p:nvSpPr>
+        <p:spPr>
+          <a:xfrm>
+            <a:off x="822960" y="2286000"/>
+            <a:ext cx="91440" cy="3291840"/>
+          </a:xfrm>
+          <a:prstGeom prst="rect">
+            <a:avLst/>
+          </a:prstGeom>
+          <a:solidFill>
+            <a:srgbClr val="12746A"/>
+          </a:solidFill>
+          <a:ln>
+            <a:noFill/>
+          </a:ln>
+          <a:effectLst/>
+        </p:spPr>
+        <p:style>
+          <a:lnRef idx="1">
+            <a:schemeClr val="accent1"/>
+          </a:lnRef>
+          <a:fillRef idx="3">
+            <a:schemeClr val="accent1"/>
+          </a:fillRef>
+          <a:effectRef idx="2">
+            <a:schemeClr val="accent1"/>
+          </a:effectRef>
+          <a:fontRef idx="minor">
+            <a:schemeClr val="lt1"/>
+          </a:fontRef>
+        </p:style>
+        <p:txBody>
+          <a:bodyPr rtlCol="0" anchor="ctr"/>
+          <a:lstStyle/>
+          <a:p>
+            <a:pPr algn="ctr"/>
+          </a:p>
+        </p:txBody>
+      </p:sp>
+      <p:sp>
+        <p:nvSpPr>
+          <p:cNvPr id="7" name="TextBox 6"/>
+          <p:cNvSpPr txBox="1"/>
+          <p:nvPr/>
+        </p:nvSpPr>
+        <p:spPr>
+          <a:xfrm>
+            <a:off x="1280160" y="2697480"/>
+            <a:ext cx="9601200" cy="2560320"/>
+          </a:xfrm>
+          <a:prstGeom prst="rect">
+            <a:avLst/>
+          </a:prstGeom>
+          <a:noFill/>
+        </p:spPr>
+        <p:txBody>
+          <a:bodyPr wrap="square" anchor="t" lIns="0" rIns="0" tIns="0" bIns="0">
+            <a:spAutoFit/>
+          </a:bodyPr>
+          <a:lstStyle/>
+          <a:p>
+            <a:pPr algn="l">
+              <a:lnSpc>
+                <a:spcPct val="155000"/>
+              </a:lnSpc>
+            </a:pPr>
+            <a:r>
+              <a:rPr sz="2000" b="0" i="0">
+                <a:solidFill>
+                  <a:srgbClr val="1C1730"/>
+                </a:solidFill>
+                <a:latin typeface="Calibri"/>
+              </a:rPr>
+              <a:t>A consensus mechanism is the rule set a blockchain uses to decide which block gets added next, and get the entire network to agree on it. The two you'll hear most about: Proof of Work (Bitcoin) and Proof of Stake (Ethereum, since September 2022).</a:t>
+            </a:r>
+          </a:p>
+        </p:txBody>
+      </p:sp>
+      <p:sp>
+        <p:nvSpPr>
           <p:cNvPr id="8" name="TextBox 7"/>
-          <p:cNvSpPr txBox="1"/>
-          <p:nvPr/>
-        </p:nvSpPr>
-        <p:spPr>
-          <a:xfrm>
-            <a:off x="1143000" y="4617720"/>
-            <a:ext cx="9875520" cy="320040"/>
-          </a:xfrm>
-          <a:prstGeom prst="rect">
-            <a:avLst/>
-          </a:prstGeom>
-          <a:noFill/>
-        </p:spPr>
-        <p:txBody>
-          <a:bodyPr wrap="square" anchor="t" lIns="0" rIns="0" tIns="0" bIns="0">
-            <a:spAutoFit/>
-          </a:bodyPr>
-          <a:lstStyle/>
-          <a:p>
-            <a:pPr algn="l">
-              <a:lnSpc>
-                <a:spcPct val="115000"/>
-              </a:lnSpc>
-            </a:pPr>
-            <a:r>
-              <a:rPr sz="1100" b="1" i="0">
-                <a:solidFill>
-                  <a:srgbClr val="12746A"/>
-                </a:solidFill>
-                <a:latin typeface="Calibri"/>
-              </a:rPr>
-              <a:t>EXAMPLE</a:t>
-            </a:r>
-          </a:p>
-        </p:txBody>
-      </p:sp>
-      <p:sp>
-        <p:nvSpPr>
-          <p:cNvPr id="9" name="TextBox 8"/>
-          <p:cNvSpPr txBox="1"/>
-          <p:nvPr/>
-        </p:nvSpPr>
-        <p:spPr>
-          <a:xfrm>
-            <a:off x="1143000" y="4956048"/>
-            <a:ext cx="9875520" cy="640080"/>
-          </a:xfrm>
-          <a:prstGeom prst="rect">
-            <a:avLst/>
-          </a:prstGeom>
-          <a:noFill/>
-        </p:spPr>
-        <p:txBody>
-          <a:bodyPr wrap="square" anchor="t" lIns="0" rIns="0" tIns="0" bIns="0">
-            <a:spAutoFit/>
-          </a:bodyPr>
-          <a:lstStyle/>
-          <a:p>
-            <a:pPr algn="l">
-              <a:lnSpc>
-                <a:spcPct val="130000"/>
-              </a:lnSpc>
-            </a:pPr>
-            <a:r>
-              <a:rPr sz="1400" b="0" i="0">
-                <a:solidFill>
-                  <a:srgbClr val="1C1730"/>
-                </a:solidFill>
-                <a:latin typeface="Consolas"/>
-              </a:rPr>
-              <a:t>No central coordinator + some malicious participants = the consensus problem.</a:t>
-            </a:r>
-          </a:p>
-        </p:txBody>
-      </p:sp>
-      <p:sp>
-        <p:nvSpPr>
-          <p:cNvPr id="10" name="TextBox 9"/>
           <p:cNvSpPr txBox="1"/>
           <p:nvPr/>
         </p:nvSpPr>
@@ -8854,7 +10776,7 @@
                 </a:solidFill>
                 <a:latin typeface="Consolas"/>
               </a:rPr>
-              <a:t>06 / 15</a:t>
+              <a:t>06 / 18</a:t>
             </a:r>
           </a:p>
         </p:txBody>
@@ -8994,7 +10916,7 @@
                 </a:solidFill>
                 <a:latin typeface="Calibri"/>
               </a:rPr>
-              <a:t>KEY IDEA 4 / 4</a:t>
+              <a:t>KEY IDEA 1 / 4</a:t>
             </a:r>
           </a:p>
         </p:txBody>
@@ -9033,7 +10955,7 @@
                 </a:solidFill>
                 <a:latin typeface="Century Gothic"/>
               </a:rPr>
-              <a:t>The n ≥ 3f + 1 Rule</a:t>
+              <a:t>Proof of Work</a:t>
             </a:r>
           </a:p>
         </p:txBody>
@@ -9072,7 +10994,7 @@
                 </a:solidFill>
                 <a:latin typeface="Calibri"/>
               </a:rPr>
-              <a:t>A network of n nodes can tolerate up to f dishonest ones only if honest nodes outnumber dishonest ones by more than 2-to-1 — not just a simple majority.</a:t>
+              <a:t>Miners burn real electricity solving a computational puzzle. Hard to solve, but instant for anyone else to verify. Cheating simply wastes the cheater's own money.</a:t>
             </a:r>
           </a:p>
         </p:txBody>
@@ -9196,7 +11118,7 @@
                 </a:solidFill>
                 <a:latin typeface="Consolas"/>
               </a:rPr>
-              <a:t>100 nodes → tolerates at most 33 dishonest ones (100 ≥ 3×33 + 1).</a:t>
+              <a:t>Bitcoin targets a new block roughly every 10 minutes, difficulty adjusted every ~2 weeks.</a:t>
             </a:r>
           </a:p>
         </p:txBody>
@@ -9235,7 +11157,7 @@
                 </a:solidFill>
                 <a:latin typeface="Consolas"/>
               </a:rPr>
-              <a:t>07 / 15</a:t>
+              <a:t>07 / 18</a:t>
             </a:r>
           </a:p>
         </p:txBody>
@@ -9336,7 +11258,7 @@
                 </a:solidFill>
                 <a:latin typeface="Calibri"/>
               </a:rPr>
-              <a:t>WORKED EXAMPLE — PART 1</a:t>
+              <a:t>TOPIC 04 — CONSENSUS</a:t>
             </a:r>
           </a:p>
         </p:txBody>
@@ -9349,8 +11271,47 @@
         </p:nvSpPr>
         <p:spPr>
           <a:xfrm>
-            <a:off x="822960" y="1051560"/>
-            <a:ext cx="10332720" cy="1005840"/>
+            <a:off x="8503920" y="640080"/>
+            <a:ext cx="2834640" cy="365760"/>
+          </a:xfrm>
+          <a:prstGeom prst="rect">
+            <a:avLst/>
+          </a:prstGeom>
+          <a:noFill/>
+        </p:spPr>
+        <p:txBody>
+          <a:bodyPr wrap="square" anchor="t" lIns="0" rIns="0" tIns="0" bIns="0">
+            <a:spAutoFit/>
+          </a:bodyPr>
+          <a:lstStyle/>
+          <a:p>
+            <a:pPr algn="r">
+              <a:lnSpc>
+                <a:spcPct val="115000"/>
+              </a:lnSpc>
+            </a:pPr>
+            <a:r>
+              <a:rPr sz="1200" b="1" i="0">
+                <a:solidFill>
+                  <a:srgbClr val="5C576E"/>
+                </a:solidFill>
+                <a:latin typeface="Calibri"/>
+              </a:rPr>
+              <a:t>KEY IDEA 2 / 4</a:t>
+            </a:r>
+          </a:p>
+        </p:txBody>
+      </p:sp>
+      <p:sp>
+        <p:nvSpPr>
+          <p:cNvPr id="5" name="TextBox 4"/>
+          <p:cNvSpPr txBox="1"/>
+          <p:nvPr/>
+        </p:nvSpPr>
+        <p:spPr>
+          <a:xfrm>
+            <a:off x="822960" y="1097280"/>
+            <a:ext cx="9601200" cy="1005840"/>
           </a:xfrm>
           <a:prstGeom prst="rect">
             <a:avLst/>
@@ -9369,35 +11330,74 @@
               </a:lnSpc>
             </a:pPr>
             <a:r>
-              <a:rPr sz="2700" b="1" i="0">
+              <a:rPr sz="3200" b="1" i="0">
                 <a:solidFill>
                   <a:srgbClr val="1C1730"/>
                 </a:solidFill>
                 <a:latin typeface="Century Gothic"/>
               </a:rPr>
-              <a:t>The Fault-Tolerance Math, Worked With Real Numbers</a:t>
-            </a:r>
-          </a:p>
-        </p:txBody>
-      </p:sp>
-      <p:sp>
-        <p:nvSpPr>
-          <p:cNvPr id="5" name="Rounded Rectangle 4"/>
+              <a:t>Proof of Stake</a:t>
+            </a:r>
+          </a:p>
+        </p:txBody>
+      </p:sp>
+      <p:sp>
+        <p:nvSpPr>
+          <p:cNvPr id="6" name="TextBox 5"/>
+          <p:cNvSpPr txBox="1"/>
+          <p:nvPr/>
+        </p:nvSpPr>
+        <p:spPr>
+          <a:xfrm>
+            <a:off x="822960" y="2148840"/>
+            <a:ext cx="9875520" cy="2011680"/>
+          </a:xfrm>
+          <a:prstGeom prst="rect">
+            <a:avLst/>
+          </a:prstGeom>
+          <a:noFill/>
+        </p:spPr>
+        <p:txBody>
+          <a:bodyPr wrap="square" anchor="t" lIns="0" rIns="0" tIns="0" bIns="0">
+            <a:spAutoFit/>
+          </a:bodyPr>
+          <a:lstStyle/>
+          <a:p>
+            <a:pPr algn="l">
+              <a:lnSpc>
+                <a:spcPct val="150000"/>
+              </a:lnSpc>
+            </a:pPr>
+            <a:r>
+              <a:rPr sz="1650" b="0" i="0">
+                <a:solidFill>
+                  <a:srgbClr val="1C1730"/>
+                </a:solidFill>
+                <a:latin typeface="Calibri"/>
+              </a:rPr>
+              <a:t>Validators lock up currency as collateral — exactly 32 ETH per validator, on Ethereum. Dishonesty gets that collateral destroyed ("slashed") by the protocol itself.</a:t>
+            </a:r>
+          </a:p>
+        </p:txBody>
+      </p:sp>
+      <p:sp>
+        <p:nvSpPr>
+          <p:cNvPr id="7" name="Rounded Rectangle 6"/>
           <p:cNvSpPr/>
           <p:nvPr/>
         </p:nvSpPr>
         <p:spPr>
           <a:xfrm>
-            <a:off x="822960" y="1965960"/>
-            <a:ext cx="10515600" cy="3840480"/>
+            <a:off x="822960" y="4434840"/>
+            <a:ext cx="10515600" cy="1280160"/>
           </a:xfrm>
           <a:prstGeom prst="roundRect">
             <a:avLst>
-              <a:gd name="adj" fmla="val 4500"/>
+              <a:gd name="adj" fmla="val 6000"/>
             </a:avLst>
           </a:prstGeom>
           <a:solidFill>
-            <a:srgbClr val="141026"/>
+            <a:srgbClr val="E7F1F0"/>
           </a:solidFill>
           <a:ln>
             <a:noFill/>
@@ -9428,133 +11428,40 @@
       </p:sp>
       <p:sp>
         <p:nvSpPr>
-          <p:cNvPr id="6" name="Oval 5"/>
-          <p:cNvSpPr/>
-          <p:nvPr/>
-        </p:nvSpPr>
-        <p:spPr>
-          <a:xfrm>
-            <a:off x="1024128" y="2130552"/>
-            <a:ext cx="109728" cy="109728"/>
-          </a:xfrm>
-          <a:prstGeom prst="ellipse">
-            <a:avLst/>
-          </a:prstGeom>
-          <a:solidFill>
-            <a:srgbClr val="FF6459"/>
-          </a:solidFill>
-          <a:ln>
-            <a:noFill/>
-          </a:ln>
-          <a:effectLst/>
-        </p:spPr>
-        <p:style>
-          <a:lnRef idx="1">
-            <a:schemeClr val="accent1"/>
-          </a:lnRef>
-          <a:fillRef idx="3">
-            <a:schemeClr val="accent1"/>
-          </a:fillRef>
-          <a:effectRef idx="2">
-            <a:schemeClr val="accent1"/>
-          </a:effectRef>
-          <a:fontRef idx="minor">
-            <a:schemeClr val="lt1"/>
-          </a:fontRef>
-        </p:style>
-        <p:txBody>
-          <a:bodyPr rtlCol="0" anchor="ctr"/>
-          <a:lstStyle/>
-          <a:p>
-            <a:pPr algn="ctr"/>
-          </a:p>
-        </p:txBody>
-      </p:sp>
-      <p:sp>
-        <p:nvSpPr>
-          <p:cNvPr id="7" name="Oval 6"/>
-          <p:cNvSpPr/>
-          <p:nvPr/>
-        </p:nvSpPr>
-        <p:spPr>
-          <a:xfrm>
-            <a:off x="1225296" y="2130552"/>
-            <a:ext cx="109728" cy="109728"/>
-          </a:xfrm>
-          <a:prstGeom prst="ellipse">
-            <a:avLst/>
-          </a:prstGeom>
-          <a:solidFill>
-            <a:srgbClr val="FFC02E"/>
-          </a:solidFill>
-          <a:ln>
-            <a:noFill/>
-          </a:ln>
-          <a:effectLst/>
-        </p:spPr>
-        <p:style>
-          <a:lnRef idx="1">
-            <a:schemeClr val="accent1"/>
-          </a:lnRef>
-          <a:fillRef idx="3">
-            <a:schemeClr val="accent1"/>
-          </a:fillRef>
-          <a:effectRef idx="2">
-            <a:schemeClr val="accent1"/>
-          </a:effectRef>
-          <a:fontRef idx="minor">
-            <a:schemeClr val="lt1"/>
-          </a:fontRef>
-        </p:style>
-        <p:txBody>
-          <a:bodyPr rtlCol="0" anchor="ctr"/>
-          <a:lstStyle/>
-          <a:p>
-            <a:pPr algn="ctr"/>
-          </a:p>
-        </p:txBody>
-      </p:sp>
-      <p:sp>
-        <p:nvSpPr>
-          <p:cNvPr id="8" name="Oval 7"/>
-          <p:cNvSpPr/>
-          <p:nvPr/>
-        </p:nvSpPr>
-        <p:spPr>
-          <a:xfrm>
-            <a:off x="1426464" y="2130552"/>
-            <a:ext cx="109728" cy="109728"/>
-          </a:xfrm>
-          <a:prstGeom prst="ellipse">
-            <a:avLst/>
-          </a:prstGeom>
-          <a:solidFill>
-            <a:srgbClr val="28C93F"/>
-          </a:solidFill>
-          <a:ln>
-            <a:noFill/>
-          </a:ln>
-          <a:effectLst/>
-        </p:spPr>
-        <p:style>
-          <a:lnRef idx="1">
-            <a:schemeClr val="accent1"/>
-          </a:lnRef>
-          <a:fillRef idx="3">
-            <a:schemeClr val="accent1"/>
-          </a:fillRef>
-          <a:effectRef idx="2">
-            <a:schemeClr val="accent1"/>
-          </a:effectRef>
-          <a:fontRef idx="minor">
-            <a:schemeClr val="lt1"/>
-          </a:fontRef>
-        </p:style>
-        <p:txBody>
-          <a:bodyPr rtlCol="0" anchor="ctr"/>
-          <a:lstStyle/>
-          <a:p>
-            <a:pPr algn="ctr"/>
+          <p:cNvPr id="8" name="TextBox 7"/>
+          <p:cNvSpPr txBox="1"/>
+          <p:nvPr/>
+        </p:nvSpPr>
+        <p:spPr>
+          <a:xfrm>
+            <a:off x="1143000" y="4617720"/>
+            <a:ext cx="9875520" cy="320040"/>
+          </a:xfrm>
+          <a:prstGeom prst="rect">
+            <a:avLst/>
+          </a:prstGeom>
+          <a:noFill/>
+        </p:spPr>
+        <p:txBody>
+          <a:bodyPr wrap="square" anchor="t" lIns="0" rIns="0" tIns="0" bIns="0">
+            <a:spAutoFit/>
+          </a:bodyPr>
+          <a:lstStyle/>
+          <a:p>
+            <a:pPr algn="l">
+              <a:lnSpc>
+                <a:spcPct val="115000"/>
+              </a:lnSpc>
+            </a:pPr>
+            <a:r>
+              <a:rPr sz="1100" b="1" i="0">
+                <a:solidFill>
+                  <a:srgbClr val="12746A"/>
+                </a:solidFill>
+                <a:latin typeface="Calibri"/>
+              </a:rPr>
+              <a:t>EXAMPLE</a:t>
+            </a:r>
           </a:p>
         </p:txBody>
       </p:sp>
@@ -9566,8 +11473,8 @@
         </p:nvSpPr>
         <p:spPr>
           <a:xfrm>
-            <a:off x="1078992" y="2350008"/>
-            <a:ext cx="10003536" cy="3273552"/>
+            <a:off x="1143000" y="4956048"/>
+            <a:ext cx="9875520" cy="640080"/>
           </a:xfrm>
           <a:prstGeom prst="rect">
             <a:avLst/>
@@ -9582,113 +11489,17 @@
           <a:p>
             <a:pPr algn="l">
               <a:lnSpc>
-                <a:spcPct val="135000"/>
-              </a:lnSpc>
-            </a:pPr>
-            <a:r>
-              <a:rPr sz="1350" b="0">
-                <a:solidFill>
-                  <a:srgbClr val="8B84AD"/>
+                <a:spcPct val="130000"/>
+              </a:lnSpc>
+            </a:pPr>
+            <a:r>
+              <a:rPr sz="1400" b="0" i="0">
+                <a:solidFill>
+                  <a:srgbClr val="1C1730"/>
                 </a:solidFill>
                 <a:latin typeface="Consolas"/>
               </a:rPr>
-              <a:t>Total nodes (n)   Max dishonest (f)   Check</a:t>
-            </a:r>
-          </a:p>
-          <a:p>
-            <a:pPr algn="l">
-              <a:lnSpc>
-                <a:spcPct val="135000"/>
-              </a:lnSpc>
-            </a:pPr>
-            <a:r>
-              <a:rPr sz="1350" b="0">
-                <a:solidFill>
-                  <a:srgbClr val="7FE0C4"/>
-                </a:solidFill>
-                <a:latin typeface="Consolas"/>
-              </a:rPr>
-              <a:t>4                 1                    4 ≥ 3(1)+1 = 4  ✓</a:t>
-            </a:r>
-          </a:p>
-          <a:p>
-            <a:pPr algn="l">
-              <a:lnSpc>
-                <a:spcPct val="135000"/>
-              </a:lnSpc>
-            </a:pPr>
-            <a:r>
-              <a:rPr sz="1350" b="0">
-                <a:solidFill>
-                  <a:srgbClr val="7FE0C4"/>
-                </a:solidFill>
-                <a:latin typeface="Consolas"/>
-              </a:rPr>
-              <a:t>10                3                    10 ≥ 3(3)+1 = 10  ✓</a:t>
-            </a:r>
-          </a:p>
-          <a:p>
-            <a:pPr algn="l">
-              <a:lnSpc>
-                <a:spcPct val="135000"/>
-              </a:lnSpc>
-            </a:pPr>
-            <a:r>
-              <a:rPr sz="1350" b="0">
-                <a:solidFill>
-                  <a:srgbClr val="7FE0C4"/>
-                </a:solidFill>
-                <a:latin typeface="Consolas"/>
-              </a:rPr>
-              <a:t>100               33                   100 ≥ 3(33)+1 = 100  ✓</a:t>
-            </a:r>
-          </a:p>
-          <a:p>
-            <a:pPr algn="l">
-              <a:lnSpc>
-                <a:spcPct val="135000"/>
-              </a:lnSpc>
-            </a:pPr>
-            <a:r>
-              <a:rPr sz="1350" b="0">
-                <a:solidFill>
-                  <a:srgbClr val="EDE9F7"/>
-                </a:solidFill>
-                <a:latin typeface="Consolas"/>
-              </a:rPr>
-              <a:t/>
-            </a:r>
-          </a:p>
-          <a:p>
-            <a:pPr algn="l">
-              <a:lnSpc>
-                <a:spcPct val="135000"/>
-              </a:lnSpc>
-            </a:pPr>
-            <a:r>
-              <a:rPr sz="1350" b="0">
-                <a:solidFill>
-                  <a:srgbClr val="8B84AD"/>
-                </a:solidFill>
-                <a:latin typeface="Consolas"/>
-              </a:rPr>
-              <a:t># honest nodes must outnumber dishonest ones</a:t>
-            </a:r>
-          </a:p>
-          <a:p>
-            <a:pPr algn="l">
-              <a:lnSpc>
-                <a:spcPct val="135000"/>
-              </a:lnSpc>
-            </a:pPr>
-            <a:r>
-              <a:rPr sz="1350" b="0">
-                <a:solidFill>
-                  <a:srgbClr val="8B84AD"/>
-                </a:solidFill>
-                <a:latin typeface="Consolas"/>
-              </a:rPr>
-              <a:t># by MORE than 2-to-1 — not just a simple majority.</a:t>
+              <a:t>Ethereum switched from PoW to PoS in September 2022.</a:t>
             </a:r>
           </a:p>
         </p:txBody>
@@ -9696,45 +11507,6 @@
       <p:sp>
         <p:nvSpPr>
           <p:cNvPr id="10" name="TextBox 9"/>
-          <p:cNvSpPr txBox="1"/>
-          <p:nvPr/>
-        </p:nvSpPr>
-        <p:spPr>
-          <a:xfrm>
-            <a:off x="822960" y="6446520"/>
-            <a:ext cx="10058400" cy="320040"/>
-          </a:xfrm>
-          <a:prstGeom prst="rect">
-            <a:avLst/>
-          </a:prstGeom>
-          <a:noFill/>
-        </p:spPr>
-        <p:txBody>
-          <a:bodyPr wrap="square" anchor="t" lIns="0" rIns="0" tIns="0" bIns="0">
-            <a:spAutoFit/>
-          </a:bodyPr>
-          <a:lstStyle/>
-          <a:p>
-            <a:pPr algn="l">
-              <a:lnSpc>
-                <a:spcPct val="115000"/>
-              </a:lnSpc>
-            </a:pPr>
-            <a:r>
-              <a:rPr sz="1050" b="0" i="0">
-                <a:solidFill>
-                  <a:srgbClr val="5C576E"/>
-                </a:solidFill>
-                <a:latin typeface="Calibri"/>
-              </a:rPr>
-              <a:t>This is a general distributed-systems result — not specific to blockchain.</a:t>
-            </a:r>
-          </a:p>
-        </p:txBody>
-      </p:sp>
-      <p:sp>
-        <p:nvSpPr>
-          <p:cNvPr id="11" name="TextBox 10"/>
           <p:cNvSpPr txBox="1"/>
           <p:nvPr/>
         </p:nvSpPr>
@@ -9766,7 +11538,7 @@
                 </a:solidFill>
                 <a:latin typeface="Consolas"/>
               </a:rPr>
-              <a:t>08 / 15</a:t>
+              <a:t>08 / 18</a:t>
             </a:r>
           </a:p>
         </p:txBody>
@@ -9867,7 +11639,7 @@
                 </a:solidFill>
                 <a:latin typeface="Calibri"/>
               </a:rPr>
-              <a:t>WORKED EXAMPLE — PART 2</a:t>
+              <a:t>TOPIC 04 — CONSENSUS</a:t>
             </a:r>
           </a:p>
         </p:txBody>
@@ -9880,8 +11652,47 @@
         </p:nvSpPr>
         <p:spPr>
           <a:xfrm>
-            <a:off x="822960" y="1051560"/>
-            <a:ext cx="10332720" cy="1005840"/>
+            <a:off x="8503920" y="640080"/>
+            <a:ext cx="2834640" cy="365760"/>
+          </a:xfrm>
+          <a:prstGeom prst="rect">
+            <a:avLst/>
+          </a:prstGeom>
+          <a:noFill/>
+        </p:spPr>
+        <p:txBody>
+          <a:bodyPr wrap="square" anchor="t" lIns="0" rIns="0" tIns="0" bIns="0">
+            <a:spAutoFit/>
+          </a:bodyPr>
+          <a:lstStyle/>
+          <a:p>
+            <a:pPr algn="r">
+              <a:lnSpc>
+                <a:spcPct val="115000"/>
+              </a:lnSpc>
+            </a:pPr>
+            <a:r>
+              <a:rPr sz="1200" b="1" i="0">
+                <a:solidFill>
+                  <a:srgbClr val="5C576E"/>
+                </a:solidFill>
+                <a:latin typeface="Calibri"/>
+              </a:rPr>
+              <a:t>KEY IDEA 3 / 4</a:t>
+            </a:r>
+          </a:p>
+        </p:txBody>
+      </p:sp>
+      <p:sp>
+        <p:nvSpPr>
+          <p:cNvPr id="5" name="TextBox 4"/>
+          <p:cNvSpPr txBox="1"/>
+          <p:nvPr/>
+        </p:nvSpPr>
+        <p:spPr>
+          <a:xfrm>
+            <a:off x="822960" y="1097280"/>
+            <a:ext cx="9601200" cy="1005840"/>
           </a:xfrm>
           <a:prstGeom prst="rect">
             <a:avLst/>
@@ -9900,35 +11711,74 @@
               </a:lnSpc>
             </a:pPr>
             <a:r>
-              <a:rPr sz="2700" b="1" i="0">
+              <a:rPr sz="3200" b="1" i="0">
                 <a:solidFill>
                   <a:srgbClr val="1C1730"/>
                 </a:solidFill>
                 <a:latin typeface="Century Gothic"/>
               </a:rPr>
-              <a:t>A Real, Documented 51%-Attack — Ethereum Classic</a:t>
-            </a:r>
-          </a:p>
-        </p:txBody>
-      </p:sp>
-      <p:sp>
-        <p:nvSpPr>
-          <p:cNvPr id="5" name="Rounded Rectangle 4"/>
+              <a:t>The Byzantine Generals Problem</a:t>
+            </a:r>
+          </a:p>
+        </p:txBody>
+      </p:sp>
+      <p:sp>
+        <p:nvSpPr>
+          <p:cNvPr id="6" name="TextBox 5"/>
+          <p:cNvSpPr txBox="1"/>
+          <p:nvPr/>
+        </p:nvSpPr>
+        <p:spPr>
+          <a:xfrm>
+            <a:off x="822960" y="2148840"/>
+            <a:ext cx="9875520" cy="2011680"/>
+          </a:xfrm>
+          <a:prstGeom prst="rect">
+            <a:avLst/>
+          </a:prstGeom>
+          <a:noFill/>
+        </p:spPr>
+        <p:txBody>
+          <a:bodyPr wrap="square" anchor="t" lIns="0" rIns="0" tIns="0" bIns="0">
+            <a:spAutoFit/>
+          </a:bodyPr>
+          <a:lstStyle/>
+          <a:p>
+            <a:pPr algn="l">
+              <a:lnSpc>
+                <a:spcPct val="150000"/>
+              </a:lnSpc>
+            </a:pPr>
+            <a:r>
+              <a:rPr sz="1650" b="0" i="0">
+                <a:solidFill>
+                  <a:srgbClr val="1C1730"/>
+                </a:solidFill>
+                <a:latin typeface="Calibri"/>
+              </a:rPr>
+              <a:t>Independent generals, unreliable messengers, and possible traitors among them — how do the loyal generals still reach reliable agreement? The classic 1982 thought experiment for exactly this problem.</a:t>
+            </a:r>
+          </a:p>
+        </p:txBody>
+      </p:sp>
+      <p:sp>
+        <p:nvSpPr>
+          <p:cNvPr id="7" name="Rounded Rectangle 6"/>
           <p:cNvSpPr/>
           <p:nvPr/>
         </p:nvSpPr>
         <p:spPr>
           <a:xfrm>
-            <a:off x="822960" y="1965960"/>
-            <a:ext cx="10515600" cy="3840480"/>
+            <a:off x="822960" y="4434840"/>
+            <a:ext cx="10515600" cy="1280160"/>
           </a:xfrm>
           <a:prstGeom prst="roundRect">
             <a:avLst>
-              <a:gd name="adj" fmla="val 4500"/>
+              <a:gd name="adj" fmla="val 6000"/>
             </a:avLst>
           </a:prstGeom>
           <a:solidFill>
-            <a:srgbClr val="141026"/>
+            <a:srgbClr val="E7F1F0"/>
           </a:solidFill>
           <a:ln>
             <a:noFill/>
@@ -9959,133 +11809,40 @@
       </p:sp>
       <p:sp>
         <p:nvSpPr>
-          <p:cNvPr id="6" name="Oval 5"/>
-          <p:cNvSpPr/>
-          <p:nvPr/>
-        </p:nvSpPr>
-        <p:spPr>
-          <a:xfrm>
-            <a:off x="1024128" y="2130552"/>
-            <a:ext cx="109728" cy="109728"/>
-          </a:xfrm>
-          <a:prstGeom prst="ellipse">
-            <a:avLst/>
-          </a:prstGeom>
-          <a:solidFill>
-            <a:srgbClr val="FF6459"/>
-          </a:solidFill>
-          <a:ln>
-            <a:noFill/>
-          </a:ln>
-          <a:effectLst/>
-        </p:spPr>
-        <p:style>
-          <a:lnRef idx="1">
-            <a:schemeClr val="accent1"/>
-          </a:lnRef>
-          <a:fillRef idx="3">
-            <a:schemeClr val="accent1"/>
-          </a:fillRef>
-          <a:effectRef idx="2">
-            <a:schemeClr val="accent1"/>
-          </a:effectRef>
-          <a:fontRef idx="minor">
-            <a:schemeClr val="lt1"/>
-          </a:fontRef>
-        </p:style>
-        <p:txBody>
-          <a:bodyPr rtlCol="0" anchor="ctr"/>
-          <a:lstStyle/>
-          <a:p>
-            <a:pPr algn="ctr"/>
-          </a:p>
-        </p:txBody>
-      </p:sp>
-      <p:sp>
-        <p:nvSpPr>
-          <p:cNvPr id="7" name="Oval 6"/>
-          <p:cNvSpPr/>
-          <p:nvPr/>
-        </p:nvSpPr>
-        <p:spPr>
-          <a:xfrm>
-            <a:off x="1225296" y="2130552"/>
-            <a:ext cx="109728" cy="109728"/>
-          </a:xfrm>
-          <a:prstGeom prst="ellipse">
-            <a:avLst/>
-          </a:prstGeom>
-          <a:solidFill>
-            <a:srgbClr val="FFC02E"/>
-          </a:solidFill>
-          <a:ln>
-            <a:noFill/>
-          </a:ln>
-          <a:effectLst/>
-        </p:spPr>
-        <p:style>
-          <a:lnRef idx="1">
-            <a:schemeClr val="accent1"/>
-          </a:lnRef>
-          <a:fillRef idx="3">
-            <a:schemeClr val="accent1"/>
-          </a:fillRef>
-          <a:effectRef idx="2">
-            <a:schemeClr val="accent1"/>
-          </a:effectRef>
-          <a:fontRef idx="minor">
-            <a:schemeClr val="lt1"/>
-          </a:fontRef>
-        </p:style>
-        <p:txBody>
-          <a:bodyPr rtlCol="0" anchor="ctr"/>
-          <a:lstStyle/>
-          <a:p>
-            <a:pPr algn="ctr"/>
-          </a:p>
-        </p:txBody>
-      </p:sp>
-      <p:sp>
-        <p:nvSpPr>
-          <p:cNvPr id="8" name="Oval 7"/>
-          <p:cNvSpPr/>
-          <p:nvPr/>
-        </p:nvSpPr>
-        <p:spPr>
-          <a:xfrm>
-            <a:off x="1426464" y="2130552"/>
-            <a:ext cx="109728" cy="109728"/>
-          </a:xfrm>
-          <a:prstGeom prst="ellipse">
-            <a:avLst/>
-          </a:prstGeom>
-          <a:solidFill>
-            <a:srgbClr val="28C93F"/>
-          </a:solidFill>
-          <a:ln>
-            <a:noFill/>
-          </a:ln>
-          <a:effectLst/>
-        </p:spPr>
-        <p:style>
-          <a:lnRef idx="1">
-            <a:schemeClr val="accent1"/>
-          </a:lnRef>
-          <a:fillRef idx="3">
-            <a:schemeClr val="accent1"/>
-          </a:fillRef>
-          <a:effectRef idx="2">
-            <a:schemeClr val="accent1"/>
-          </a:effectRef>
-          <a:fontRef idx="minor">
-            <a:schemeClr val="lt1"/>
-          </a:fontRef>
-        </p:style>
-        <p:txBody>
-          <a:bodyPr rtlCol="0" anchor="ctr"/>
-          <a:lstStyle/>
-          <a:p>
-            <a:pPr algn="ctr"/>
+          <p:cNvPr id="8" name="TextBox 7"/>
+          <p:cNvSpPr txBox="1"/>
+          <p:nvPr/>
+        </p:nvSpPr>
+        <p:spPr>
+          <a:xfrm>
+            <a:off x="1143000" y="4617720"/>
+            <a:ext cx="9875520" cy="320040"/>
+          </a:xfrm>
+          <a:prstGeom prst="rect">
+            <a:avLst/>
+          </a:prstGeom>
+          <a:noFill/>
+        </p:spPr>
+        <p:txBody>
+          <a:bodyPr wrap="square" anchor="t" lIns="0" rIns="0" tIns="0" bIns="0">
+            <a:spAutoFit/>
+          </a:bodyPr>
+          <a:lstStyle/>
+          <a:p>
+            <a:pPr algn="l">
+              <a:lnSpc>
+                <a:spcPct val="115000"/>
+              </a:lnSpc>
+            </a:pPr>
+            <a:r>
+              <a:rPr sz="1100" b="1" i="0">
+                <a:solidFill>
+                  <a:srgbClr val="12746A"/>
+                </a:solidFill>
+                <a:latin typeface="Calibri"/>
+              </a:rPr>
+              <a:t>EXAMPLE</a:t>
+            </a:r>
           </a:p>
         </p:txBody>
       </p:sp>
@@ -10097,8 +11854,8 @@
         </p:nvSpPr>
         <p:spPr>
           <a:xfrm>
-            <a:off x="1078992" y="2350008"/>
-            <a:ext cx="10003536" cy="3273552"/>
+            <a:off x="1143000" y="4956048"/>
+            <a:ext cx="9875520" cy="640080"/>
           </a:xfrm>
           <a:prstGeom prst="rect">
             <a:avLst/>
@@ -10113,185 +11870,17 @@
           <a:p>
             <a:pPr algn="l">
               <a:lnSpc>
-                <a:spcPct val="135000"/>
-              </a:lnSpc>
-            </a:pPr>
-            <a:r>
-              <a:rPr sz="1350" b="0">
-                <a:solidFill>
-                  <a:srgbClr val="EDE9F7"/>
+                <a:spcPct val="130000"/>
+              </a:lnSpc>
+            </a:pPr>
+            <a:r>
+              <a:rPr sz="1400" b="0" i="0">
+                <a:solidFill>
+                  <a:srgbClr val="1C1730"/>
                 </a:solidFill>
                 <a:latin typeface="Consolas"/>
               </a:rPr>
-              <a:t>Jan 2019   </a:t>
-            </a:r>
-            <a:r>
-              <a:rPr sz="1350" b="1">
-                <a:solidFill>
-                  <a:srgbClr val="FF8E7D"/>
-                </a:solidFill>
-                <a:latin typeface="Consolas"/>
-              </a:rPr>
-              <a:t>$1.1M</a:t>
-            </a:r>
-            <a:r>
-              <a:rPr sz="1350" b="0">
-                <a:solidFill>
-                  <a:srgbClr val="EDE9F7"/>
-                </a:solidFill>
-                <a:latin typeface="Consolas"/>
-              </a:rPr>
-              <a:t>  double-spent (2 attacks)</a:t>
-            </a:r>
-          </a:p>
-          <a:p>
-            <a:pPr algn="l">
-              <a:lnSpc>
-                <a:spcPct val="135000"/>
-              </a:lnSpc>
-            </a:pPr>
-            <a:r>
-              <a:rPr sz="1350" b="0">
-                <a:solidFill>
-                  <a:srgbClr val="EDE9F7"/>
-                </a:solidFill>
-                <a:latin typeface="Consolas"/>
-              </a:rPr>
-              <a:t>Jul 2020   </a:t>
-            </a:r>
-            <a:r>
-              <a:rPr sz="1350" b="1">
-                <a:solidFill>
-                  <a:srgbClr val="FF8E7D"/>
-                </a:solidFill>
-                <a:latin typeface="Consolas"/>
-              </a:rPr>
-              <a:t>$5.8M</a:t>
-            </a:r>
-            <a:r>
-              <a:rPr sz="1350" b="0">
-                <a:solidFill>
-                  <a:srgbClr val="EDE9F7"/>
-                </a:solidFill>
-                <a:latin typeface="Consolas"/>
-              </a:rPr>
-              <a:t>  double-spent (1 attack)</a:t>
-            </a:r>
-          </a:p>
-          <a:p>
-            <a:pPr algn="l">
-              <a:lnSpc>
-                <a:spcPct val="135000"/>
-              </a:lnSpc>
-            </a:pPr>
-            <a:r>
-              <a:rPr sz="1350" b="0">
-                <a:solidFill>
-                  <a:srgbClr val="EDE9F7"/>
-                </a:solidFill>
-                <a:latin typeface="Consolas"/>
-              </a:rPr>
-              <a:t>Aug 2020   </a:t>
-            </a:r>
-            <a:r>
-              <a:rPr sz="1350" b="1">
-                <a:solidFill>
-                  <a:srgbClr val="FF8E7D"/>
-                </a:solidFill>
-                <a:latin typeface="Consolas"/>
-              </a:rPr>
-              <a:t>$3.2M</a:t>
-            </a:r>
-            <a:r>
-              <a:rPr sz="1350" b="0">
-                <a:solidFill>
-                  <a:srgbClr val="EDE9F7"/>
-                </a:solidFill>
-                <a:latin typeface="Consolas"/>
-              </a:rPr>
-              <a:t>  double-spent (1 attack)</a:t>
-            </a:r>
-          </a:p>
-          <a:p>
-            <a:pPr algn="l">
-              <a:lnSpc>
-                <a:spcPct val="135000"/>
-              </a:lnSpc>
-            </a:pPr>
-            <a:r>
-              <a:rPr sz="1350" b="0">
-                <a:solidFill>
-                  <a:srgbClr val="EDE9F7"/>
-                </a:solidFill>
-                <a:latin typeface="Consolas"/>
-              </a:rPr>
-              <a:t>           </a:t>
-            </a:r>
-            <a:r>
-              <a:rPr sz="1350" b="1">
-                <a:solidFill>
-                  <a:srgbClr val="FF8E7D"/>
-                </a:solidFill>
-                <a:latin typeface="Consolas"/>
-              </a:rPr>
-              <a:t>$10.1M</a:t>
-            </a:r>
-            <a:r>
-              <a:rPr sz="1350" b="0">
-                <a:solidFill>
-                  <a:srgbClr val="EDE9F7"/>
-                </a:solidFill>
-                <a:latin typeface="Consolas"/>
-              </a:rPr>
-              <a:t> total — three CONFIRMED attacks</a:t>
-            </a:r>
-          </a:p>
-          <a:p>
-            <a:pPr algn="l">
-              <a:lnSpc>
-                <a:spcPct val="135000"/>
-              </a:lnSpc>
-            </a:pPr>
-            <a:r>
-              <a:rPr sz="1350" b="0">
-                <a:solidFill>
-                  <a:srgbClr val="EDE9F7"/>
-                </a:solidFill>
-                <a:latin typeface="Consolas"/>
-              </a:rPr>
-              <a:t/>
-            </a:r>
-          </a:p>
-          <a:p>
-            <a:pPr algn="l">
-              <a:lnSpc>
-                <a:spcPct val="135000"/>
-              </a:lnSpc>
-            </a:pPr>
-            <a:r>
-              <a:rPr sz="1350" b="0">
-                <a:solidFill>
-                  <a:srgbClr val="8B84AD"/>
-                </a:solidFill>
-                <a:latin typeface="Consolas"/>
-              </a:rPr>
-              <a:t># mechanism: majority mining power secretly built an</a:t>
-            </a:r>
-          </a:p>
-          <a:p>
-            <a:pPr algn="l">
-              <a:lnSpc>
-                <a:spcPct val="135000"/>
-              </a:lnSpc>
-            </a:pPr>
-            <a:r>
-              <a:rPr sz="1350" b="0">
-                <a:solidFill>
-                  <a:srgbClr val="8B84AD"/>
-                </a:solidFill>
-                <a:latin typeface="Consolas"/>
-              </a:rPr>
-              <a:t># alternate chain, released once longer than the honest one.</a:t>
+              <a:t>No central coordinator + some malicious participants = the consensus problem.</a:t>
             </a:r>
           </a:p>
         </p:txBody>
@@ -10299,45 +11888,6 @@
       <p:sp>
         <p:nvSpPr>
           <p:cNvPr id="10" name="TextBox 9"/>
-          <p:cNvSpPr txBox="1"/>
-          <p:nvPr/>
-        </p:nvSpPr>
-        <p:spPr>
-          <a:xfrm>
-            <a:off x="822960" y="6446520"/>
-            <a:ext cx="10058400" cy="320040"/>
-          </a:xfrm>
-          <a:prstGeom prst="rect">
-            <a:avLst/>
-          </a:prstGeom>
-          <a:noFill/>
-        </p:spPr>
-        <p:txBody>
-          <a:bodyPr wrap="square" anchor="t" lIns="0" rIns="0" tIns="0" bIns="0">
-            <a:spAutoFit/>
-          </a:bodyPr>
-          <a:lstStyle/>
-          <a:p>
-            <a:pPr algn="l">
-              <a:lnSpc>
-                <a:spcPct val="115000"/>
-              </a:lnSpc>
-            </a:pPr>
-            <a:r>
-              <a:rPr sz="1050" b="0" i="0">
-                <a:solidFill>
-                  <a:srgbClr val="5C576E"/>
-                </a:solidFill>
-                <a:latin typeface="Calibri"/>
-              </a:rPr>
-              <a:t>A real, cited case — not a hypothetical. Source: Coinbase &amp; CryptoPotato incident reports.</a:t>
-            </a:r>
-          </a:p>
-        </p:txBody>
-      </p:sp>
-      <p:sp>
-        <p:nvSpPr>
-          <p:cNvPr id="11" name="TextBox 10"/>
           <p:cNvSpPr txBox="1"/>
           <p:nvPr/>
         </p:nvSpPr>
@@ -10369,7 +11919,7 @@
                 </a:solidFill>
                 <a:latin typeface="Consolas"/>
               </a:rPr>
-              <a:t>09 / 15</a:t>
+              <a:t>09 / 18</a:t>
             </a:r>
           </a:p>
         </p:txBody>
